--- a/public/documents/countries/oman.pptx
+++ b/public/documents/countries/oman.pptx
@@ -120,7 +120,7 @@
 </p:presentation>
 </file>
 
-<file path=ppt/charts/chart4.xml><?xml version="1.0" encoding="utf-8"?>
+<file path=ppt/charts/chart11.xml><?xml version="1.0" encoding="utf-8"?>
 <c:chartSpace xmlns:c="http://schemas.openxmlformats.org/drawingml/2006/chart" xmlns:a="http://schemas.openxmlformats.org/drawingml/2006/main" xmlns:r="http://schemas.openxmlformats.org/officeDocument/2006/relationships">
   <c:date1904 val="0"/>
   <c:roundedCorners val="1"/>
@@ -365,7 +365,7 @@
 </c:chartSpace>
 </file>
 
-<file path=ppt/charts/chart5.xml><?xml version="1.0" encoding="utf-8"?>
+<file path=ppt/charts/chart12.xml><?xml version="1.0" encoding="utf-8"?>
 <c:chartSpace xmlns:c="http://schemas.openxmlformats.org/drawingml/2006/chart" xmlns:a="http://schemas.openxmlformats.org/drawingml/2006/main" xmlns:r="http://schemas.openxmlformats.org/officeDocument/2006/relationships">
   <c:date1904 val="0"/>
   <c:roundedCorners val="1"/>
@@ -656,7 +656,7 @@
 </c:chartSpace>
 </file>
 
-<file path=ppt/charts/chart6.xml><?xml version="1.0" encoding="utf-8"?>
+<file path=ppt/charts/chart13.xml><?xml version="1.0" encoding="utf-8"?>
 <c:chartSpace xmlns:c="http://schemas.openxmlformats.org/drawingml/2006/chart" xmlns:a="http://schemas.openxmlformats.org/drawingml/2006/main" xmlns:r="http://schemas.openxmlformats.org/officeDocument/2006/relationships">
   <c:date1904 val="0"/>
   <c:roundedCorners val="1"/>
@@ -3006,7 +3006,7 @@
       </p:sp>
       <p:pic>
         <p:nvPicPr>
-          <p:cNvPr id="5" name="Image 1" descr="C:\Users\Utilisateur\dev\gsw-dossiers\public\images\logo-icon.png">    </p:cNvPr>
+          <p:cNvPr id="5" name="Image 1" descr="C:\Users\Utilisateur\dev\green-solutions-web\public\images\logo-icon.png">    </p:cNvPr>
           <p:cNvPicPr>
             <a:picLocks noChangeAspect="1"/>
           </p:cNvPicPr>
@@ -3030,7 +3030,7 @@
       </p:pic>
       <p:pic>
         <p:nvPicPr>
-          <p:cNvPr id="6" name="Image 2" descr="C:\Users\Utilisateur\dev\gsw-dossiers\scripts\dossiers\drapeaux\oman.png">    </p:cNvPr>
+          <p:cNvPr id="6" name="Image 2" descr="C:\Users\Utilisateur\dev\green-solutions-web\scripts\dossiers\drapeaux\oman.png">    </p:cNvPr>
           <p:cNvPicPr>
             <a:picLocks noChangeAspect="1"/>
           </p:cNvPicPr>
@@ -6202,7 +6202,7 @@
       </p:sp>
       <p:pic>
         <p:nvPicPr>
-          <p:cNvPr id="6" name="Image 1" descr="C:\Users\Utilisateur\dev\gsw-dossiers\scripts\dossiers\sceau-aim-clair.png">    </p:cNvPr>
+          <p:cNvPr id="6" name="Image 1" descr="C:\Users\Utilisateur\dev\green-solutions-web\scripts\dossiers\sceau-aim-clair.png">    </p:cNvPr>
           <p:cNvPicPr>
             <a:picLocks noChangeAspect="1"/>
           </p:cNvPicPr>

--- a/public/documents/countries/oman.pptx
+++ b/public/documents/countries/oman.pptx
@@ -19,9 +19,11 @@
     <p:sldId id="267" r:id="rId13"/>
     <p:sldId id="268" r:id="rId14"/>
     <p:sldId id="269" r:id="rId15"/>
+    <p:sldId id="270" r:id="rId16"/>
+    <p:sldId id="271" r:id="rId17"/>
   </p:sldIdLst>
   <p:notesMasterIdLst>
-    <p:notesMasterId r:id="rId16"/>
+    <p:notesMasterId r:id="rId18"/>
   </p:notesMasterIdLst>
   <p:sldSz cx="12192000" cy="6858000"/>
   <p:notesSz cx="6858000" cy="12192000"/>
@@ -120,7 +122,266 @@
 </p:presentation>
 </file>
 
-<file path=ppt/charts/chart11.xml><?xml version="1.0" encoding="utf-8"?>
+<file path=ppt/charts/chart76.xml><?xml version="1.0" encoding="utf-8"?>
+<c:chartSpace xmlns:c="http://schemas.openxmlformats.org/drawingml/2006/chart" xmlns:a="http://schemas.openxmlformats.org/drawingml/2006/main" xmlns:r="http://schemas.openxmlformats.org/officeDocument/2006/relationships">
+  <c:date1904 val="0"/>
+  <c:roundedCorners val="1"/>
+  <c:chart>
+    <c:autoTitleDeleted val="1"/>
+    <c:plotArea>
+      <c:layout/>
+      <c:barChart>
+        <c:barDir val="col"/>
+        <c:grouping val="clustered"/>
+        <c:varyColors val="0"/>
+        <c:ser>
+          <c:idx val="0"/>
+          <c:order val="0"/>
+          <c:tx>
+            <c:strRef>
+              <c:f>Sheet1!$B$1</c:f>
+              <c:strCache>
+                <c:ptCount val="1"/>
+                <c:pt idx="0">
+                  <c:v>Global index of drought number and duration</c:v>
+                </c:pt>
+              </c:strCache>
+            </c:strRef>
+          </c:tx>
+          <c:spPr>
+            <a:solidFill>
+              <a:srgbClr val="2C6E49"/>
+            </a:solidFill>
+            <a:effectLst/>
+          </c:spPr>
+          <c:invertIfNegative val="0"/>
+          <c:dLbls>
+            <c:numFmt formatCode="[$-409]0" sourceLinked="0"/>
+            <c:txPr>
+              <a:bodyPr/>
+              <a:lstStyle/>
+              <a:p>
+                <a:pPr>
+                  <a:defRPr b="0" i="0" strike="noStrike" sz="1100" u="none">
+                    <a:solidFill>
+                      <a:srgbClr val="16412B"/>
+                    </a:solidFill>
+                    <a:latin typeface="Calibri"/>
+                  </a:defRPr>
+                </a:pPr>
+              </a:p>
+            </c:txPr>
+            <c:showLegendKey val="0"/>
+            <c:showVal val="1"/>
+            <c:showCatName val="0"/>
+            <c:showSerName val="0"/>
+            <c:showPercent val="0"/>
+            <c:showBubbleSize val="0"/>
+            <c:showLeaderLines val="0"/>
+          </c:dLbls>
+          <c:dPt>
+            <c:idx val="0"/>
+            <c:invertIfNegative val="0"/>
+            <c:bubble3D val="0"/>
+            <c:spPr>
+              <a:solidFill>
+                <a:srgbClr val="2C6E49"/>
+              </a:solidFill>
+              <a:effectLst/>
+            </c:spPr>
+          </c:dPt>
+          <c:dPt>
+            <c:idx val="1"/>
+            <c:invertIfNegative val="0"/>
+            <c:bubble3D val="0"/>
+            <c:spPr>
+              <a:solidFill>
+                <a:srgbClr val="D9A441"/>
+              </a:solidFill>
+              <a:effectLst/>
+            </c:spPr>
+          </c:dPt>
+          <c:cat>
+            <c:multiLvlStrRef>
+              <c:f>Sheet1!$A$2:$A$3</c:f>
+              <c:multiLvlStrCache>
+                <c:ptCount val="2"/>
+                <c:lvl>
+                  <c:pt idx="0">
+                    <c:v>1980–1999</c:v>
+                  </c:pt>
+                  <c:pt idx="1">
+                    <c:v>Since 2000</c:v>
+                  </c:pt>
+                </c:lvl>
+              </c:multiLvlStrCache>
+            </c:multiLvlStrRef>
+          </c:cat>
+          <c:val>
+            <c:numRef>
+              <c:f>Sheet1!$B$2:$B$3</c:f>
+              <c:numCache>
+                <c:formatCode>General</c:formatCode>
+                <c:ptCount val="2"/>
+                <c:pt idx="0">
+                  <c:v>100</c:v>
+                </c:pt>
+                <c:pt idx="1">
+                  <c:v>129</c:v>
+                </c:pt>
+              </c:numCache>
+            </c:numRef>
+          </c:val>
+        </c:ser>
+        <c:dLbls>
+          <c:numFmt formatCode="[$-409]0" sourceLinked="0"/>
+          <c:txPr>
+            <a:bodyPr/>
+            <a:lstStyle/>
+            <a:p>
+              <a:pPr>
+                <a:defRPr b="0" i="0" strike="noStrike" sz="1100" u="none">
+                  <a:solidFill>
+                    <a:srgbClr val="16412B"/>
+                  </a:solidFill>
+                  <a:latin typeface="Calibri"/>
+                </a:defRPr>
+              </a:pPr>
+            </a:p>
+          </c:txPr>
+          <c:showLegendKey val="0"/>
+          <c:showVal val="1"/>
+          <c:showCatName val="0"/>
+          <c:showSerName val="0"/>
+          <c:showPercent val="0"/>
+          <c:showBubbleSize val="0"/>
+          <c:showLeaderLines val="0"/>
+        </c:dLbls>
+        <c:gapWidth val="150"/>
+        <c:overlap val="0"/>
+        <c:axId val="2094734554"/>
+        <c:axId val="2094734552"/>
+        <c:axId val="2094734556"/>
+      </c:barChart>
+      <c:catAx>
+        <c:axId val="2094734554"/>
+        <c:scaling>
+          <c:orientation val="minMax"/>
+        </c:scaling>
+        <c:delete val="0"/>
+        <c:axPos val="b"/>
+        <c:numFmt formatCode="General" sourceLinked="1"/>
+        <c:majorTickMark val="out"/>
+        <c:minorTickMark val="none"/>
+        <c:tickLblPos val="low"/>
+        <c:spPr>
+          <a:ln w="12700" cap="flat">
+            <a:solidFill>
+              <a:srgbClr val="888888"/>
+            </a:solidFill>
+            <a:prstDash val="solid"/>
+            <a:round/>
+          </a:ln>
+        </c:spPr>
+        <c:txPr>
+          <a:bodyPr/>
+          <a:lstStyle/>
+          <a:p>
+            <a:pPr>
+              <a:defRPr sz="1100" b="0" i="0" u="none" strike="noStrike">
+                <a:solidFill>
+                  <a:srgbClr val="6F7D71"/>
+                </a:solidFill>
+                <a:latin typeface="Calibri"/>
+              </a:defRPr>
+            </a:pPr>
+            <a:endParaRPr lang="en-US"/>
+          </a:p>
+        </c:txPr>
+        <c:crossAx val="2094734552"/>
+        <c:crosses val="autoZero"/>
+        <c:auto val="1"/>
+        <c:lblAlgn val="ctr"/>
+        <c:noMultiLvlLbl val="1"/>
+      </c:catAx>
+      <c:valAx>
+        <c:axId val="2094734552"/>
+        <c:scaling>
+          <c:orientation val="minMax"/>
+          <c:max val="140"/>
+          <c:min val="0"/>
+        </c:scaling>
+        <c:delete val="0"/>
+        <c:axPos val="l"/>
+        <c:majorGridlines>
+          <c:spPr>
+            <a:ln w="9525" cap="flat">
+              <a:solidFill>
+                <a:srgbClr val="E0DFD0"/>
+              </a:solidFill>
+              <a:prstDash val="solid"/>
+              <a:round/>
+            </a:ln>
+          </c:spPr>
+        </c:majorGridlines>
+        <c:numFmt formatCode="General" sourceLinked="0"/>
+        <c:majorTickMark val="out"/>
+        <c:minorTickMark val="none"/>
+        <c:tickLblPos val="nextTo"/>
+        <c:spPr>
+          <a:ln w="12700" cap="flat">
+            <a:solidFill>
+              <a:srgbClr val="888888"/>
+            </a:solidFill>
+            <a:prstDash val="solid"/>
+            <a:round/>
+          </a:ln>
+        </c:spPr>
+        <c:txPr>
+          <a:bodyPr/>
+          <a:lstStyle/>
+          <a:p>
+            <a:pPr>
+              <a:defRPr sz="1100" b="0" i="0" u="none" strike="noStrike">
+                <a:solidFill>
+                  <a:srgbClr val="6F7D71"/>
+                </a:solidFill>
+                <a:latin typeface="Calibri"/>
+              </a:defRPr>
+            </a:pPr>
+            <a:endParaRPr lang="en-US"/>
+          </a:p>
+        </c:txPr>
+        <c:crossAx val="2094734554"/>
+        <c:crosses val="autoZero"/>
+        <c:crossBetween val="between"/>
+        <c:majorUnit val="20"/>
+      </c:valAx>
+      <c:spPr>
+        <a:noFill/>
+        <a:ln>
+          <a:noFill/>
+        </a:ln>
+        <a:effectLst/>
+      </c:spPr>
+    </c:plotArea>
+    <c:plotVisOnly val="1"/>
+    <c:dispBlanksAs val="span"/>
+  </c:chart>
+  <c:spPr>
+    <a:noFill/>
+    <a:ln>
+      <a:noFill/>
+    </a:ln>
+    <a:effectLst/>
+  </c:spPr>
+  <c:externalData r:id="rId1">
+    <c:autoUpdate val="0"/>
+  </c:externalData>
+</c:chartSpace>
+</file>
+
+<file path=ppt/charts/chart77.xml><?xml version="1.0" encoding="utf-8"?>
 <c:chartSpace xmlns:c="http://schemas.openxmlformats.org/drawingml/2006/chart" xmlns:a="http://schemas.openxmlformats.org/drawingml/2006/main" xmlns:r="http://schemas.openxmlformats.org/officeDocument/2006/relationships">
   <c:date1904 val="0"/>
   <c:roundedCorners val="1"/>
@@ -365,7 +626,7 @@
 </c:chartSpace>
 </file>
 
-<file path=ppt/charts/chart12.xml><?xml version="1.0" encoding="utf-8"?>
+<file path=ppt/charts/chart78.xml><?xml version="1.0" encoding="utf-8"?>
 <c:chartSpace xmlns:c="http://schemas.openxmlformats.org/drawingml/2006/chart" xmlns:a="http://schemas.openxmlformats.org/drawingml/2006/main" xmlns:r="http://schemas.openxmlformats.org/officeDocument/2006/relationships">
   <c:date1904 val="0"/>
   <c:roundedCorners val="1"/>
@@ -656,7 +917,7 @@
 </c:chartSpace>
 </file>
 
-<file path=ppt/charts/chart13.xml><?xml version="1.0" encoding="utf-8"?>
+<file path=ppt/charts/chart79.xml><?xml version="1.0" encoding="utf-8"?>
 <c:chartSpace xmlns:c="http://schemas.openxmlformats.org/drawingml/2006/chart" xmlns:a="http://schemas.openxmlformats.org/drawingml/2006/main" xmlns:r="http://schemas.openxmlformats.org/officeDocument/2006/relationships">
   <c:date1904 val="0"/>
   <c:roundedCorners val="1"/>
@@ -1868,6 +2129,182 @@
             <a:fld id="{F7021451-1387-4CA6-816F-3879F97B5CBC}" type="slidenum">
               <a:rPr lang="en-US"/>
               <a:t>14</a:t>
+            </a:fld>
+            <a:endParaRPr lang="en-US"/>
+          </a:p>
+        </p:txBody>
+      </p:sp>
+    </p:spTree>
+    <p:extLst>
+      <p:ext uri="{BB962C8B-B14F-4D97-AF65-F5344CB8AC3E}">
+        <p14:creationId xmlns:p14="http://schemas.microsoft.com/office/powerpoint/2010/main" val="1024086991"/>
+      </p:ext>
+    </p:extLst>
+  </p:cSld>
+  <p:clrMapOvr>
+    <a:masterClrMapping/>
+  </p:clrMapOvr>
+</p:notes>
+</file>
+
+<file path=ppt/notesSlides/notesSlide15.xml><?xml version="1.0" encoding="utf-8"?>
+<p:notes xmlns:a="http://schemas.openxmlformats.org/drawingml/2006/main" xmlns:r="http://schemas.openxmlformats.org/officeDocument/2006/relationships" xmlns:p="http://schemas.openxmlformats.org/presentationml/2006/main">
+  <p:cSld>
+    <p:spTree>
+      <p:nvGrpSpPr>
+        <p:cNvPr id="1" name=""/>
+        <p:cNvGrpSpPr/>
+        <p:nvPr/>
+      </p:nvGrpSpPr>
+      <p:grpSpPr>
+        <a:xfrm>
+          <a:off x="0" y="0"/>
+          <a:ext cx="0" cy="0"/>
+          <a:chOff x="0" y="0"/>
+          <a:chExt cx="0" cy="0"/>
+        </a:xfrm>
+      </p:grpSpPr>
+      <p:sp>
+        <p:nvSpPr>
+          <p:cNvPr id="2" name="Slide Image Placeholder 1"/>
+          <p:cNvSpPr>
+            <a:spLocks noGrp="1" noRot="1" noChangeAspect="1"/>
+          </p:cNvSpPr>
+          <p:nvPr>
+            <p:ph type="sldImg"/>
+          </p:nvPr>
+        </p:nvSpPr>
+        <p:spPr/>
+      </p:sp>
+      <p:sp>
+        <p:nvSpPr>
+          <p:cNvPr id="3" name="Notes Placeholder 2"/>
+          <p:cNvSpPr>
+            <a:spLocks noGrp="1"/>
+          </p:cNvSpPr>
+          <p:nvPr>
+            <p:ph type="body" idx="1"/>
+          </p:nvPr>
+        </p:nvSpPr>
+        <p:spPr/>
+        <p:txBody>
+          <a:bodyPr/>
+          <a:lstStyle/>
+          <a:p>
+            <a:r>
+              <a:rPr lang="en-US" dirty="0"/>
+              <a:t/>
+            </a:r>
+            <a:endParaRPr lang="en-US" dirty="0"/>
+          </a:p>
+        </p:txBody>
+      </p:sp>
+      <p:sp>
+        <p:nvSpPr>
+          <p:cNvPr id="4" name="Slide Number Placeholder 3"/>
+          <p:cNvSpPr>
+            <a:spLocks noGrp="1"/>
+          </p:cNvSpPr>
+          <p:nvPr>
+            <p:ph type="sldNum" sz="quarter" idx="10"/>
+          </p:nvPr>
+        </p:nvSpPr>
+        <p:spPr/>
+        <p:txBody>
+          <a:bodyPr/>
+          <a:lstStyle/>
+          <a:p>
+            <a:fld id="{F7021451-1387-4CA6-816F-3879F97B5CBC}" type="slidenum">
+              <a:rPr lang="en-US"/>
+              <a:t>15</a:t>
+            </a:fld>
+            <a:endParaRPr lang="en-US"/>
+          </a:p>
+        </p:txBody>
+      </p:sp>
+    </p:spTree>
+    <p:extLst>
+      <p:ext uri="{BB962C8B-B14F-4D97-AF65-F5344CB8AC3E}">
+        <p14:creationId xmlns:p14="http://schemas.microsoft.com/office/powerpoint/2010/main" val="1024086991"/>
+      </p:ext>
+    </p:extLst>
+  </p:cSld>
+  <p:clrMapOvr>
+    <a:masterClrMapping/>
+  </p:clrMapOvr>
+</p:notes>
+</file>
+
+<file path=ppt/notesSlides/notesSlide16.xml><?xml version="1.0" encoding="utf-8"?>
+<p:notes xmlns:a="http://schemas.openxmlformats.org/drawingml/2006/main" xmlns:r="http://schemas.openxmlformats.org/officeDocument/2006/relationships" xmlns:p="http://schemas.openxmlformats.org/presentationml/2006/main">
+  <p:cSld>
+    <p:spTree>
+      <p:nvGrpSpPr>
+        <p:cNvPr id="1" name=""/>
+        <p:cNvGrpSpPr/>
+        <p:nvPr/>
+      </p:nvGrpSpPr>
+      <p:grpSpPr>
+        <a:xfrm>
+          <a:off x="0" y="0"/>
+          <a:ext cx="0" cy="0"/>
+          <a:chOff x="0" y="0"/>
+          <a:chExt cx="0" cy="0"/>
+        </a:xfrm>
+      </p:grpSpPr>
+      <p:sp>
+        <p:nvSpPr>
+          <p:cNvPr id="2" name="Slide Image Placeholder 1"/>
+          <p:cNvSpPr>
+            <a:spLocks noGrp="1" noRot="1" noChangeAspect="1"/>
+          </p:cNvSpPr>
+          <p:nvPr>
+            <p:ph type="sldImg"/>
+          </p:nvPr>
+        </p:nvSpPr>
+        <p:spPr/>
+      </p:sp>
+      <p:sp>
+        <p:nvSpPr>
+          <p:cNvPr id="3" name="Notes Placeholder 2"/>
+          <p:cNvSpPr>
+            <a:spLocks noGrp="1"/>
+          </p:cNvSpPr>
+          <p:nvPr>
+            <p:ph type="body" idx="1"/>
+          </p:nvPr>
+        </p:nvSpPr>
+        <p:spPr/>
+        <p:txBody>
+          <a:bodyPr/>
+          <a:lstStyle/>
+          <a:p>
+            <a:r>
+              <a:rPr lang="en-US" dirty="0"/>
+              <a:t/>
+            </a:r>
+            <a:endParaRPr lang="en-US" dirty="0"/>
+          </a:p>
+        </p:txBody>
+      </p:sp>
+      <p:sp>
+        <p:nvSpPr>
+          <p:cNvPr id="4" name="Slide Number Placeholder 3"/>
+          <p:cNvSpPr>
+            <a:spLocks noGrp="1"/>
+          </p:cNvSpPr>
+          <p:nvPr>
+            <p:ph type="sldNum" sz="quarter" idx="10"/>
+          </p:nvPr>
+        </p:nvSpPr>
+        <p:spPr/>
+        <p:txBody>
+          <a:bodyPr/>
+          <a:lstStyle/>
+          <a:p>
+            <a:fld id="{F7021451-1387-4CA6-816F-3879F97B5CBC}" type="slidenum">
+              <a:rPr lang="en-US"/>
+              <a:t>16</a:t>
             </a:fld>
             <a:endParaRPr lang="en-US"/>
           </a:p>
@@ -3006,7 +3443,7 @@
       </p:sp>
       <p:pic>
         <p:nvPicPr>
-          <p:cNvPr id="5" name="Image 1" descr="C:\Users\Utilisateur\dev\green-solutions-web\public\images\logo-icon.png">    </p:cNvPr>
+          <p:cNvPr id="5" name="Image 1" descr="/workspace/scratch/50eb4f7d8e13/green-solutions-web/public/images/logo-icon.png">    </p:cNvPr>
           <p:cNvPicPr>
             <a:picLocks noChangeAspect="1"/>
           </p:cNvPicPr>
@@ -3030,7 +3467,7 @@
       </p:pic>
       <p:pic>
         <p:nvPicPr>
-          <p:cNvPr id="6" name="Image 2" descr="C:\Users\Utilisateur\dev\green-solutions-web\scripts\dossiers\drapeaux\oman.png">    </p:cNvPr>
+          <p:cNvPr id="6" name="Image 2" descr="/workspace/scratch/50eb4f7d8e13/green-solutions-web/scripts/dossiers/drapeaux/oman.png">    </p:cNvPr>
           <p:cNvPicPr>
             <a:picLocks noChangeAspect="1"/>
           </p:cNvPicPr>
@@ -3380,7 +3817,7 @@
                 <a:ea typeface="Calibri" pitchFamily="34" charset="-122"/>
                 <a:cs typeface="Calibri" pitchFamily="34" charset="-120"/>
               </a:rPr>
-              <a:t>ORDERS OF MAGNITUDE</a:t>
+              <a:t>The rest of the range</a:t>
             </a:r>
             <a:endParaRPr lang="en-US" sz="1150" dirty="0"/>
           </a:p>
@@ -3419,42 +3856,340 @@
                 <a:ea typeface="Cambria" pitchFamily="34" charset="-122"/>
                 <a:cs typeface="Cambria" pitchFamily="34" charset="-120"/>
               </a:rPr>
-              <a:t>Expected water saving by irrigation method</a:t>
+              <a:t>Protecting crops, holding soils</a:t>
             </a:r>
             <a:endParaRPr lang="en-US" sz="3000" dirty="0"/>
           </a:p>
         </p:txBody>
       </p:sp>
-      <p:graphicFrame>
-        <p:nvGraphicFramePr>
-          <p:cNvPr id="4" name="Chart 0" descr=""/>
-          <p:cNvGraphicFramePr/>
-          <p:nvPr/>
-        </p:nvGraphicFramePr>
-        <p:xfrm>
-          <a:off x="594360" y="1783080"/>
-          <a:ext cx="7360920" cy="3977640"/>
-        </p:xfrm>
-        <a:graphic xmlns:a="http://schemas.openxmlformats.org/drawingml/2006/main">
-          <a:graphicData uri="http://schemas.openxmlformats.org/drawingml/2006/chart">
-            <c:chart xmlns:c="http://schemas.openxmlformats.org/drawingml/2006/chart" r:id="rId1"/>
-          </a:graphicData>
-        </a:graphic>
-      </p:graphicFrame>
-      <p:sp>
-        <p:nvSpPr>
-          <p:cNvPr id="5" name="Shape 2"/>
+      <p:sp>
+        <p:nvSpPr>
+          <p:cNvPr id="4" name="Text 2"/>
+          <p:cNvSpPr txBox="1"/>
+          <p:nvPr/>
+        </p:nvSpPr>
+        <p:spPr>
+          <a:xfrm>
+            <a:off x="594360" y="1783080"/>
+            <a:ext cx="5227168" cy="411480"/>
+          </a:xfrm>
+          <a:prstGeom prst="rect">
+            <a:avLst/>
+          </a:prstGeom>
+          <a:noFill/>
+          <a:ln/>
+        </p:spPr>
+        <p:txBody>
+          <a:bodyPr wrap="square" lIns="0" tIns="0" rIns="0" bIns="0" rtlCol="0" anchor="ctr"/>
+          <a:lstStyle/>
+          <a:p>
+            <a:pPr algn="l" indent="0" marL="0">
+              <a:buNone/>
+            </a:pPr>
+            <a:r>
+              <a:rPr lang="en-US" sz="1600" b="1" dirty="0">
+                <a:solidFill>
+                  <a:srgbClr val="2C6E49"/>
+                </a:solidFill>
+                <a:latin typeface="Cambria" pitchFamily="34" charset="0"/>
+                <a:ea typeface="Cambria" pitchFamily="34" charset="-122"/>
+                <a:cs typeface="Cambria" pitchFamily="34" charset="-120"/>
+              </a:rPr>
+              <a:t>NAPEMA® — protection without residue</a:t>
+            </a:r>
+            <a:endParaRPr lang="en-US" sz="1600" dirty="0"/>
+          </a:p>
+        </p:txBody>
+      </p:sp>
+      <p:sp>
+        <p:nvSpPr>
+          <p:cNvPr id="5" name="Text 3"/>
+          <p:cNvSpPr txBox="1"/>
+          <p:nvPr/>
+        </p:nvSpPr>
+        <p:spPr>
+          <a:xfrm>
+            <a:off x="594360" y="2286000"/>
+            <a:ext cx="5227168" cy="2468880"/>
+          </a:xfrm>
+          <a:prstGeom prst="rect">
+            <a:avLst/>
+          </a:prstGeom>
+          <a:noFill/>
+          <a:ln/>
+        </p:spPr>
+        <p:txBody>
+          <a:bodyPr wrap="square" lIns="0" tIns="0" rIns="0" bIns="0" rtlCol="0" anchor="t"/>
+          <a:lstStyle/>
+          <a:p>
+            <a:pPr algn="l" marL="342900" indent="-342900">
+              <a:lnSpc>
+                <a:spcPct val="122000"/>
+              </a:lnSpc>
+              <a:spcAft>
+                <a:spcPts val="1000"/>
+              </a:spcAft>
+              <a:buSzPct val="100000"/>
+              <a:buChar char="•"/>
+            </a:pPr>
+            <a:r>
+              <a:rPr lang="en-US" sz="1350" dirty="0">
+                <a:solidFill>
+                  <a:srgbClr val="364239"/>
+                </a:solidFill>
+                <a:latin typeface="Calibri" pitchFamily="34" charset="0"/>
+                <a:ea typeface="Calibri" pitchFamily="34" charset="-122"/>
+                <a:cs typeface="Calibri" pitchFamily="34" charset="-120"/>
+              </a:rPr>
+              <a:t>Controls diseases, parasites, fungi and pests, with no synthetic molecule.</a:t>
+            </a:r>
+            <a:endParaRPr lang="en-US" sz="1350" dirty="0"/>
+          </a:p>
+          <a:p>
+            <a:pPr algn="l" marL="342900" indent="-342900">
+              <a:lnSpc>
+                <a:spcPct val="122000"/>
+              </a:lnSpc>
+              <a:spcAft>
+                <a:spcPts val="1000"/>
+              </a:spcAft>
+              <a:buSzPct val="100000"/>
+              <a:buChar char="•"/>
+            </a:pPr>
+            <a:r>
+              <a:rPr lang="en-US" sz="1350" dirty="0">
+                <a:solidFill>
+                  <a:srgbClr val="364239"/>
+                </a:solidFill>
+                <a:latin typeface="Calibri" pitchFamily="34" charset="0"/>
+                <a:ea typeface="Calibri" pitchFamily="34" charset="-122"/>
+                <a:cs typeface="Calibri" pitchFamily="34" charset="-120"/>
+              </a:rPr>
+              <a:t>Foliar and root spraying, working both preventively and curatively.</a:t>
+            </a:r>
+            <a:endParaRPr lang="en-US" sz="1350" dirty="0"/>
+          </a:p>
+          <a:p>
+            <a:pPr algn="l" marL="342900" indent="-342900">
+              <a:lnSpc>
+                <a:spcPct val="122000"/>
+              </a:lnSpc>
+              <a:spcAft>
+                <a:spcPts val="1000"/>
+              </a:spcAft>
+              <a:buSzPct val="100000"/>
+              <a:buChar char="•"/>
+            </a:pPr>
+            <a:r>
+              <a:rPr lang="en-US" sz="1350" dirty="0">
+                <a:solidFill>
+                  <a:srgbClr val="364239"/>
+                </a:solidFill>
+                <a:latin typeface="Calibri" pitchFamily="34" charset="0"/>
+                <a:ea typeface="Calibri" pitchFamily="34" charset="-122"/>
+                <a:cs typeface="Calibri" pitchFamily="34" charset="-120"/>
+              </a:rPr>
+              <a:t>No residue in soil, plant or air: pollinators and beneficial insects are spared.</a:t>
+            </a:r>
+            <a:endParaRPr lang="en-US" sz="1350" dirty="0"/>
+          </a:p>
+          <a:p>
+            <a:pPr algn="l" marL="342900" indent="-342900">
+              <a:lnSpc>
+                <a:spcPct val="122000"/>
+              </a:lnSpc>
+              <a:spcAft>
+                <a:spcPts val="1000"/>
+              </a:spcAft>
+              <a:buSzPct val="100000"/>
+              <a:buChar char="•"/>
+            </a:pPr>
+            <a:r>
+              <a:rPr lang="en-US" sz="1350" dirty="0">
+                <a:solidFill>
+                  <a:srgbClr val="364239"/>
+                </a:solidFill>
+                <a:latin typeface="Calibri" pitchFamily="34" charset="0"/>
+                <a:ea typeface="Calibri" pitchFamily="34" charset="-122"/>
+                <a:cs typeface="Calibri" pitchFamily="34" charset="-120"/>
+              </a:rPr>
+              <a:t>Formulated for one precise problem: mealybug, citrus greening (HLB), nematodes.</a:t>
+            </a:r>
+            <a:endParaRPr lang="en-US" sz="1350" dirty="0"/>
+          </a:p>
+        </p:txBody>
+      </p:sp>
+      <p:sp>
+        <p:nvSpPr>
+          <p:cNvPr id="6" name="Text 4"/>
+          <p:cNvSpPr txBox="1"/>
+          <p:nvPr/>
+        </p:nvSpPr>
+        <p:spPr>
+          <a:xfrm>
+            <a:off x="6370168" y="1783080"/>
+            <a:ext cx="5227168" cy="411480"/>
+          </a:xfrm>
+          <a:prstGeom prst="rect">
+            <a:avLst/>
+          </a:prstGeom>
+          <a:noFill/>
+          <a:ln/>
+        </p:spPr>
+        <p:txBody>
+          <a:bodyPr wrap="square" lIns="0" tIns="0" rIns="0" bIns="0" rtlCol="0" anchor="ctr"/>
+          <a:lstStyle/>
+          <a:p>
+            <a:pPr algn="l" indent="0" marL="0">
+              <a:buNone/>
+            </a:pPr>
+            <a:r>
+              <a:rPr lang="en-US" sz="1600" b="1" dirty="0">
+                <a:solidFill>
+                  <a:srgbClr val="2C6E49"/>
+                </a:solidFill>
+                <a:latin typeface="Cambria" pitchFamily="34" charset="0"/>
+                <a:ea typeface="Cambria" pitchFamily="34" charset="-122"/>
+                <a:cs typeface="Cambria" pitchFamily="34" charset="-120"/>
+              </a:rPr>
+              <a:t>Paulownia ALTIFOLIA® — the tree for hot regions</a:t>
+            </a:r>
+            <a:endParaRPr lang="en-US" sz="1600" dirty="0"/>
+          </a:p>
+        </p:txBody>
+      </p:sp>
+      <p:sp>
+        <p:nvSpPr>
+          <p:cNvPr id="7" name="Text 5"/>
+          <p:cNvSpPr txBox="1"/>
+          <p:nvPr/>
+        </p:nvSpPr>
+        <p:spPr>
+          <a:xfrm>
+            <a:off x="6370168" y="2286000"/>
+            <a:ext cx="5227168" cy="2468880"/>
+          </a:xfrm>
+          <a:prstGeom prst="rect">
+            <a:avLst/>
+          </a:prstGeom>
+          <a:noFill/>
+          <a:ln/>
+        </p:spPr>
+        <p:txBody>
+          <a:bodyPr wrap="square" lIns="0" tIns="0" rIns="0" bIns="0" rtlCol="0" anchor="t"/>
+          <a:lstStyle/>
+          <a:p>
+            <a:pPr algn="l" marL="342900" indent="-342900">
+              <a:lnSpc>
+                <a:spcPct val="122000"/>
+              </a:lnSpc>
+              <a:spcAft>
+                <a:spcPts val="1000"/>
+              </a:spcAft>
+              <a:buSzPct val="100000"/>
+              <a:buChar char="•"/>
+            </a:pPr>
+            <a:r>
+              <a:rPr lang="en-US" sz="1350" dirty="0">
+                <a:solidFill>
+                  <a:srgbClr val="364239"/>
+                </a:solidFill>
+                <a:latin typeface="Calibri" pitchFamily="34" charset="0"/>
+                <a:ea typeface="Calibri" pitchFamily="34" charset="-122"/>
+                <a:cs typeface="Calibri" pitchFamily="34" charset="-120"/>
+              </a:rPr>
+              <a:t>13 to 15 m in six to eight years, with a wide trunk.</a:t>
+            </a:r>
+            <a:endParaRPr lang="en-US" sz="1350" dirty="0"/>
+          </a:p>
+          <a:p>
+            <a:pPr algn="l" marL="342900" indent="-342900">
+              <a:lnSpc>
+                <a:spcPct val="122000"/>
+              </a:lnSpc>
+              <a:spcAft>
+                <a:spcPts val="1000"/>
+              </a:spcAft>
+              <a:buSzPct val="100000"/>
+              <a:buChar char="•"/>
+            </a:pPr>
+            <a:r>
+              <a:rPr lang="en-US" sz="1350" dirty="0">
+                <a:solidFill>
+                  <a:srgbClr val="364239"/>
+                </a:solidFill>
+                <a:latin typeface="Calibri" pitchFamily="34" charset="0"/>
+                <a:ea typeface="Calibri" pitchFamily="34" charset="-122"/>
+                <a:cs typeface="Calibri" pitchFamily="34" charset="-120"/>
+              </a:rPr>
+              <a:t>Combined with 100 g of EVERGREEN® per plant, irrigation needs drop by 50%.</a:t>
+            </a:r>
+            <a:endParaRPr lang="en-US" sz="1350" dirty="0"/>
+          </a:p>
+          <a:p>
+            <a:pPr algn="l" marL="342900" indent="-342900">
+              <a:lnSpc>
+                <a:spcPct val="122000"/>
+              </a:lnSpc>
+              <a:spcAft>
+                <a:spcPts val="1000"/>
+              </a:spcAft>
+              <a:buSzPct val="100000"/>
+              <a:buChar char="•"/>
+            </a:pPr>
+            <a:r>
+              <a:rPr lang="en-US" sz="1350" dirty="0">
+                <a:solidFill>
+                  <a:srgbClr val="364239"/>
+                </a:solidFill>
+                <a:latin typeface="Calibri" pitchFamily="34" charset="0"/>
+                <a:ea typeface="Calibri" pitchFamily="34" charset="-122"/>
+                <a:cs typeface="Calibri" pitchFamily="34" charset="-120"/>
+              </a:rPr>
+              <a:t>Withstands −25 °C to +45 °C; the wood only ignites above 426 °C.</a:t>
+            </a:r>
+            <a:endParaRPr lang="en-US" sz="1350" dirty="0"/>
+          </a:p>
+          <a:p>
+            <a:pPr algn="l" marL="342900" indent="-342900">
+              <a:lnSpc>
+                <a:spcPct val="122000"/>
+              </a:lnSpc>
+              <a:spcAft>
+                <a:spcPts val="1000"/>
+              </a:spcAft>
+              <a:buSzPct val="100000"/>
+              <a:buChar char="•"/>
+            </a:pPr>
+            <a:r>
+              <a:rPr lang="en-US" sz="1350" dirty="0">
+                <a:solidFill>
+                  <a:srgbClr val="364239"/>
+                </a:solidFill>
+                <a:latin typeface="Calibri" pitchFamily="34" charset="0"/>
+                <a:ea typeface="Calibri" pitchFamily="34" charset="-122"/>
+                <a:cs typeface="Calibri" pitchFamily="34" charset="-120"/>
+              </a:rPr>
+              <a:t>Windbreak, protection against soil erosion, 400 to 700 kg of honey per hectare.</a:t>
+            </a:r>
+            <a:endParaRPr lang="en-US" sz="1350" dirty="0"/>
+          </a:p>
+        </p:txBody>
+      </p:sp>
+      <p:sp>
+        <p:nvSpPr>
+          <p:cNvPr id="8" name="Shape 6"/>
           <p:cNvSpPr/>
           <p:nvPr/>
         </p:nvSpPr>
         <p:spPr>
           <a:xfrm>
-            <a:off x="8275320" y="1783080"/>
-            <a:ext cx="3291840" cy="3977640"/>
+            <a:off x="594360" y="4846320"/>
+            <a:ext cx="11002975" cy="960120"/>
           </a:xfrm>
           <a:prstGeom prst="roundRect">
             <a:avLst>
-              <a:gd name="adj" fmla="val 2778"/>
+              <a:gd name="adj" fmla="val 7619"/>
             </a:avLst>
           </a:prstGeom>
           <a:solidFill>
@@ -3470,53 +4205,14 @@
       </p:sp>
       <p:sp>
         <p:nvSpPr>
-          <p:cNvPr id="6" name="Text 3"/>
-          <p:cNvSpPr txBox="1"/>
-          <p:nvPr/>
-        </p:nvSpPr>
-        <p:spPr>
-          <a:xfrm>
-            <a:off x="8503920" y="2011680"/>
-            <a:ext cx="2834640" cy="457200"/>
-          </a:xfrm>
-          <a:prstGeom prst="rect">
-            <a:avLst/>
-          </a:prstGeom>
-          <a:noFill/>
-          <a:ln/>
-        </p:spPr>
-        <p:txBody>
-          <a:bodyPr wrap="square" lIns="0" tIns="0" rIns="0" bIns="0" rtlCol="0" anchor="ctr"/>
-          <a:lstStyle/>
-          <a:p>
-            <a:pPr algn="l" indent="0" marL="0">
-              <a:buNone/>
-            </a:pPr>
-            <a:r>
-              <a:rPr lang="en-US" sz="1300" b="1" dirty="0">
-                <a:solidFill>
-                  <a:srgbClr val="2C6E49"/>
-                </a:solidFill>
-                <a:latin typeface="Cambria" pitchFamily="34" charset="0"/>
-                <a:ea typeface="Cambria" pitchFamily="34" charset="-122"/>
-                <a:cs typeface="Cambria" pitchFamily="34" charset="-120"/>
-              </a:rPr>
-              <a:t>Read with caution</a:t>
-            </a:r>
-            <a:endParaRPr lang="en-US" sz="1300" dirty="0"/>
-          </a:p>
-        </p:txBody>
-      </p:sp>
-      <p:sp>
-        <p:nvSpPr>
-          <p:cNvPr id="7" name="Text 4"/>
-          <p:cNvSpPr txBox="1"/>
-          <p:nvPr/>
-        </p:nvSpPr>
-        <p:spPr>
-          <a:xfrm>
-            <a:off x="8503920" y="2560320"/>
-            <a:ext cx="2834640" cy="3017520"/>
+          <p:cNvPr id="9" name="Text 7"/>
+          <p:cNvSpPr txBox="1"/>
+          <p:nvPr/>
+        </p:nvSpPr>
+        <p:spPr>
+          <a:xfrm>
+            <a:off x="822960" y="4983480"/>
+            <a:ext cx="10545775" cy="713232"/>
           </a:xfrm>
           <a:prstGeom prst="rect">
             <a:avLst/>
@@ -3530,57 +4226,28 @@
           <a:p>
             <a:pPr algn="l" indent="0" marL="0">
               <a:lnSpc>
-                <a:spcPct val="125000"/>
+                <a:spcPct val="118000"/>
               </a:lnSpc>
               <a:buNone/>
             </a:pPr>
             <a:r>
-              <a:rPr lang="en-US" sz="1200" dirty="0">
-                <a:solidFill>
-                  <a:srgbClr val="364239"/>
-                </a:solidFill>
-                <a:latin typeface="Calibri" pitchFamily="34" charset="0"/>
-                <a:ea typeface="Calibri" pitchFamily="34" charset="-122"/>
-                <a:cs typeface="Calibri" pitchFamily="34" charset="-120"/>
-              </a:rPr>
-              <a:t>These ranges are indicative and based on the savings documented for our hydro-retainers.</a:t>
-            </a:r>
-            <a:endParaRPr lang="en-US" sz="1200" dirty="0"/>
-          </a:p>
-          <a:p>
-            <a:pPr algn="l" indent="0" marL="0">
-              <a:lnSpc>
-                <a:spcPct val="125000"/>
-              </a:lnSpc>
-              <a:buNone/>
-            </a:pPr>
-            <a:endParaRPr lang="en-US" sz="1200" dirty="0"/>
-          </a:p>
-          <a:p>
-            <a:pPr algn="l" indent="0" marL="0">
-              <a:lnSpc>
-                <a:spcPct val="125000"/>
-              </a:lnSpc>
-              <a:buNone/>
-            </a:pPr>
-            <a:r>
-              <a:rPr lang="en-US" sz="1200" dirty="0">
-                <a:solidFill>
-                  <a:srgbClr val="364239"/>
-                </a:solidFill>
-                <a:latin typeface="Calibri" pitchFamily="34" charset="0"/>
-                <a:ea typeface="Calibri" pitchFamily="34" charset="-122"/>
-                <a:cs typeface="Calibri" pitchFamily="34" charset="-120"/>
-              </a:rPr>
-              <a:t>The actual result depends on the soil, the climate and the crop. They give an order of magnitude and are in no case a guaranteed, contractual or absolute value.</a:t>
-            </a:r>
-            <a:endParaRPr lang="en-US" sz="1200" dirty="0"/>
-          </a:p>
-        </p:txBody>
-      </p:sp>
-      <p:sp>
-        <p:nvSpPr>
-          <p:cNvPr id="8" name="Text 5"/>
+              <a:rPr lang="en-US" sz="1100" dirty="0">
+                <a:solidFill>
+                  <a:srgbClr val="6F7D71"/>
+                </a:solidFill>
+                <a:latin typeface="Calibri" pitchFamily="34" charset="0"/>
+                <a:ea typeface="Calibri" pitchFamily="34" charset="-122"/>
+                <a:cs typeface="Calibri" pitchFamily="34" charset="-120"/>
+              </a:rPr>
+              <a:t>Plants delivered potted (25 to 30 cm), certified disease-free and replaced under warranty in case of loss. First harvest at the end of year six, with wood valued at around €400 to €450 per m³.</a:t>
+            </a:r>
+            <a:endParaRPr lang="en-US" sz="1100" dirty="0"/>
+          </a:p>
+        </p:txBody>
+      </p:sp>
+      <p:sp>
+        <p:nvSpPr>
+          <p:cNvPr id="10" name="Text 8"/>
           <p:cNvSpPr txBox="1"/>
           <p:nvPr/>
         </p:nvSpPr>
@@ -3621,7 +4288,7 @@
       </p:sp>
       <p:sp>
         <p:nvSpPr>
-          <p:cNvPr id="9" name="Text 6"/>
+          <p:cNvPr id="11" name="Text 9"/>
           <p:cNvSpPr txBox="1"/>
           <p:nvPr/>
         </p:nvSpPr>
@@ -3725,7 +4392,7 @@
                 <a:ea typeface="Calibri" pitchFamily="34" charset="-122"/>
                 <a:cs typeface="Calibri" pitchFamily="34" charset="-120"/>
               </a:rPr>
-              <a:t>THREE PRIORITY AREAS</a:t>
+              <a:t>ORDERS OF MAGNITUDE</a:t>
             </a:r>
             <a:endParaRPr lang="en-US" sz="1150" dirty="0"/>
           </a:p>
@@ -3764,26 +4431,42 @@
                 <a:ea typeface="Cambria" pitchFamily="34" charset="-122"/>
                 <a:cs typeface="Cambria" pitchFamily="34" charset="-120"/>
               </a:rPr>
-              <a:t>Where to run the first trials</a:t>
+              <a:t>Expected water saving by irrigation method</a:t>
             </a:r>
             <a:endParaRPr lang="en-US" sz="3000" dirty="0"/>
           </a:p>
         </p:txBody>
       </p:sp>
-      <p:sp>
-        <p:nvSpPr>
-          <p:cNvPr id="4" name="Shape 2"/>
+      <p:graphicFrame>
+        <p:nvGraphicFramePr>
+          <p:cNvPr id="4" name="Chart 0" descr=""/>
+          <p:cNvGraphicFramePr/>
+          <p:nvPr/>
+        </p:nvGraphicFramePr>
+        <p:xfrm>
+          <a:off x="594360" y="1783080"/>
+          <a:ext cx="7360920" cy="3977640"/>
+        </p:xfrm>
+        <a:graphic xmlns:a="http://schemas.openxmlformats.org/drawingml/2006/main">
+          <a:graphicData uri="http://schemas.openxmlformats.org/drawingml/2006/chart">
+            <c:chart xmlns:c="http://schemas.openxmlformats.org/drawingml/2006/chart" r:id="rId1"/>
+          </a:graphicData>
+        </a:graphic>
+      </p:graphicFrame>
+      <p:sp>
+        <p:nvSpPr>
+          <p:cNvPr id="5" name="Shape 2"/>
           <p:cNvSpPr/>
           <p:nvPr/>
         </p:nvSpPr>
         <p:spPr>
           <a:xfrm>
-            <a:off x="594360" y="1783080"/>
-            <a:ext cx="3472586" cy="4069080"/>
+            <a:off x="8275320" y="1783080"/>
+            <a:ext cx="3291840" cy="3977640"/>
           </a:xfrm>
           <a:prstGeom prst="roundRect">
             <a:avLst>
-              <a:gd name="adj" fmla="val 2633"/>
+              <a:gd name="adj" fmla="val 2778"/>
             </a:avLst>
           </a:prstGeom>
           <a:solidFill>
@@ -3797,30 +4480,6 @@
           </a:ln>
         </p:spPr>
       </p:sp>
-      <p:pic>
-        <p:nvPicPr>
-          <p:cNvPr id="5" name="Image 0" descr="preencoded.png">    </p:cNvPr>
-          <p:cNvPicPr>
-            <a:picLocks noChangeAspect="1"/>
-          </p:cNvPicPr>
-          <p:nvPr/>
-        </p:nvPicPr>
-        <p:blipFill>
-          <a:blip r:embed="rId1"/>
-          <a:stretch>
-            <a:fillRect/>
-          </a:stretch>
-        </p:blipFill>
-        <p:spPr>
-          <a:xfrm>
-            <a:off x="594360" y="1783080"/>
-            <a:ext cx="3472586" cy="1691640"/>
-          </a:xfrm>
-          <a:prstGeom prst="rect">
-            <a:avLst/>
-          </a:prstGeom>
-        </p:spPr>
-      </p:pic>
       <p:sp>
         <p:nvSpPr>
           <p:cNvPr id="6" name="Text 3"/>
@@ -3829,8 +4488,8 @@
         </p:nvSpPr>
         <p:spPr>
           <a:xfrm>
-            <a:off x="795528" y="3639312"/>
-            <a:ext cx="3070250" cy="384048"/>
+            <a:off x="8503920" y="2011680"/>
+            <a:ext cx="2834640" cy="457200"/>
           </a:xfrm>
           <a:prstGeom prst="rect">
             <a:avLst/>
@@ -3846,7 +4505,7 @@
               <a:buNone/>
             </a:pPr>
             <a:r>
-              <a:rPr lang="en-US" sz="1500" b="1" dirty="0">
+              <a:rPr lang="en-US" sz="1300" b="1" dirty="0">
                 <a:solidFill>
                   <a:srgbClr val="2C6E49"/>
                 </a:solidFill>
@@ -3854,9 +4513,9 @@
                 <a:ea typeface="Cambria" pitchFamily="34" charset="-122"/>
                 <a:cs typeface="Cambria" pitchFamily="34" charset="-120"/>
               </a:rPr>
-              <a:t>Al Batinah</a:t>
-            </a:r>
-            <a:endParaRPr lang="en-US" sz="1500" dirty="0"/>
+              <a:t>Read with caution</a:t>
+            </a:r>
+            <a:endParaRPr lang="en-US" sz="1300" dirty="0"/>
           </a:p>
         </p:txBody>
       </p:sp>
@@ -3868,580 +4527,72 @@
         </p:nvSpPr>
         <p:spPr>
           <a:xfrm>
-            <a:off x="795528" y="4041648"/>
-            <a:ext cx="3070250" cy="329184"/>
-          </a:xfrm>
-          <a:prstGeom prst="rect">
-            <a:avLst/>
-          </a:prstGeom>
-          <a:noFill/>
-          <a:ln/>
-        </p:spPr>
-        <p:txBody>
-          <a:bodyPr wrap="square" lIns="0" tIns="0" rIns="0" bIns="0" rtlCol="0" anchor="ctr"/>
+            <a:off x="8503920" y="2560320"/>
+            <a:ext cx="2834640" cy="3017520"/>
+          </a:xfrm>
+          <a:prstGeom prst="rect">
+            <a:avLst/>
+          </a:prstGeom>
+          <a:noFill/>
+          <a:ln/>
+        </p:spPr>
+        <p:txBody>
+          <a:bodyPr wrap="square" lIns="0" tIns="0" rIns="0" bIns="0" rtlCol="0" anchor="t"/>
           <a:lstStyle/>
           <a:p>
             <a:pPr algn="l" indent="0" marL="0">
-              <a:buNone/>
-            </a:pPr>
-            <a:r>
-              <a:rPr lang="en-US" sz="1250" b="1" dirty="0">
-                <a:solidFill>
-                  <a:srgbClr val="9C6C12"/>
-                </a:solidFill>
-                <a:latin typeface="Calibri" pitchFamily="34" charset="0"/>
-                <a:ea typeface="Calibri" pitchFamily="34" charset="-122"/>
-                <a:cs typeface="Calibri" pitchFamily="34" charset="-120"/>
-              </a:rPr>
-              <a:t>Oman's main farm belt</a:t>
-            </a:r>
-            <a:endParaRPr lang="en-US" sz="1250" dirty="0"/>
+              <a:lnSpc>
+                <a:spcPct val="125000"/>
+              </a:lnSpc>
+              <a:buNone/>
+            </a:pPr>
+            <a:r>
+              <a:rPr lang="en-US" sz="1200" dirty="0">
+                <a:solidFill>
+                  <a:srgbClr val="364239"/>
+                </a:solidFill>
+                <a:latin typeface="Calibri" pitchFamily="34" charset="0"/>
+                <a:ea typeface="Calibri" pitchFamily="34" charset="-122"/>
+                <a:cs typeface="Calibri" pitchFamily="34" charset="-120"/>
+              </a:rPr>
+              <a:t>These ranges are indicative and based on the savings documented for our hydro-retainers.</a:t>
+            </a:r>
+            <a:endParaRPr lang="en-US" sz="1200" dirty="0"/>
+          </a:p>
+          <a:p>
+            <a:pPr algn="l" indent="0" marL="0">
+              <a:lnSpc>
+                <a:spcPct val="125000"/>
+              </a:lnSpc>
+              <a:buNone/>
+            </a:pPr>
+            <a:endParaRPr lang="en-US" sz="1200" dirty="0"/>
+          </a:p>
+          <a:p>
+            <a:pPr algn="l" indent="0" marL="0">
+              <a:lnSpc>
+                <a:spcPct val="125000"/>
+              </a:lnSpc>
+              <a:buNone/>
+            </a:pPr>
+            <a:r>
+              <a:rPr lang="en-US" sz="1200" dirty="0">
+                <a:solidFill>
+                  <a:srgbClr val="364239"/>
+                </a:solidFill>
+                <a:latin typeface="Calibri" pitchFamily="34" charset="0"/>
+                <a:ea typeface="Calibri" pitchFamily="34" charset="-122"/>
+                <a:cs typeface="Calibri" pitchFamily="34" charset="-120"/>
+              </a:rPr>
+              <a:t>The actual result depends on the soil, the climate and the crop. They give an order of magnitude and are in no case a guaranteed, contractual or absolute value.</a:t>
+            </a:r>
+            <a:endParaRPr lang="en-US" sz="1200" dirty="0"/>
           </a:p>
         </p:txBody>
       </p:sp>
       <p:sp>
         <p:nvSpPr>
           <p:cNvPr id="8" name="Text 5"/>
-          <p:cNvSpPr txBox="1"/>
-          <p:nvPr/>
-        </p:nvSpPr>
-        <p:spPr>
-          <a:xfrm>
-            <a:off x="795528" y="4407408"/>
-            <a:ext cx="3070250" cy="1280160"/>
-          </a:xfrm>
-          <a:prstGeom prst="rect">
-            <a:avLst/>
-          </a:prstGeom>
-          <a:noFill/>
-          <a:ln/>
-        </p:spPr>
-        <p:txBody>
-          <a:bodyPr wrap="square" lIns="0" tIns="0" rIns="0" bIns="0" rtlCol="0" anchor="t"/>
-          <a:lstStyle/>
-          <a:p>
-            <a:pPr algn="l" marL="342900" indent="-342900">
-              <a:lnSpc>
-                <a:spcPct val="116000"/>
-              </a:lnSpc>
-              <a:spcAft>
-                <a:spcPts val="700"/>
-              </a:spcAft>
-              <a:buSzPct val="100000"/>
-              <a:buChar char="•"/>
-            </a:pPr>
-            <a:r>
-              <a:rPr lang="en-US" sz="1150" dirty="0">
-                <a:solidFill>
-                  <a:srgbClr val="364239"/>
-                </a:solidFill>
-                <a:latin typeface="Calibri" pitchFamily="34" charset="0"/>
-                <a:ea typeface="Calibri" pitchFamily="34" charset="-122"/>
-                <a:cs typeface="Calibri" pitchFamily="34" charset="-120"/>
-              </a:rPr>
-              <a:t>Vegetables, dates and fodder on a coastal plain where aquifers are over-drawn and turning saline.</a:t>
-            </a:r>
-            <a:endParaRPr lang="en-US" sz="1150" dirty="0"/>
-          </a:p>
-          <a:p>
-            <a:pPr algn="l" marL="342900" indent="-342900">
-              <a:lnSpc>
-                <a:spcPct val="116000"/>
-              </a:lnSpc>
-              <a:spcAft>
-                <a:spcPts val="700"/>
-              </a:spcAft>
-              <a:buSzPct val="100000"/>
-              <a:buChar char="•"/>
-            </a:pPr>
-            <a:r>
-              <a:rPr lang="en-US" sz="1150" dirty="0">
-                <a:solidFill>
-                  <a:srgbClr val="364239"/>
-                </a:solidFill>
-                <a:latin typeface="Calibri" pitchFamily="34" charset="0"/>
-                <a:ea typeface="Calibri" pitchFamily="34" charset="-122"/>
-                <a:cs typeface="Calibri" pitchFamily="34" charset="-120"/>
-              </a:rPr>
-              <a:t>Farms already on drip, with pumps running daily: the saving shows on the power bill.</a:t>
-            </a:r>
-            <a:endParaRPr lang="en-US" sz="1150" dirty="0"/>
-          </a:p>
-          <a:p>
-            <a:pPr algn="l" marL="342900" indent="-342900">
-              <a:lnSpc>
-                <a:spcPct val="116000"/>
-              </a:lnSpc>
-              <a:spcAft>
-                <a:spcPts val="700"/>
-              </a:spcAft>
-              <a:buSzPct val="100000"/>
-              <a:buChar char="•"/>
-            </a:pPr>
-            <a:r>
-              <a:rPr lang="en-US" sz="1150" dirty="0">
-                <a:solidFill>
-                  <a:srgbClr val="364239"/>
-                </a:solidFill>
-                <a:latin typeface="Calibri" pitchFamily="34" charset="0"/>
-                <a:ea typeface="Calibri" pitchFamily="34" charset="-122"/>
-                <a:cs typeface="Calibri" pitchFamily="34" charset="-120"/>
-              </a:rPr>
-              <a:t>Many commercial farms able to host a trial block quickly.</a:t>
-            </a:r>
-            <a:endParaRPr lang="en-US" sz="1150" dirty="0"/>
-          </a:p>
-        </p:txBody>
-      </p:sp>
-      <p:sp>
-        <p:nvSpPr>
-          <p:cNvPr id="9" name="Shape 6"/>
-          <p:cNvSpPr/>
-          <p:nvPr/>
-        </p:nvSpPr>
-        <p:spPr>
-          <a:xfrm>
-            <a:off x="4359554" y="1783080"/>
-            <a:ext cx="3472586" cy="4069080"/>
-          </a:xfrm>
-          <a:prstGeom prst="roundRect">
-            <a:avLst>
-              <a:gd name="adj" fmla="val 2633"/>
-            </a:avLst>
-          </a:prstGeom>
-          <a:solidFill>
-            <a:srgbClr val="F2F1E8"/>
-          </a:solidFill>
-          <a:ln w="9525">
-            <a:solidFill>
-              <a:srgbClr val="E0DFD0"/>
-            </a:solidFill>
-            <a:prstDash val="solid"/>
-          </a:ln>
-        </p:spPr>
-      </p:sp>
-      <p:pic>
-        <p:nvPicPr>
-          <p:cNvPr id="10" name="Image 1" descr="preencoded.png">    </p:cNvPr>
-          <p:cNvPicPr>
-            <a:picLocks noChangeAspect="1"/>
-          </p:cNvPicPr>
-          <p:nvPr/>
-        </p:nvPicPr>
-        <p:blipFill>
-          <a:blip r:embed="rId2"/>
-          <a:stretch>
-            <a:fillRect/>
-          </a:stretch>
-        </p:blipFill>
-        <p:spPr>
-          <a:xfrm>
-            <a:off x="4359554" y="1783080"/>
-            <a:ext cx="3472586" cy="1691640"/>
-          </a:xfrm>
-          <a:prstGeom prst="rect">
-            <a:avLst/>
-          </a:prstGeom>
-        </p:spPr>
-      </p:pic>
-      <p:sp>
-        <p:nvSpPr>
-          <p:cNvPr id="11" name="Text 7"/>
-          <p:cNvSpPr txBox="1"/>
-          <p:nvPr/>
-        </p:nvSpPr>
-        <p:spPr>
-          <a:xfrm>
-            <a:off x="4560722" y="3639312"/>
-            <a:ext cx="3070250" cy="384048"/>
-          </a:xfrm>
-          <a:prstGeom prst="rect">
-            <a:avLst/>
-          </a:prstGeom>
-          <a:noFill/>
-          <a:ln/>
-        </p:spPr>
-        <p:txBody>
-          <a:bodyPr wrap="square" lIns="0" tIns="0" rIns="0" bIns="0" rtlCol="0" anchor="ctr"/>
-          <a:lstStyle/>
-          <a:p>
-            <a:pPr algn="l" indent="0" marL="0">
-              <a:buNone/>
-            </a:pPr>
-            <a:r>
-              <a:rPr lang="en-US" sz="1500" b="1" dirty="0">
-                <a:solidFill>
-                  <a:srgbClr val="2C6E49"/>
-                </a:solidFill>
-                <a:latin typeface="Cambria" pitchFamily="34" charset="0"/>
-                <a:ea typeface="Cambria" pitchFamily="34" charset="-122"/>
-                <a:cs typeface="Cambria" pitchFamily="34" charset="-120"/>
-              </a:rPr>
-              <a:t>Interior oases</a:t>
-            </a:r>
-            <a:endParaRPr lang="en-US" sz="1500" dirty="0"/>
-          </a:p>
-        </p:txBody>
-      </p:sp>
-      <p:sp>
-        <p:nvSpPr>
-          <p:cNvPr id="12" name="Text 8"/>
-          <p:cNvSpPr txBox="1"/>
-          <p:nvPr/>
-        </p:nvSpPr>
-        <p:spPr>
-          <a:xfrm>
-            <a:off x="4560722" y="4041648"/>
-            <a:ext cx="3070250" cy="329184"/>
-          </a:xfrm>
-          <a:prstGeom prst="rect">
-            <a:avLst/>
-          </a:prstGeom>
-          <a:noFill/>
-          <a:ln/>
-        </p:spPr>
-        <p:txBody>
-          <a:bodyPr wrap="square" lIns="0" tIns="0" rIns="0" bIns="0" rtlCol="0" anchor="ctr"/>
-          <a:lstStyle/>
-          <a:p>
-            <a:pPr algn="l" indent="0" marL="0">
-              <a:buNone/>
-            </a:pPr>
-            <a:r>
-              <a:rPr lang="en-US" sz="1250" b="1" dirty="0">
-                <a:solidFill>
-                  <a:srgbClr val="9C6C12"/>
-                </a:solidFill>
-                <a:latin typeface="Calibri" pitchFamily="34" charset="0"/>
-                <a:ea typeface="Calibri" pitchFamily="34" charset="-122"/>
-                <a:cs typeface="Calibri" pitchFamily="34" charset="-120"/>
-              </a:rPr>
-              <a:t>Aflaj-fed date groves</a:t>
-            </a:r>
-            <a:endParaRPr lang="en-US" sz="1250" dirty="0"/>
-          </a:p>
-        </p:txBody>
-      </p:sp>
-      <p:sp>
-        <p:nvSpPr>
-          <p:cNvPr id="13" name="Text 9"/>
-          <p:cNvSpPr txBox="1"/>
-          <p:nvPr/>
-        </p:nvSpPr>
-        <p:spPr>
-          <a:xfrm>
-            <a:off x="4560722" y="4407408"/>
-            <a:ext cx="3070250" cy="1280160"/>
-          </a:xfrm>
-          <a:prstGeom prst="rect">
-            <a:avLst/>
-          </a:prstGeom>
-          <a:noFill/>
-          <a:ln/>
-        </p:spPr>
-        <p:txBody>
-          <a:bodyPr wrap="square" lIns="0" tIns="0" rIns="0" bIns="0" rtlCol="0" anchor="t"/>
-          <a:lstStyle/>
-          <a:p>
-            <a:pPr algn="l" marL="342900" indent="-342900">
-              <a:lnSpc>
-                <a:spcPct val="116000"/>
-              </a:lnSpc>
-              <a:spcAft>
-                <a:spcPts val="700"/>
-              </a:spcAft>
-              <a:buSzPct val="100000"/>
-              <a:buChar char="•"/>
-            </a:pPr>
-            <a:r>
-              <a:rPr lang="en-US" sz="1150" dirty="0">
-                <a:solidFill>
-                  <a:srgbClr val="364239"/>
-                </a:solidFill>
-                <a:latin typeface="Calibri" pitchFamily="34" charset="0"/>
-                <a:ea typeface="Calibri" pitchFamily="34" charset="-122"/>
-                <a:cs typeface="Calibri" pitchFamily="34" charset="-120"/>
-              </a:rPr>
-              <a:t>Historic date groves around Nizwa and Bahla, irrigated by shared falaj rotations.</a:t>
-            </a:r>
-            <a:endParaRPr lang="en-US" sz="1150" dirty="0"/>
-          </a:p>
-          <a:p>
-            <a:pPr algn="l" marL="342900" indent="-342900">
-              <a:lnSpc>
-                <a:spcPct val="116000"/>
-              </a:lnSpc>
-              <a:spcAft>
-                <a:spcPts val="700"/>
-              </a:spcAft>
-              <a:buSzPct val="100000"/>
-              <a:buChar char="•"/>
-            </a:pPr>
-            <a:r>
-              <a:rPr lang="en-US" sz="1150" dirty="0">
-                <a:solidFill>
-                  <a:srgbClr val="364239"/>
-                </a:solidFill>
-                <a:latin typeface="Calibri" pitchFamily="34" charset="0"/>
-                <a:ea typeface="Calibri" pitchFamily="34" charset="-122"/>
-                <a:cs typeface="Calibri" pitchFamily="34" charset="-120"/>
-              </a:rPr>
-              <a:t>Weaker flows in drought years mean longer intervals between turns.</a:t>
-            </a:r>
-            <a:endParaRPr lang="en-US" sz="1150" dirty="0"/>
-          </a:p>
-          <a:p>
-            <a:pPr algn="l" marL="342900" indent="-342900">
-              <a:lnSpc>
-                <a:spcPct val="116000"/>
-              </a:lnSpc>
-              <a:spcAft>
-                <a:spcPts val="700"/>
-              </a:spcAft>
-              <a:buSzPct val="100000"/>
-              <a:buChar char="•"/>
-            </a:pPr>
-            <a:r>
-              <a:rPr lang="en-US" sz="1150" dirty="0">
-                <a:solidFill>
-                  <a:srgbClr val="364239"/>
-                </a:solidFill>
-                <a:latin typeface="Calibri" pitchFamily="34" charset="0"/>
-                <a:ea typeface="Calibri" pitchFamily="34" charset="-122"/>
-                <a:cs typeface="Calibri" pitchFamily="34" charset="-120"/>
-              </a:rPr>
-              <a:t>Young offshoots planted with a retainer establish before the summer heat.</a:t>
-            </a:r>
-            <a:endParaRPr lang="en-US" sz="1150" dirty="0"/>
-          </a:p>
-        </p:txBody>
-      </p:sp>
-      <p:sp>
-        <p:nvSpPr>
-          <p:cNvPr id="14" name="Shape 10"/>
-          <p:cNvSpPr/>
-          <p:nvPr/>
-        </p:nvSpPr>
-        <p:spPr>
-          <a:xfrm>
-            <a:off x="8124749" y="1783080"/>
-            <a:ext cx="3472586" cy="4069080"/>
-          </a:xfrm>
-          <a:prstGeom prst="roundRect">
-            <a:avLst>
-              <a:gd name="adj" fmla="val 2633"/>
-            </a:avLst>
-          </a:prstGeom>
-          <a:solidFill>
-            <a:srgbClr val="F2F1E8"/>
-          </a:solidFill>
-          <a:ln w="9525">
-            <a:solidFill>
-              <a:srgbClr val="E0DFD0"/>
-            </a:solidFill>
-            <a:prstDash val="solid"/>
-          </a:ln>
-        </p:spPr>
-      </p:sp>
-      <p:pic>
-        <p:nvPicPr>
-          <p:cNvPr id="15" name="Image 2" descr="preencoded.png">    </p:cNvPr>
-          <p:cNvPicPr>
-            <a:picLocks noChangeAspect="1"/>
-          </p:cNvPicPr>
-          <p:nvPr/>
-        </p:nvPicPr>
-        <p:blipFill>
-          <a:blip r:embed="rId3"/>
-          <a:stretch>
-            <a:fillRect/>
-          </a:stretch>
-        </p:blipFill>
-        <p:spPr>
-          <a:xfrm>
-            <a:off x="8124749" y="1783080"/>
-            <a:ext cx="3472586" cy="1691640"/>
-          </a:xfrm>
-          <a:prstGeom prst="rect">
-            <a:avLst/>
-          </a:prstGeom>
-        </p:spPr>
-      </p:pic>
-      <p:sp>
-        <p:nvSpPr>
-          <p:cNvPr id="16" name="Text 11"/>
-          <p:cNvSpPr txBox="1"/>
-          <p:nvPr/>
-        </p:nvSpPr>
-        <p:spPr>
-          <a:xfrm>
-            <a:off x="8325917" y="3639312"/>
-            <a:ext cx="3070250" cy="384048"/>
-          </a:xfrm>
-          <a:prstGeom prst="rect">
-            <a:avLst/>
-          </a:prstGeom>
-          <a:noFill/>
-          <a:ln/>
-        </p:spPr>
-        <p:txBody>
-          <a:bodyPr wrap="square" lIns="0" tIns="0" rIns="0" bIns="0" rtlCol="0" anchor="ctr"/>
-          <a:lstStyle/>
-          <a:p>
-            <a:pPr algn="l" indent="0" marL="0">
-              <a:buNone/>
-            </a:pPr>
-            <a:r>
-              <a:rPr lang="en-US" sz="1500" b="1" dirty="0">
-                <a:solidFill>
-                  <a:srgbClr val="2C6E49"/>
-                </a:solidFill>
-                <a:latin typeface="Cambria" pitchFamily="34" charset="0"/>
-                <a:ea typeface="Cambria" pitchFamily="34" charset="-122"/>
-                <a:cs typeface="Cambria" pitchFamily="34" charset="-120"/>
-              </a:rPr>
-              <a:t>Dhofar — Salalah</a:t>
-            </a:r>
-            <a:endParaRPr lang="en-US" sz="1500" dirty="0"/>
-          </a:p>
-        </p:txBody>
-      </p:sp>
-      <p:sp>
-        <p:nvSpPr>
-          <p:cNvPr id="17" name="Text 12"/>
-          <p:cNvSpPr txBox="1"/>
-          <p:nvPr/>
-        </p:nvSpPr>
-        <p:spPr>
-          <a:xfrm>
-            <a:off x="8325917" y="4041648"/>
-            <a:ext cx="3070250" cy="329184"/>
-          </a:xfrm>
-          <a:prstGeom prst="rect">
-            <a:avLst/>
-          </a:prstGeom>
-          <a:noFill/>
-          <a:ln/>
-        </p:spPr>
-        <p:txBody>
-          <a:bodyPr wrap="square" lIns="0" tIns="0" rIns="0" bIns="0" rtlCol="0" anchor="ctr"/>
-          <a:lstStyle/>
-          <a:p>
-            <a:pPr algn="l" indent="0" marL="0">
-              <a:buNone/>
-            </a:pPr>
-            <a:r>
-              <a:rPr lang="en-US" sz="1250" b="1" dirty="0">
-                <a:solidFill>
-                  <a:srgbClr val="9C6C12"/>
-                </a:solidFill>
-                <a:latin typeface="Calibri" pitchFamily="34" charset="0"/>
-                <a:ea typeface="Calibri" pitchFamily="34" charset="-122"/>
-                <a:cs typeface="Calibri" pitchFamily="34" charset="-120"/>
-              </a:rPr>
-              <a:t>Monsoon from June to September</a:t>
-            </a:r>
-            <a:endParaRPr lang="en-US" sz="1250" dirty="0"/>
-          </a:p>
-        </p:txBody>
-      </p:sp>
-      <p:sp>
-        <p:nvSpPr>
-          <p:cNvPr id="18" name="Text 13"/>
-          <p:cNvSpPr txBox="1"/>
-          <p:nvPr/>
-        </p:nvSpPr>
-        <p:spPr>
-          <a:xfrm>
-            <a:off x="8325917" y="4407408"/>
-            <a:ext cx="3070250" cy="1280160"/>
-          </a:xfrm>
-          <a:prstGeom prst="rect">
-            <a:avLst/>
-          </a:prstGeom>
-          <a:noFill/>
-          <a:ln/>
-        </p:spPr>
-        <p:txBody>
-          <a:bodyPr wrap="square" lIns="0" tIns="0" rIns="0" bIns="0" rtlCol="0" anchor="t"/>
-          <a:lstStyle/>
-          <a:p>
-            <a:pPr algn="l" marL="342900" indent="-342900">
-              <a:lnSpc>
-                <a:spcPct val="116000"/>
-              </a:lnSpc>
-              <a:spcAft>
-                <a:spcPts val="700"/>
-              </a:spcAft>
-              <a:buSzPct val="100000"/>
-              <a:buChar char="•"/>
-            </a:pPr>
-            <a:r>
-              <a:rPr lang="en-US" sz="1150" dirty="0">
-                <a:solidFill>
-                  <a:srgbClr val="364239"/>
-                </a:solidFill>
-                <a:latin typeface="Calibri" pitchFamily="34" charset="0"/>
-                <a:ea typeface="Calibri" pitchFamily="34" charset="-122"/>
-                <a:cs typeface="Calibri" pitchFamily="34" charset="-120"/>
-              </a:rPr>
-              <a:t>The only region with a monsoon: coconut, banana, papaya and vegetables near Salalah.</a:t>
-            </a:r>
-            <a:endParaRPr lang="en-US" sz="1150" dirty="0"/>
-          </a:p>
-          <a:p>
-            <a:pPr algn="l" marL="342900" indent="-342900">
-              <a:lnSpc>
-                <a:spcPct val="116000"/>
-              </a:lnSpc>
-              <a:spcAft>
-                <a:spcPts val="700"/>
-              </a:spcAft>
-              <a:buSzPct val="100000"/>
-              <a:buChar char="•"/>
-            </a:pPr>
-            <a:r>
-              <a:rPr lang="en-US" sz="1150" dirty="0">
-                <a:solidFill>
-                  <a:srgbClr val="364239"/>
-                </a:solidFill>
-                <a:latin typeface="Calibri" pitchFamily="34" charset="0"/>
-                <a:ea typeface="Calibri" pitchFamily="34" charset="-122"/>
-                <a:cs typeface="Calibri" pitchFamily="34" charset="-120"/>
-              </a:rPr>
-              <a:t>Eight dry months outside the khareef: holding the monsoon water in the soil is the whole question.</a:t>
-            </a:r>
-            <a:endParaRPr lang="en-US" sz="1150" dirty="0"/>
-          </a:p>
-          <a:p>
-            <a:pPr algn="l" marL="342900" indent="-342900">
-              <a:lnSpc>
-                <a:spcPct val="116000"/>
-              </a:lnSpc>
-              <a:spcAft>
-                <a:spcPts val="700"/>
-              </a:spcAft>
-              <a:buSzPct val="100000"/>
-              <a:buChar char="•"/>
-            </a:pPr>
-            <a:r>
-              <a:rPr lang="en-US" sz="1150" dirty="0">
-                <a:solidFill>
-                  <a:srgbClr val="364239"/>
-                </a:solidFill>
-                <a:latin typeface="Calibri" pitchFamily="34" charset="0"/>
-                <a:ea typeface="Calibri" pitchFamily="34" charset="-122"/>
-                <a:cs typeface="Calibri" pitchFamily="34" charset="-120"/>
-              </a:rPr>
-              <a:t>Soils poor in organic matter, where ECOFERT® adds value alongside the retainer.</a:t>
-            </a:r>
-            <a:endParaRPr lang="en-US" sz="1150" dirty="0"/>
-          </a:p>
-        </p:txBody>
-      </p:sp>
-      <p:sp>
-        <p:nvSpPr>
-          <p:cNvPr id="19" name="Text 14"/>
           <p:cNvSpPr txBox="1"/>
           <p:nvPr/>
         </p:nvSpPr>
@@ -4482,7 +4633,7 @@
       </p:sp>
       <p:sp>
         <p:nvSpPr>
-          <p:cNvPr id="20" name="Text 15"/>
+          <p:cNvPr id="9" name="Text 6"/>
           <p:cNvSpPr txBox="1"/>
           <p:nvPr/>
         </p:nvSpPr>
@@ -4586,7 +4737,7 @@
                 <a:ea typeface="Calibri" pitchFamily="34" charset="-122"/>
                 <a:cs typeface="Calibri" pitchFamily="34" charset="-120"/>
               </a:rPr>
-              <a:t>HOW WE WORK</a:t>
+              <a:t>THREE PRIORITY AREAS</a:t>
             </a:r>
             <a:endParaRPr lang="en-US" sz="1150" dirty="0"/>
           </a:p>
@@ -4625,7 +4776,7 @@
                 <a:ea typeface="Cambria" pitchFamily="34" charset="-122"/>
                 <a:cs typeface="Cambria" pitchFamily="34" charset="-120"/>
               </a:rPr>
-              <a:t>A staged rollout, measured at every step</a:t>
+              <a:t>Where to run the first trials</a:t>
             </a:r>
             <a:endParaRPr lang="en-US" sz="3000" dirty="0"/>
           </a:p>
@@ -4639,12 +4790,12 @@
         </p:nvSpPr>
         <p:spPr>
           <a:xfrm>
-            <a:off x="594360" y="1874520"/>
-            <a:ext cx="2545004" cy="2834640"/>
+            <a:off x="594360" y="1783080"/>
+            <a:ext cx="3472586" cy="4069080"/>
           </a:xfrm>
           <a:prstGeom prst="roundRect">
             <a:avLst>
-              <a:gd name="adj" fmla="val 3593"/>
+              <a:gd name="adj" fmla="val 2633"/>
             </a:avLst>
           </a:prstGeom>
           <a:solidFill>
@@ -4658,36 +4809,40 @@
           </a:ln>
         </p:spPr>
       </p:sp>
-      <p:sp>
-        <p:nvSpPr>
-          <p:cNvPr id="5" name="Shape 3"/>
-          <p:cNvSpPr/>
-          <p:nvPr/>
-        </p:nvSpPr>
-        <p:spPr>
-          <a:xfrm>
-            <a:off x="822960" y="2103120"/>
-            <a:ext cx="566928" cy="566928"/>
-          </a:xfrm>
-          <a:prstGeom prst="ellipse">
-            <a:avLst/>
-          </a:prstGeom>
-          <a:solidFill>
-            <a:srgbClr val="2C6E49"/>
-          </a:solidFill>
-          <a:ln/>
-        </p:spPr>
-      </p:sp>
-      <p:sp>
-        <p:nvSpPr>
-          <p:cNvPr id="6" name="Text 4"/>
-          <p:cNvSpPr txBox="1"/>
-          <p:nvPr/>
-        </p:nvSpPr>
-        <p:spPr>
-          <a:xfrm>
-            <a:off x="822960" y="2103120"/>
-            <a:ext cx="566928" cy="566928"/>
+      <p:pic>
+        <p:nvPicPr>
+          <p:cNvPr id="5" name="Image 0" descr="preencoded.png">    </p:cNvPr>
+          <p:cNvPicPr>
+            <a:picLocks noChangeAspect="1"/>
+          </p:cNvPicPr>
+          <p:nvPr/>
+        </p:nvPicPr>
+        <p:blipFill>
+          <a:blip r:embed="rId1"/>
+          <a:stretch>
+            <a:fillRect/>
+          </a:stretch>
+        </p:blipFill>
+        <p:spPr>
+          <a:xfrm>
+            <a:off x="594360" y="1783080"/>
+            <a:ext cx="3472586" cy="1691640"/>
+          </a:xfrm>
+          <a:prstGeom prst="rect">
+            <a:avLst/>
+          </a:prstGeom>
+        </p:spPr>
+      </p:pic>
+      <p:sp>
+        <p:nvSpPr>
+          <p:cNvPr id="6" name="Text 3"/>
+          <p:cNvSpPr txBox="1"/>
+          <p:nvPr/>
+        </p:nvSpPr>
+        <p:spPr>
+          <a:xfrm>
+            <a:off x="795528" y="3639312"/>
+            <a:ext cx="3070250" cy="384048"/>
           </a:xfrm>
           <a:prstGeom prst="rect">
             <a:avLst/>
@@ -4699,34 +4854,34 @@
           <a:bodyPr wrap="square" lIns="0" tIns="0" rIns="0" bIns="0" rtlCol="0" anchor="ctr"/>
           <a:lstStyle/>
           <a:p>
-            <a:pPr algn="ctr" indent="0" marL="0">
-              <a:buNone/>
-            </a:pPr>
-            <a:r>
-              <a:rPr lang="en-US" sz="1600" b="1" dirty="0">
-                <a:solidFill>
-                  <a:srgbClr val="FFFFFF"/>
+            <a:pPr algn="l" indent="0" marL="0">
+              <a:buNone/>
+            </a:pPr>
+            <a:r>
+              <a:rPr lang="en-US" sz="1500" b="1" dirty="0">
+                <a:solidFill>
+                  <a:srgbClr val="2C6E49"/>
                 </a:solidFill>
                 <a:latin typeface="Cambria" pitchFamily="34" charset="0"/>
                 <a:ea typeface="Cambria" pitchFamily="34" charset="-122"/>
                 <a:cs typeface="Cambria" pitchFamily="34" charset="-120"/>
               </a:rPr>
-              <a:t>1</a:t>
-            </a:r>
-            <a:endParaRPr lang="en-US" sz="1600" dirty="0"/>
-          </a:p>
-        </p:txBody>
-      </p:sp>
-      <p:sp>
-        <p:nvSpPr>
-          <p:cNvPr id="7" name="Text 5"/>
-          <p:cNvSpPr txBox="1"/>
-          <p:nvPr/>
-        </p:nvSpPr>
-        <p:spPr>
-          <a:xfrm>
-            <a:off x="822960" y="2788920"/>
-            <a:ext cx="2087804" cy="457200"/>
+              <a:t>Al Batinah</a:t>
+            </a:r>
+            <a:endParaRPr lang="en-US" sz="1500" dirty="0"/>
+          </a:p>
+        </p:txBody>
+      </p:sp>
+      <p:sp>
+        <p:nvSpPr>
+          <p:cNvPr id="7" name="Text 4"/>
+          <p:cNvSpPr txBox="1"/>
+          <p:nvPr/>
+        </p:nvSpPr>
+        <p:spPr>
+          <a:xfrm>
+            <a:off x="795528" y="4041648"/>
+            <a:ext cx="3070250" cy="329184"/>
           </a:xfrm>
           <a:prstGeom prst="rect">
             <a:avLst/>
@@ -4742,30 +4897,30 @@
               <a:buNone/>
             </a:pPr>
             <a:r>
-              <a:rPr lang="en-US" sz="1400" b="1" dirty="0">
-                <a:solidFill>
-                  <a:srgbClr val="2C6E49"/>
-                </a:solidFill>
-                <a:latin typeface="Cambria" pitchFamily="34" charset="0"/>
-                <a:ea typeface="Cambria" pitchFamily="34" charset="-122"/>
-                <a:cs typeface="Cambria" pitchFamily="34" charset="-120"/>
-              </a:rPr>
-              <a:t>Assessment</a:t>
-            </a:r>
-            <a:endParaRPr lang="en-US" sz="1400" dirty="0"/>
-          </a:p>
-        </p:txBody>
-      </p:sp>
-      <p:sp>
-        <p:nvSpPr>
-          <p:cNvPr id="8" name="Text 6"/>
-          <p:cNvSpPr txBox="1"/>
-          <p:nvPr/>
-        </p:nvSpPr>
-        <p:spPr>
-          <a:xfrm>
-            <a:off x="822960" y="3291840"/>
-            <a:ext cx="2087804" cy="1234440"/>
+              <a:rPr lang="en-US" sz="1250" b="1" dirty="0">
+                <a:solidFill>
+                  <a:srgbClr val="9C6C12"/>
+                </a:solidFill>
+                <a:latin typeface="Calibri" pitchFamily="34" charset="0"/>
+                <a:ea typeface="Calibri" pitchFamily="34" charset="-122"/>
+                <a:cs typeface="Calibri" pitchFamily="34" charset="-120"/>
+              </a:rPr>
+              <a:t>Oman's main farm belt</a:t>
+            </a:r>
+            <a:endParaRPr lang="en-US" sz="1250" dirty="0"/>
+          </a:p>
+        </p:txBody>
+      </p:sp>
+      <p:sp>
+        <p:nvSpPr>
+          <p:cNvPr id="8" name="Text 5"/>
+          <p:cNvSpPr txBox="1"/>
+          <p:nvPr/>
+        </p:nvSpPr>
+        <p:spPr>
+          <a:xfrm>
+            <a:off x="795528" y="4407408"/>
+            <a:ext cx="3070250" cy="1280160"/>
           </a:xfrm>
           <a:prstGeom prst="rect">
             <a:avLst/>
@@ -4777,14 +4932,18 @@
           <a:bodyPr wrap="square" lIns="0" tIns="0" rIns="0" bIns="0" rtlCol="0" anchor="t"/>
           <a:lstStyle/>
           <a:p>
-            <a:pPr algn="l" indent="0" marL="0">
+            <a:pPr algn="l" marL="342900" indent="-342900">
               <a:lnSpc>
-                <a:spcPct val="120000"/>
+                <a:spcPct val="116000"/>
               </a:lnSpc>
-              <a:buNone/>
-            </a:pPr>
-            <a:r>
-              <a:rPr lang="en-US" sz="1200" dirty="0">
+              <a:spcAft>
+                <a:spcPts val="700"/>
+              </a:spcAft>
+              <a:buSzPct val="100000"/>
+              <a:buChar char="•"/>
+            </a:pPr>
+            <a:r>
+              <a:rPr lang="en-US" sz="1150" dirty="0">
                 <a:solidFill>
                   <a:srgbClr val="364239"/>
                 </a:solidFill>
@@ -4792,26 +4951,74 @@
                 <a:ea typeface="Calibri" pitchFamily="34" charset="-122"/>
                 <a:cs typeface="Calibri" pitchFamily="34" charset="-120"/>
               </a:rPr>
-              <a:t>Soil, irrigation method and crop are reviewed. No commitment at this stage.</a:t>
-            </a:r>
-            <a:endParaRPr lang="en-US" sz="1200" dirty="0"/>
-          </a:p>
-        </p:txBody>
-      </p:sp>
-      <p:sp>
-        <p:nvSpPr>
-          <p:cNvPr id="9" name="Shape 7"/>
+              <a:t>Vegetables, dates and fodder on a coastal plain where aquifers are over-drawn and turning saline.</a:t>
+            </a:r>
+            <a:endParaRPr lang="en-US" sz="1150" dirty="0"/>
+          </a:p>
+          <a:p>
+            <a:pPr algn="l" marL="342900" indent="-342900">
+              <a:lnSpc>
+                <a:spcPct val="116000"/>
+              </a:lnSpc>
+              <a:spcAft>
+                <a:spcPts val="700"/>
+              </a:spcAft>
+              <a:buSzPct val="100000"/>
+              <a:buChar char="•"/>
+            </a:pPr>
+            <a:r>
+              <a:rPr lang="en-US" sz="1150" dirty="0">
+                <a:solidFill>
+                  <a:srgbClr val="364239"/>
+                </a:solidFill>
+                <a:latin typeface="Calibri" pitchFamily="34" charset="0"/>
+                <a:ea typeface="Calibri" pitchFamily="34" charset="-122"/>
+                <a:cs typeface="Calibri" pitchFamily="34" charset="-120"/>
+              </a:rPr>
+              <a:t>Farms already on drip, with pumps running daily: the saving shows on the power bill.</a:t>
+            </a:r>
+            <a:endParaRPr lang="en-US" sz="1150" dirty="0"/>
+          </a:p>
+          <a:p>
+            <a:pPr algn="l" marL="342900" indent="-342900">
+              <a:lnSpc>
+                <a:spcPct val="116000"/>
+              </a:lnSpc>
+              <a:spcAft>
+                <a:spcPts val="700"/>
+              </a:spcAft>
+              <a:buSzPct val="100000"/>
+              <a:buChar char="•"/>
+            </a:pPr>
+            <a:r>
+              <a:rPr lang="en-US" sz="1150" dirty="0">
+                <a:solidFill>
+                  <a:srgbClr val="364239"/>
+                </a:solidFill>
+                <a:latin typeface="Calibri" pitchFamily="34" charset="0"/>
+                <a:ea typeface="Calibri" pitchFamily="34" charset="-122"/>
+                <a:cs typeface="Calibri" pitchFamily="34" charset="-120"/>
+              </a:rPr>
+              <a:t>Many commercial farms able to host a trial block quickly.</a:t>
+            </a:r>
+            <a:endParaRPr lang="en-US" sz="1150" dirty="0"/>
+          </a:p>
+        </p:txBody>
+      </p:sp>
+      <p:sp>
+        <p:nvSpPr>
+          <p:cNvPr id="9" name="Shape 6"/>
           <p:cNvSpPr/>
           <p:nvPr/>
         </p:nvSpPr>
         <p:spPr>
           <a:xfrm>
-            <a:off x="3413684" y="1874520"/>
-            <a:ext cx="2545004" cy="2834640"/>
+            <a:off x="4359554" y="1783080"/>
+            <a:ext cx="3472586" cy="4069080"/>
           </a:xfrm>
           <a:prstGeom prst="roundRect">
             <a:avLst>
-              <a:gd name="adj" fmla="val 3593"/>
+              <a:gd name="adj" fmla="val 2633"/>
             </a:avLst>
           </a:prstGeom>
           <a:solidFill>
@@ -4825,36 +5032,40 @@
           </a:ln>
         </p:spPr>
       </p:sp>
-      <p:sp>
-        <p:nvSpPr>
-          <p:cNvPr id="10" name="Shape 8"/>
-          <p:cNvSpPr/>
-          <p:nvPr/>
-        </p:nvSpPr>
-        <p:spPr>
-          <a:xfrm>
-            <a:off x="3642284" y="2103120"/>
-            <a:ext cx="566928" cy="566928"/>
-          </a:xfrm>
-          <a:prstGeom prst="ellipse">
-            <a:avLst/>
-          </a:prstGeom>
-          <a:solidFill>
-            <a:srgbClr val="2C6E49"/>
-          </a:solidFill>
-          <a:ln/>
-        </p:spPr>
-      </p:sp>
-      <p:sp>
-        <p:nvSpPr>
-          <p:cNvPr id="11" name="Text 9"/>
-          <p:cNvSpPr txBox="1"/>
-          <p:nvPr/>
-        </p:nvSpPr>
-        <p:spPr>
-          <a:xfrm>
-            <a:off x="3642284" y="2103120"/>
-            <a:ext cx="566928" cy="566928"/>
+      <p:pic>
+        <p:nvPicPr>
+          <p:cNvPr id="10" name="Image 1" descr="preencoded.png">    </p:cNvPr>
+          <p:cNvPicPr>
+            <a:picLocks noChangeAspect="1"/>
+          </p:cNvPicPr>
+          <p:nvPr/>
+        </p:nvPicPr>
+        <p:blipFill>
+          <a:blip r:embed="rId2"/>
+          <a:stretch>
+            <a:fillRect/>
+          </a:stretch>
+        </p:blipFill>
+        <p:spPr>
+          <a:xfrm>
+            <a:off x="4359554" y="1783080"/>
+            <a:ext cx="3472586" cy="1691640"/>
+          </a:xfrm>
+          <a:prstGeom prst="rect">
+            <a:avLst/>
+          </a:prstGeom>
+        </p:spPr>
+      </p:pic>
+      <p:sp>
+        <p:nvSpPr>
+          <p:cNvPr id="11" name="Text 7"/>
+          <p:cNvSpPr txBox="1"/>
+          <p:nvPr/>
+        </p:nvSpPr>
+        <p:spPr>
+          <a:xfrm>
+            <a:off x="4560722" y="3639312"/>
+            <a:ext cx="3070250" cy="384048"/>
           </a:xfrm>
           <a:prstGeom prst="rect">
             <a:avLst/>
@@ -4866,34 +5077,34 @@
           <a:bodyPr wrap="square" lIns="0" tIns="0" rIns="0" bIns="0" rtlCol="0" anchor="ctr"/>
           <a:lstStyle/>
           <a:p>
-            <a:pPr algn="ctr" indent="0" marL="0">
-              <a:buNone/>
-            </a:pPr>
-            <a:r>
-              <a:rPr lang="en-US" sz="1600" b="1" dirty="0">
-                <a:solidFill>
-                  <a:srgbClr val="FFFFFF"/>
+            <a:pPr algn="l" indent="0" marL="0">
+              <a:buNone/>
+            </a:pPr>
+            <a:r>
+              <a:rPr lang="en-US" sz="1500" b="1" dirty="0">
+                <a:solidFill>
+                  <a:srgbClr val="2C6E49"/>
                 </a:solidFill>
                 <a:latin typeface="Cambria" pitchFamily="34" charset="0"/>
                 <a:ea typeface="Cambria" pitchFamily="34" charset="-122"/>
                 <a:cs typeface="Cambria" pitchFamily="34" charset="-120"/>
               </a:rPr>
-              <a:t>2</a:t>
-            </a:r>
-            <a:endParaRPr lang="en-US" sz="1600" dirty="0"/>
-          </a:p>
-        </p:txBody>
-      </p:sp>
-      <p:sp>
-        <p:nvSpPr>
-          <p:cNvPr id="12" name="Text 10"/>
-          <p:cNvSpPr txBox="1"/>
-          <p:nvPr/>
-        </p:nvSpPr>
-        <p:spPr>
-          <a:xfrm>
-            <a:off x="3642284" y="2788920"/>
-            <a:ext cx="2087804" cy="457200"/>
+              <a:t>Interior oases</a:t>
+            </a:r>
+            <a:endParaRPr lang="en-US" sz="1500" dirty="0"/>
+          </a:p>
+        </p:txBody>
+      </p:sp>
+      <p:sp>
+        <p:nvSpPr>
+          <p:cNvPr id="12" name="Text 8"/>
+          <p:cNvSpPr txBox="1"/>
+          <p:nvPr/>
+        </p:nvSpPr>
+        <p:spPr>
+          <a:xfrm>
+            <a:off x="4560722" y="4041648"/>
+            <a:ext cx="3070250" cy="329184"/>
           </a:xfrm>
           <a:prstGeom prst="rect">
             <a:avLst/>
@@ -4909,30 +5120,30 @@
               <a:buNone/>
             </a:pPr>
             <a:r>
-              <a:rPr lang="en-US" sz="1400" b="1" dirty="0">
-                <a:solidFill>
-                  <a:srgbClr val="2C6E49"/>
-                </a:solidFill>
-                <a:latin typeface="Cambria" pitchFamily="34" charset="0"/>
-                <a:ea typeface="Cambria" pitchFamily="34" charset="-122"/>
-                <a:cs typeface="Cambria" pitchFamily="34" charset="-120"/>
-              </a:rPr>
-              <a:t>Trial block</a:t>
-            </a:r>
-            <a:endParaRPr lang="en-US" sz="1400" dirty="0"/>
-          </a:p>
-        </p:txBody>
-      </p:sp>
-      <p:sp>
-        <p:nvSpPr>
-          <p:cNvPr id="13" name="Text 11"/>
-          <p:cNvSpPr txBox="1"/>
-          <p:nvPr/>
-        </p:nvSpPr>
-        <p:spPr>
-          <a:xfrm>
-            <a:off x="3642284" y="3291840"/>
-            <a:ext cx="2087804" cy="1234440"/>
+              <a:rPr lang="en-US" sz="1250" b="1" dirty="0">
+                <a:solidFill>
+                  <a:srgbClr val="9C6C12"/>
+                </a:solidFill>
+                <a:latin typeface="Calibri" pitchFamily="34" charset="0"/>
+                <a:ea typeface="Calibri" pitchFamily="34" charset="-122"/>
+                <a:cs typeface="Calibri" pitchFamily="34" charset="-120"/>
+              </a:rPr>
+              <a:t>Aflaj-fed date groves</a:t>
+            </a:r>
+            <a:endParaRPr lang="en-US" sz="1250" dirty="0"/>
+          </a:p>
+        </p:txBody>
+      </p:sp>
+      <p:sp>
+        <p:nvSpPr>
+          <p:cNvPr id="13" name="Text 9"/>
+          <p:cNvSpPr txBox="1"/>
+          <p:nvPr/>
+        </p:nvSpPr>
+        <p:spPr>
+          <a:xfrm>
+            <a:off x="4560722" y="4407408"/>
+            <a:ext cx="3070250" cy="1280160"/>
           </a:xfrm>
           <a:prstGeom prst="rect">
             <a:avLst/>
@@ -4944,14 +5155,18 @@
           <a:bodyPr wrap="square" lIns="0" tIns="0" rIns="0" bIns="0" rtlCol="0" anchor="t"/>
           <a:lstStyle/>
           <a:p>
-            <a:pPr algn="l" indent="0" marL="0">
+            <a:pPr algn="l" marL="342900" indent="-342900">
               <a:lnSpc>
-                <a:spcPct val="120000"/>
+                <a:spcPct val="116000"/>
               </a:lnSpc>
-              <a:buNone/>
-            </a:pPr>
-            <a:r>
-              <a:rPr lang="en-US" sz="1200" dirty="0">
+              <a:spcAft>
+                <a:spcPts val="700"/>
+              </a:spcAft>
+              <a:buSzPct val="100000"/>
+              <a:buChar char="•"/>
+            </a:pPr>
+            <a:r>
+              <a:rPr lang="en-US" sz="1150" dirty="0">
                 <a:solidFill>
                   <a:srgbClr val="364239"/>
                 </a:solidFill>
@@ -4959,26 +5174,74 @@
                 <a:ea typeface="Calibri" pitchFamily="34" charset="-122"/>
                 <a:cs typeface="Calibri" pitchFamily="34" charset="-120"/>
               </a:rPr>
-              <a:t>One comparative trial block, against a control block managed identically.</a:t>
-            </a:r>
-            <a:endParaRPr lang="en-US" sz="1200" dirty="0"/>
-          </a:p>
-        </p:txBody>
-      </p:sp>
-      <p:sp>
-        <p:nvSpPr>
-          <p:cNvPr id="14" name="Shape 12"/>
+              <a:t>Historic date groves around Nizwa and Bahla, irrigated by shared falaj rotations.</a:t>
+            </a:r>
+            <a:endParaRPr lang="en-US" sz="1150" dirty="0"/>
+          </a:p>
+          <a:p>
+            <a:pPr algn="l" marL="342900" indent="-342900">
+              <a:lnSpc>
+                <a:spcPct val="116000"/>
+              </a:lnSpc>
+              <a:spcAft>
+                <a:spcPts val="700"/>
+              </a:spcAft>
+              <a:buSzPct val="100000"/>
+              <a:buChar char="•"/>
+            </a:pPr>
+            <a:r>
+              <a:rPr lang="en-US" sz="1150" dirty="0">
+                <a:solidFill>
+                  <a:srgbClr val="364239"/>
+                </a:solidFill>
+                <a:latin typeface="Calibri" pitchFamily="34" charset="0"/>
+                <a:ea typeface="Calibri" pitchFamily="34" charset="-122"/>
+                <a:cs typeface="Calibri" pitchFamily="34" charset="-120"/>
+              </a:rPr>
+              <a:t>Weaker flows in drought years mean longer intervals between turns.</a:t>
+            </a:r>
+            <a:endParaRPr lang="en-US" sz="1150" dirty="0"/>
+          </a:p>
+          <a:p>
+            <a:pPr algn="l" marL="342900" indent="-342900">
+              <a:lnSpc>
+                <a:spcPct val="116000"/>
+              </a:lnSpc>
+              <a:spcAft>
+                <a:spcPts val="700"/>
+              </a:spcAft>
+              <a:buSzPct val="100000"/>
+              <a:buChar char="•"/>
+            </a:pPr>
+            <a:r>
+              <a:rPr lang="en-US" sz="1150" dirty="0">
+                <a:solidFill>
+                  <a:srgbClr val="364239"/>
+                </a:solidFill>
+                <a:latin typeface="Calibri" pitchFamily="34" charset="0"/>
+                <a:ea typeface="Calibri" pitchFamily="34" charset="-122"/>
+                <a:cs typeface="Calibri" pitchFamily="34" charset="-120"/>
+              </a:rPr>
+              <a:t>Young offshoots planted with a retainer establish before the summer heat.</a:t>
+            </a:r>
+            <a:endParaRPr lang="en-US" sz="1150" dirty="0"/>
+          </a:p>
+        </p:txBody>
+      </p:sp>
+      <p:sp>
+        <p:nvSpPr>
+          <p:cNvPr id="14" name="Shape 10"/>
           <p:cNvSpPr/>
           <p:nvPr/>
         </p:nvSpPr>
         <p:spPr>
           <a:xfrm>
-            <a:off x="6233008" y="1874520"/>
-            <a:ext cx="2545004" cy="2834640"/>
+            <a:off x="8124749" y="1783080"/>
+            <a:ext cx="3472586" cy="4069080"/>
           </a:xfrm>
           <a:prstGeom prst="roundRect">
             <a:avLst>
-              <a:gd name="adj" fmla="val 3593"/>
+              <a:gd name="adj" fmla="val 2633"/>
             </a:avLst>
           </a:prstGeom>
           <a:solidFill>
@@ -4992,36 +5255,40 @@
           </a:ln>
         </p:spPr>
       </p:sp>
-      <p:sp>
-        <p:nvSpPr>
-          <p:cNvPr id="15" name="Shape 13"/>
-          <p:cNvSpPr/>
-          <p:nvPr/>
-        </p:nvSpPr>
-        <p:spPr>
-          <a:xfrm>
-            <a:off x="6461608" y="2103120"/>
-            <a:ext cx="566928" cy="566928"/>
-          </a:xfrm>
-          <a:prstGeom prst="ellipse">
-            <a:avLst/>
-          </a:prstGeom>
-          <a:solidFill>
-            <a:srgbClr val="2C6E49"/>
-          </a:solidFill>
-          <a:ln/>
-        </p:spPr>
-      </p:sp>
-      <p:sp>
-        <p:nvSpPr>
-          <p:cNvPr id="16" name="Text 14"/>
-          <p:cNvSpPr txBox="1"/>
-          <p:nvPr/>
-        </p:nvSpPr>
-        <p:spPr>
-          <a:xfrm>
-            <a:off x="6461608" y="2103120"/>
-            <a:ext cx="566928" cy="566928"/>
+      <p:pic>
+        <p:nvPicPr>
+          <p:cNvPr id="15" name="Image 2" descr="preencoded.png">    </p:cNvPr>
+          <p:cNvPicPr>
+            <a:picLocks noChangeAspect="1"/>
+          </p:cNvPicPr>
+          <p:nvPr/>
+        </p:nvPicPr>
+        <p:blipFill>
+          <a:blip r:embed="rId3"/>
+          <a:stretch>
+            <a:fillRect/>
+          </a:stretch>
+        </p:blipFill>
+        <p:spPr>
+          <a:xfrm>
+            <a:off x="8124749" y="1783080"/>
+            <a:ext cx="3472586" cy="1691640"/>
+          </a:xfrm>
+          <a:prstGeom prst="rect">
+            <a:avLst/>
+          </a:prstGeom>
+        </p:spPr>
+      </p:pic>
+      <p:sp>
+        <p:nvSpPr>
+          <p:cNvPr id="16" name="Text 11"/>
+          <p:cNvSpPr txBox="1"/>
+          <p:nvPr/>
+        </p:nvSpPr>
+        <p:spPr>
+          <a:xfrm>
+            <a:off x="8325917" y="3639312"/>
+            <a:ext cx="3070250" cy="384048"/>
           </a:xfrm>
           <a:prstGeom prst="rect">
             <a:avLst/>
@@ -5033,34 +5300,34 @@
           <a:bodyPr wrap="square" lIns="0" tIns="0" rIns="0" bIns="0" rtlCol="0" anchor="ctr"/>
           <a:lstStyle/>
           <a:p>
-            <a:pPr algn="ctr" indent="0" marL="0">
-              <a:buNone/>
-            </a:pPr>
-            <a:r>
-              <a:rPr lang="en-US" sz="1600" b="1" dirty="0">
-                <a:solidFill>
-                  <a:srgbClr val="FFFFFF"/>
+            <a:pPr algn="l" indent="0" marL="0">
+              <a:buNone/>
+            </a:pPr>
+            <a:r>
+              <a:rPr lang="en-US" sz="1500" b="1" dirty="0">
+                <a:solidFill>
+                  <a:srgbClr val="2C6E49"/>
                 </a:solidFill>
                 <a:latin typeface="Cambria" pitchFamily="34" charset="0"/>
                 <a:ea typeface="Cambria" pitchFamily="34" charset="-122"/>
                 <a:cs typeface="Cambria" pitchFamily="34" charset="-120"/>
               </a:rPr>
-              <a:t>3</a:t>
-            </a:r>
-            <a:endParaRPr lang="en-US" sz="1600" dirty="0"/>
-          </a:p>
-        </p:txBody>
-      </p:sp>
-      <p:sp>
-        <p:nvSpPr>
-          <p:cNvPr id="17" name="Text 15"/>
-          <p:cNvSpPr txBox="1"/>
-          <p:nvPr/>
-        </p:nvSpPr>
-        <p:spPr>
-          <a:xfrm>
-            <a:off x="6461608" y="2788920"/>
-            <a:ext cx="2087804" cy="457200"/>
+              <a:t>Dhofar — Salalah</a:t>
+            </a:r>
+            <a:endParaRPr lang="en-US" sz="1500" dirty="0"/>
+          </a:p>
+        </p:txBody>
+      </p:sp>
+      <p:sp>
+        <p:nvSpPr>
+          <p:cNvPr id="17" name="Text 12"/>
+          <p:cNvSpPr txBox="1"/>
+          <p:nvPr/>
+        </p:nvSpPr>
+        <p:spPr>
+          <a:xfrm>
+            <a:off x="8325917" y="4041648"/>
+            <a:ext cx="3070250" cy="329184"/>
           </a:xfrm>
           <a:prstGeom prst="rect">
             <a:avLst/>
@@ -5076,30 +5343,30 @@
               <a:buNone/>
             </a:pPr>
             <a:r>
-              <a:rPr lang="en-US" sz="1400" b="1" dirty="0">
-                <a:solidFill>
-                  <a:srgbClr val="2C6E49"/>
-                </a:solidFill>
-                <a:latin typeface="Cambria" pitchFamily="34" charset="0"/>
-                <a:ea typeface="Cambria" pitchFamily="34" charset="-122"/>
-                <a:cs typeface="Cambria" pitchFamily="34" charset="-120"/>
-              </a:rPr>
-              <a:t>Measurement</a:t>
-            </a:r>
-            <a:endParaRPr lang="en-US" sz="1400" dirty="0"/>
-          </a:p>
-        </p:txBody>
-      </p:sp>
-      <p:sp>
-        <p:nvSpPr>
-          <p:cNvPr id="18" name="Text 16"/>
-          <p:cNvSpPr txBox="1"/>
-          <p:nvPr/>
-        </p:nvSpPr>
-        <p:spPr>
-          <a:xfrm>
-            <a:off x="6461608" y="3291840"/>
-            <a:ext cx="2087804" cy="1234440"/>
+              <a:rPr lang="en-US" sz="1250" b="1" dirty="0">
+                <a:solidFill>
+                  <a:srgbClr val="9C6C12"/>
+                </a:solidFill>
+                <a:latin typeface="Calibri" pitchFamily="34" charset="0"/>
+                <a:ea typeface="Calibri" pitchFamily="34" charset="-122"/>
+                <a:cs typeface="Calibri" pitchFamily="34" charset="-120"/>
+              </a:rPr>
+              <a:t>Monsoon from June to September</a:t>
+            </a:r>
+            <a:endParaRPr lang="en-US" sz="1250" dirty="0"/>
+          </a:p>
+        </p:txBody>
+      </p:sp>
+      <p:sp>
+        <p:nvSpPr>
+          <p:cNvPr id="18" name="Text 13"/>
+          <p:cNvSpPr txBox="1"/>
+          <p:nvPr/>
+        </p:nvSpPr>
+        <p:spPr>
+          <a:xfrm>
+            <a:off x="8325917" y="4407408"/>
+            <a:ext cx="3070250" cy="1280160"/>
           </a:xfrm>
           <a:prstGeom prst="rect">
             <a:avLst/>
@@ -5111,14 +5378,18 @@
           <a:bodyPr wrap="square" lIns="0" tIns="0" rIns="0" bIns="0" rtlCol="0" anchor="t"/>
           <a:lstStyle/>
           <a:p>
-            <a:pPr algn="l" indent="0" marL="0">
+            <a:pPr algn="l" marL="342900" indent="-342900">
               <a:lnSpc>
-                <a:spcPct val="120000"/>
+                <a:spcPct val="116000"/>
               </a:lnSpc>
-              <a:buNone/>
-            </a:pPr>
-            <a:r>
-              <a:rPr lang="en-US" sz="1200" dirty="0">
+              <a:spcAft>
+                <a:spcPts val="700"/>
+              </a:spcAft>
+              <a:buSzPct val="100000"/>
+              <a:buChar char="•"/>
+            </a:pPr>
+            <a:r>
+              <a:rPr lang="en-US" sz="1150" dirty="0">
                 <a:solidFill>
                   <a:srgbClr val="364239"/>
                 </a:solidFill>
@@ -5126,166 +5397,23 @@
                 <a:ea typeface="Calibri" pitchFamily="34" charset="-122"/>
                 <a:cs typeface="Calibri" pitchFamily="34" charset="-120"/>
               </a:rPr>
-              <a:t>Water use and yield recorded over a full season, summer included.</a:t>
-            </a:r>
-            <a:endParaRPr lang="en-US" sz="1200" dirty="0"/>
-          </a:p>
-        </p:txBody>
-      </p:sp>
-      <p:sp>
-        <p:nvSpPr>
-          <p:cNvPr id="19" name="Shape 17"/>
-          <p:cNvSpPr/>
-          <p:nvPr/>
-        </p:nvSpPr>
-        <p:spPr>
-          <a:xfrm>
-            <a:off x="9052331" y="1874520"/>
-            <a:ext cx="2545004" cy="2834640"/>
-          </a:xfrm>
-          <a:prstGeom prst="roundRect">
-            <a:avLst>
-              <a:gd name="adj" fmla="val 3593"/>
-            </a:avLst>
-          </a:prstGeom>
-          <a:solidFill>
-            <a:srgbClr val="F2F1E8"/>
-          </a:solidFill>
-          <a:ln w="9525">
-            <a:solidFill>
-              <a:srgbClr val="E0DFD0"/>
-            </a:solidFill>
-            <a:prstDash val="solid"/>
-          </a:ln>
-        </p:spPr>
-      </p:sp>
-      <p:sp>
-        <p:nvSpPr>
-          <p:cNvPr id="20" name="Shape 18"/>
-          <p:cNvSpPr/>
-          <p:nvPr/>
-        </p:nvSpPr>
-        <p:spPr>
-          <a:xfrm>
-            <a:off x="9280931" y="2103120"/>
-            <a:ext cx="566928" cy="566928"/>
-          </a:xfrm>
-          <a:prstGeom prst="ellipse">
-            <a:avLst/>
-          </a:prstGeom>
-          <a:solidFill>
-            <a:srgbClr val="2C6E49"/>
-          </a:solidFill>
-          <a:ln/>
-        </p:spPr>
-      </p:sp>
-      <p:sp>
-        <p:nvSpPr>
-          <p:cNvPr id="21" name="Text 19"/>
-          <p:cNvSpPr txBox="1"/>
-          <p:nvPr/>
-        </p:nvSpPr>
-        <p:spPr>
-          <a:xfrm>
-            <a:off x="9280931" y="2103120"/>
-            <a:ext cx="566928" cy="566928"/>
-          </a:xfrm>
-          <a:prstGeom prst="rect">
-            <a:avLst/>
-          </a:prstGeom>
-          <a:noFill/>
-          <a:ln/>
-        </p:spPr>
-        <p:txBody>
-          <a:bodyPr wrap="square" lIns="0" tIns="0" rIns="0" bIns="0" rtlCol="0" anchor="ctr"/>
-          <a:lstStyle/>
-          <a:p>
-            <a:pPr algn="ctr" indent="0" marL="0">
-              <a:buNone/>
-            </a:pPr>
-            <a:r>
-              <a:rPr lang="en-US" sz="1600" b="1" dirty="0">
-                <a:solidFill>
-                  <a:srgbClr val="FFFFFF"/>
-                </a:solidFill>
-                <a:latin typeface="Cambria" pitchFamily="34" charset="0"/>
-                <a:ea typeface="Cambria" pitchFamily="34" charset="-122"/>
-                <a:cs typeface="Cambria" pitchFamily="34" charset="-120"/>
-              </a:rPr>
-              <a:t>4</a:t>
-            </a:r>
-            <a:endParaRPr lang="en-US" sz="1600" dirty="0"/>
-          </a:p>
-        </p:txBody>
-      </p:sp>
-      <p:sp>
-        <p:nvSpPr>
-          <p:cNvPr id="22" name="Text 20"/>
-          <p:cNvSpPr txBox="1"/>
-          <p:nvPr/>
-        </p:nvSpPr>
-        <p:spPr>
-          <a:xfrm>
-            <a:off x="9280931" y="2788920"/>
-            <a:ext cx="2087804" cy="457200"/>
-          </a:xfrm>
-          <a:prstGeom prst="rect">
-            <a:avLst/>
-          </a:prstGeom>
-          <a:noFill/>
-          <a:ln/>
-        </p:spPr>
-        <p:txBody>
-          <a:bodyPr wrap="square" lIns="0" tIns="0" rIns="0" bIns="0" rtlCol="0" anchor="ctr"/>
-          <a:lstStyle/>
-          <a:p>
-            <a:pPr algn="l" indent="0" marL="0">
-              <a:buNone/>
-            </a:pPr>
-            <a:r>
-              <a:rPr lang="en-US" sz="1400" b="1" dirty="0">
-                <a:solidFill>
-                  <a:srgbClr val="2C6E49"/>
-                </a:solidFill>
-                <a:latin typeface="Cambria" pitchFamily="34" charset="0"/>
-                <a:ea typeface="Cambria" pitchFamily="34" charset="-122"/>
-                <a:cs typeface="Cambria" pitchFamily="34" charset="-120"/>
-              </a:rPr>
-              <a:t>Extension</a:t>
-            </a:r>
-            <a:endParaRPr lang="en-US" sz="1400" dirty="0"/>
-          </a:p>
-        </p:txBody>
-      </p:sp>
-      <p:sp>
-        <p:nvSpPr>
-          <p:cNvPr id="23" name="Text 21"/>
-          <p:cNvSpPr txBox="1"/>
-          <p:nvPr/>
-        </p:nvSpPr>
-        <p:spPr>
-          <a:xfrm>
-            <a:off x="9280931" y="3291840"/>
-            <a:ext cx="2087804" cy="1234440"/>
-          </a:xfrm>
-          <a:prstGeom prst="rect">
-            <a:avLst/>
-          </a:prstGeom>
-          <a:noFill/>
-          <a:ln/>
-        </p:spPr>
-        <p:txBody>
-          <a:bodyPr wrap="square" lIns="0" tIns="0" rIns="0" bIns="0" rtlCol="0" anchor="t"/>
-          <a:lstStyle/>
-          <a:p>
-            <a:pPr algn="l" indent="0" marL="0">
+              <a:t>The only region with a monsoon: coconut, banana, papaya and vegetables near Salalah.</a:t>
+            </a:r>
+            <a:endParaRPr lang="en-US" sz="1150" dirty="0"/>
+          </a:p>
+          <a:p>
+            <a:pPr algn="l" marL="342900" indent="-342900">
               <a:lnSpc>
-                <a:spcPct val="120000"/>
+                <a:spcPct val="116000"/>
               </a:lnSpc>
-              <a:buNone/>
-            </a:pPr>
-            <a:r>
-              <a:rPr lang="en-US" sz="1200" dirty="0">
+              <a:spcAft>
+                <a:spcPts val="700"/>
+              </a:spcAft>
+              <a:buSzPct val="100000"/>
+              <a:buChar char="•"/>
+            </a:pPr>
+            <a:r>
+              <a:rPr lang="en-US" sz="1150" dirty="0">
                 <a:solidFill>
                   <a:srgbClr val="364239"/>
                 </a:solidFill>
@@ -5293,57 +5421,39 @@
                 <a:ea typeface="Calibri" pitchFamily="34" charset="-122"/>
                 <a:cs typeface="Calibri" pitchFamily="34" charset="-120"/>
               </a:rPr>
-              <a:t>Gradual rollout to the remaining blocks, on the basis of what was measured.</a:t>
-            </a:r>
-            <a:endParaRPr lang="en-US" sz="1200" dirty="0"/>
-          </a:p>
-        </p:txBody>
-      </p:sp>
-      <p:sp>
-        <p:nvSpPr>
-          <p:cNvPr id="24" name="Text 22"/>
-          <p:cNvSpPr txBox="1"/>
-          <p:nvPr/>
-        </p:nvSpPr>
-        <p:spPr>
-          <a:xfrm>
-            <a:off x="594360" y="4983480"/>
-            <a:ext cx="11002975" cy="822960"/>
-          </a:xfrm>
-          <a:prstGeom prst="rect">
-            <a:avLst/>
-          </a:prstGeom>
-          <a:noFill/>
-          <a:ln/>
-        </p:spPr>
-        <p:txBody>
-          <a:bodyPr wrap="square" lIns="0" tIns="0" rIns="0" bIns="0" rtlCol="0" anchor="t"/>
-          <a:lstStyle/>
-          <a:p>
-            <a:pPr algn="l" indent="0" marL="0">
+              <a:t>Eight dry months outside the khareef: holding the monsoon water in the soil is the whole question.</a:t>
+            </a:r>
+            <a:endParaRPr lang="en-US" sz="1150" dirty="0"/>
+          </a:p>
+          <a:p>
+            <a:pPr algn="l" marL="342900" indent="-342900">
               <a:lnSpc>
-                <a:spcPct val="125000"/>
+                <a:spcPct val="116000"/>
               </a:lnSpc>
-              <a:buNone/>
-            </a:pPr>
-            <a:r>
-              <a:rPr lang="en-US" sz="1250" i="1" dirty="0">
-                <a:solidFill>
-                  <a:srgbClr val="6F7D71"/>
-                </a:solidFill>
-                <a:latin typeface="Calibri" pitchFamily="34" charset="0"/>
-                <a:ea typeface="Calibri" pitchFamily="34" charset="-122"/>
-                <a:cs typeface="Calibri" pitchFamily="34" charset="-120"/>
-              </a:rPr>
-              <a:t>The dosing rule is the same everywhere: 3 grams per litre of useful soil. What changes from one site to the next is the volume of soil the roots actually explore.</a:t>
-            </a:r>
-            <a:endParaRPr lang="en-US" sz="1250" dirty="0"/>
-          </a:p>
-        </p:txBody>
-      </p:sp>
-      <p:sp>
-        <p:nvSpPr>
-          <p:cNvPr id="25" name="Text 23"/>
+              <a:spcAft>
+                <a:spcPts val="700"/>
+              </a:spcAft>
+              <a:buSzPct val="100000"/>
+              <a:buChar char="•"/>
+            </a:pPr>
+            <a:r>
+              <a:rPr lang="en-US" sz="1150" dirty="0">
+                <a:solidFill>
+                  <a:srgbClr val="364239"/>
+                </a:solidFill>
+                <a:latin typeface="Calibri" pitchFamily="34" charset="0"/>
+                <a:ea typeface="Calibri" pitchFamily="34" charset="-122"/>
+                <a:cs typeface="Calibri" pitchFamily="34" charset="-120"/>
+              </a:rPr>
+              <a:t>Soils poor in organic matter, where ECOFERT® adds value alongside the retainer.</a:t>
+            </a:r>
+            <a:endParaRPr lang="en-US" sz="1150" dirty="0"/>
+          </a:p>
+        </p:txBody>
+      </p:sp>
+      <p:sp>
+        <p:nvSpPr>
+          <p:cNvPr id="19" name="Text 14"/>
           <p:cNvSpPr txBox="1"/>
           <p:nvPr/>
         </p:nvSpPr>
@@ -5384,7 +5494,7 @@
       </p:sp>
       <p:sp>
         <p:nvSpPr>
-          <p:cNvPr id="26" name="Text 24"/>
+          <p:cNvPr id="20" name="Text 15"/>
           <p:cNvSpPr txBox="1"/>
           <p:nvPr/>
         </p:nvSpPr>
@@ -5488,7 +5598,7 @@
                 <a:ea typeface="Calibri" pitchFamily="34" charset="-122"/>
                 <a:cs typeface="Calibri" pitchFamily="34" charset="-120"/>
               </a:rPr>
-              <a:t>WHAT TO ANTICIPATE</a:t>
+              <a:t>HOW WE WORK</a:t>
             </a:r>
             <a:endParaRPr lang="en-US" sz="1150" dirty="0"/>
           </a:p>
@@ -5527,7 +5637,7 @@
                 <a:ea typeface="Cambria" pitchFamily="34" charset="-122"/>
                 <a:cs typeface="Cambria" pitchFamily="34" charset="-120"/>
               </a:rPr>
-              <a:t>Identified risks and our answers</a:t>
+              <a:t>A staged rollout, measured at every step</a:t>
             </a:r>
             <a:endParaRPr lang="en-US" sz="3000" dirty="0"/>
           </a:p>
@@ -5535,332 +5645,18 @@
       </p:sp>
       <p:sp>
         <p:nvSpPr>
-          <p:cNvPr id="4" name="Text 2"/>
-          <p:cNvSpPr txBox="1"/>
-          <p:nvPr/>
-        </p:nvSpPr>
-        <p:spPr>
-          <a:xfrm>
-            <a:off x="594360" y="1783080"/>
-            <a:ext cx="5227168" cy="411480"/>
-          </a:xfrm>
-          <a:prstGeom prst="rect">
-            <a:avLst/>
-          </a:prstGeom>
-          <a:noFill/>
-          <a:ln/>
-        </p:spPr>
-        <p:txBody>
-          <a:bodyPr wrap="square" lIns="0" tIns="0" rIns="0" bIns="0" rtlCol="0" anchor="ctr"/>
-          <a:lstStyle/>
-          <a:p>
-            <a:pPr algn="l" indent="0" marL="0">
-              <a:buNone/>
-            </a:pPr>
-            <a:r>
-              <a:rPr lang="en-US" sz="1600" b="1" dirty="0">
-                <a:solidFill>
-                  <a:srgbClr val="2C6E49"/>
-                </a:solidFill>
-                <a:latin typeface="Cambria" pitchFamily="34" charset="0"/>
-                <a:ea typeface="Cambria" pitchFamily="34" charset="-122"/>
-                <a:cs typeface="Cambria" pitchFamily="34" charset="-120"/>
-              </a:rPr>
-              <a:t>Risks</a:t>
-            </a:r>
-            <a:endParaRPr lang="en-US" sz="1600" dirty="0"/>
-          </a:p>
-        </p:txBody>
-      </p:sp>
-      <p:sp>
-        <p:nvSpPr>
-          <p:cNvPr id="5" name="Text 3"/>
-          <p:cNvSpPr txBox="1"/>
-          <p:nvPr/>
-        </p:nvSpPr>
-        <p:spPr>
-          <a:xfrm>
-            <a:off x="594360" y="2286000"/>
-            <a:ext cx="5227168" cy="2468880"/>
-          </a:xfrm>
-          <a:prstGeom prst="rect">
-            <a:avLst/>
-          </a:prstGeom>
-          <a:noFill/>
-          <a:ln/>
-        </p:spPr>
-        <p:txBody>
-          <a:bodyPr wrap="square" lIns="0" tIns="0" rIns="0" bIns="0" rtlCol="0" anchor="t"/>
-          <a:lstStyle/>
-          <a:p>
-            <a:pPr algn="l" marL="342900" indent="-342900">
-              <a:lnSpc>
-                <a:spcPct val="122000"/>
-              </a:lnSpc>
-              <a:spcAft>
-                <a:spcPts val="1000"/>
-              </a:spcAft>
-              <a:buSzPct val="100000"/>
-              <a:buChar char="•"/>
-            </a:pPr>
-            <a:r>
-              <a:rPr lang="en-US" sz="1350" dirty="0">
-                <a:solidFill>
-                  <a:srgbClr val="364239"/>
-                </a:solidFill>
-                <a:latin typeface="Calibri" pitchFamily="34" charset="0"/>
-                <a:ea typeface="Calibri" pitchFamily="34" charset="-122"/>
-                <a:cs typeface="Calibri" pitchFamily="34" charset="-120"/>
-              </a:rPr>
-              <a:t>Summer heat above 45 °C and sandy soils: results vary strongly from one block to the next.</a:t>
-            </a:r>
-            <a:endParaRPr lang="en-US" sz="1350" dirty="0"/>
-          </a:p>
-          <a:p>
-            <a:pPr algn="l" marL="342900" indent="-342900">
-              <a:lnSpc>
-                <a:spcPct val="122000"/>
-              </a:lnSpc>
-              <a:spcAft>
-                <a:spcPts val="1000"/>
-              </a:spcAft>
-              <a:buSzPct val="100000"/>
-              <a:buChar char="•"/>
-            </a:pPr>
-            <a:r>
-              <a:rPr lang="en-US" sz="1350" dirty="0">
-                <a:solidFill>
-                  <a:srgbClr val="364239"/>
-                </a:solidFill>
-                <a:latin typeface="Calibri" pitchFamily="34" charset="0"/>
-                <a:ea typeface="Calibri" pitchFamily="34" charset="-122"/>
-                <a:cs typeface="Calibri" pitchFamily="34" charset="-120"/>
-              </a:rPr>
-              <a:t>Saline irrigation water in coastal areas, and caution toward any new soil input.</a:t>
-            </a:r>
-            <a:endParaRPr lang="en-US" sz="1350" dirty="0"/>
-          </a:p>
-          <a:p>
-            <a:pPr algn="l" marL="342900" indent="-342900">
-              <a:lnSpc>
-                <a:spcPct val="122000"/>
-              </a:lnSpc>
-              <a:spcAft>
-                <a:spcPts val="1000"/>
-              </a:spcAft>
-              <a:buSzPct val="100000"/>
-              <a:buChar char="•"/>
-            </a:pPr>
-            <a:r>
-              <a:rPr lang="en-US" sz="1350" dirty="0">
-                <a:solidFill>
-                  <a:srgbClr val="364239"/>
-                </a:solidFill>
-                <a:latin typeface="Calibri" pitchFamily="34" charset="0"/>
-                <a:ea typeface="Calibri" pitchFamily="34" charset="-122"/>
-                <a:cs typeface="Calibri" pitchFamily="34" charset="-120"/>
-              </a:rPr>
-              <a:t>Registration of fertilisers and soil conditioners before commercial sale.</a:t>
-            </a:r>
-            <a:endParaRPr lang="en-US" sz="1350" dirty="0"/>
-          </a:p>
-          <a:p>
-            <a:pPr algn="l" marL="342900" indent="-342900">
-              <a:lnSpc>
-                <a:spcPct val="122000"/>
-              </a:lnSpc>
-              <a:spcAft>
-                <a:spcPts val="1000"/>
-              </a:spcAft>
-              <a:buSzPct val="100000"/>
-              <a:buChar char="•"/>
-            </a:pPr>
-            <a:r>
-              <a:rPr lang="en-US" sz="1350" dirty="0">
-                <a:solidFill>
-                  <a:srgbClr val="364239"/>
-                </a:solidFill>
-                <a:latin typeface="Calibri" pitchFamily="34" charset="0"/>
-                <a:ea typeface="Calibri" pitchFamily="34" charset="-122"/>
-                <a:cs typeface="Calibri" pitchFamily="34" charset="-120"/>
-              </a:rPr>
-              <a:t>Long decision cycles at large agricultural companies and public bodies.</a:t>
-            </a:r>
-            <a:endParaRPr lang="en-US" sz="1350" dirty="0"/>
-          </a:p>
-        </p:txBody>
-      </p:sp>
-      <p:sp>
-        <p:nvSpPr>
-          <p:cNvPr id="6" name="Text 4"/>
-          <p:cNvSpPr txBox="1"/>
-          <p:nvPr/>
-        </p:nvSpPr>
-        <p:spPr>
-          <a:xfrm>
-            <a:off x="6370168" y="1783080"/>
-            <a:ext cx="5227168" cy="411480"/>
-          </a:xfrm>
-          <a:prstGeom prst="rect">
-            <a:avLst/>
-          </a:prstGeom>
-          <a:noFill/>
-          <a:ln/>
-        </p:spPr>
-        <p:txBody>
-          <a:bodyPr wrap="square" lIns="0" tIns="0" rIns="0" bIns="0" rtlCol="0" anchor="ctr"/>
-          <a:lstStyle/>
-          <a:p>
-            <a:pPr algn="l" indent="0" marL="0">
-              <a:buNone/>
-            </a:pPr>
-            <a:r>
-              <a:rPr lang="en-US" sz="1600" b="1" dirty="0">
-                <a:solidFill>
-                  <a:srgbClr val="2C6E49"/>
-                </a:solidFill>
-                <a:latin typeface="Cambria" pitchFamily="34" charset="0"/>
-                <a:ea typeface="Cambria" pitchFamily="34" charset="-122"/>
-                <a:cs typeface="Cambria" pitchFamily="34" charset="-120"/>
-              </a:rPr>
-              <a:t>Our answers</a:t>
-            </a:r>
-            <a:endParaRPr lang="en-US" sz="1600" dirty="0"/>
-          </a:p>
-        </p:txBody>
-      </p:sp>
-      <p:sp>
-        <p:nvSpPr>
-          <p:cNvPr id="7" name="Text 5"/>
-          <p:cNvSpPr txBox="1"/>
-          <p:nvPr/>
-        </p:nvSpPr>
-        <p:spPr>
-          <a:xfrm>
-            <a:off x="6370168" y="2286000"/>
-            <a:ext cx="5227168" cy="2468880"/>
-          </a:xfrm>
-          <a:prstGeom prst="rect">
-            <a:avLst/>
-          </a:prstGeom>
-          <a:noFill/>
-          <a:ln/>
-        </p:spPr>
-        <p:txBody>
-          <a:bodyPr wrap="square" lIns="0" tIns="0" rIns="0" bIns="0" rtlCol="0" anchor="t"/>
-          <a:lstStyle/>
-          <a:p>
-            <a:pPr algn="l" marL="342900" indent="-342900">
-              <a:lnSpc>
-                <a:spcPct val="122000"/>
-              </a:lnSpc>
-              <a:spcAft>
-                <a:spcPts val="1000"/>
-              </a:spcAft>
-              <a:buSzPct val="100000"/>
-              <a:buChar char="•"/>
-            </a:pPr>
-            <a:r>
-              <a:rPr lang="en-US" sz="1350" dirty="0">
-                <a:solidFill>
-                  <a:srgbClr val="364239"/>
-                </a:solidFill>
-                <a:latin typeface="Calibri" pitchFamily="34" charset="0"/>
-                <a:ea typeface="Calibri" pitchFamily="34" charset="-122"/>
-                <a:cs typeface="Calibri" pitchFamily="34" charset="-120"/>
-              </a:rPr>
-              <a:t>Run trials over a full season against a control block, so the gain is documented in figures.</a:t>
-            </a:r>
-            <a:endParaRPr lang="en-US" sz="1350" dirty="0"/>
-          </a:p>
-          <a:p>
-            <a:pPr algn="l" marL="342900" indent="-342900">
-              <a:lnSpc>
-                <a:spcPct val="122000"/>
-              </a:lnSpc>
-              <a:spcAft>
-                <a:spcPts val="1000"/>
-              </a:spcAft>
-              <a:buSzPct val="100000"/>
-              <a:buChar char="•"/>
-            </a:pPr>
-            <a:r>
-              <a:rPr lang="en-US" sz="1350" dirty="0">
-                <a:solidFill>
-                  <a:srgbClr val="364239"/>
-                </a:solidFill>
-                <a:latin typeface="Calibri" pitchFamily="34" charset="0"/>
-                <a:ea typeface="Calibri" pitchFamily="34" charset="-122"/>
-                <a:cs typeface="Calibri" pitchFamily="34" charset="-120"/>
-              </a:rPr>
-              <a:t>A potassium formulation, never sodium: it adds no salinity and is safe for food crops.</a:t>
-            </a:r>
-            <a:endParaRPr lang="en-US" sz="1350" dirty="0"/>
-          </a:p>
-          <a:p>
-            <a:pPr algn="l" marL="342900" indent="-342900">
-              <a:lnSpc>
-                <a:spcPct val="122000"/>
-              </a:lnSpc>
-              <a:spcAft>
-                <a:spcPts val="1000"/>
-              </a:spcAft>
-              <a:buSzPct val="100000"/>
-              <a:buChar char="•"/>
-            </a:pPr>
-            <a:r>
-              <a:rPr lang="en-US" sz="1350" dirty="0">
-                <a:solidFill>
-                  <a:srgbClr val="364239"/>
-                </a:solidFill>
-                <a:latin typeface="Calibri" pitchFamily="34" charset="0"/>
-                <a:ea typeface="Calibri" pitchFamily="34" charset="-122"/>
-                <a:cs typeface="Calibri" pitchFamily="34" charset="-120"/>
-              </a:rPr>
-              <a:t>Prepare the regulatory file early: analyses and certificates before negotiation starts.</a:t>
-            </a:r>
-            <a:endParaRPr lang="en-US" sz="1350" dirty="0"/>
-          </a:p>
-          <a:p>
-            <a:pPr algn="l" marL="342900" indent="-342900">
-              <a:lnSpc>
-                <a:spcPct val="122000"/>
-              </a:lnSpc>
-              <a:spcAft>
-                <a:spcPts val="1000"/>
-              </a:spcAft>
-              <a:buSzPct val="100000"/>
-              <a:buChar char="•"/>
-            </a:pPr>
-            <a:r>
-              <a:rPr lang="en-US" sz="1350" dirty="0">
-                <a:solidFill>
-                  <a:srgbClr val="364239"/>
-                </a:solidFill>
-                <a:latin typeface="Calibri" pitchFamily="34" charset="0"/>
-                <a:ea typeface="Calibri" pitchFamily="34" charset="-122"/>
-                <a:cs typeface="Calibri" pitchFamily="34" charset="-120"/>
-              </a:rPr>
-              <a:t>Work through farmer associations and model farms to reach many growers at once.</a:t>
-            </a:r>
-            <a:endParaRPr lang="en-US" sz="1350" dirty="0"/>
-          </a:p>
-        </p:txBody>
-      </p:sp>
-      <p:sp>
-        <p:nvSpPr>
-          <p:cNvPr id="8" name="Shape 6"/>
+          <p:cNvPr id="4" name="Shape 2"/>
           <p:cNvSpPr/>
           <p:nvPr/>
         </p:nvSpPr>
         <p:spPr>
           <a:xfrm>
-            <a:off x="594360" y="4846320"/>
-            <a:ext cx="11002975" cy="960120"/>
+            <a:off x="594360" y="1874520"/>
+            <a:ext cx="2545004" cy="2834640"/>
           </a:xfrm>
           <a:prstGeom prst="roundRect">
             <a:avLst>
-              <a:gd name="adj" fmla="val 7619"/>
+              <a:gd name="adj" fmla="val 3593"/>
             </a:avLst>
           </a:prstGeom>
           <a:solidFill>
@@ -5876,14 +5672,112 @@
       </p:sp>
       <p:sp>
         <p:nvSpPr>
-          <p:cNvPr id="9" name="Text 7"/>
-          <p:cNvSpPr txBox="1"/>
-          <p:nvPr/>
-        </p:nvSpPr>
-        <p:spPr>
-          <a:xfrm>
-            <a:off x="822960" y="4983480"/>
-            <a:ext cx="10545775" cy="713232"/>
+          <p:cNvPr id="5" name="Shape 3"/>
+          <p:cNvSpPr/>
+          <p:nvPr/>
+        </p:nvSpPr>
+        <p:spPr>
+          <a:xfrm>
+            <a:off x="822960" y="2103120"/>
+            <a:ext cx="566928" cy="566928"/>
+          </a:xfrm>
+          <a:prstGeom prst="ellipse">
+            <a:avLst/>
+          </a:prstGeom>
+          <a:solidFill>
+            <a:srgbClr val="2C6E49"/>
+          </a:solidFill>
+          <a:ln/>
+        </p:spPr>
+      </p:sp>
+      <p:sp>
+        <p:nvSpPr>
+          <p:cNvPr id="6" name="Text 4"/>
+          <p:cNvSpPr txBox="1"/>
+          <p:nvPr/>
+        </p:nvSpPr>
+        <p:spPr>
+          <a:xfrm>
+            <a:off x="822960" y="2103120"/>
+            <a:ext cx="566928" cy="566928"/>
+          </a:xfrm>
+          <a:prstGeom prst="rect">
+            <a:avLst/>
+          </a:prstGeom>
+          <a:noFill/>
+          <a:ln/>
+        </p:spPr>
+        <p:txBody>
+          <a:bodyPr wrap="square" lIns="0" tIns="0" rIns="0" bIns="0" rtlCol="0" anchor="ctr"/>
+          <a:lstStyle/>
+          <a:p>
+            <a:pPr algn="ctr" indent="0" marL="0">
+              <a:buNone/>
+            </a:pPr>
+            <a:r>
+              <a:rPr lang="en-US" sz="1600" b="1" dirty="0">
+                <a:solidFill>
+                  <a:srgbClr val="FFFFFF"/>
+                </a:solidFill>
+                <a:latin typeface="Cambria" pitchFamily="34" charset="0"/>
+                <a:ea typeface="Cambria" pitchFamily="34" charset="-122"/>
+                <a:cs typeface="Cambria" pitchFamily="34" charset="-120"/>
+              </a:rPr>
+              <a:t>1</a:t>
+            </a:r>
+            <a:endParaRPr lang="en-US" sz="1600" dirty="0"/>
+          </a:p>
+        </p:txBody>
+      </p:sp>
+      <p:sp>
+        <p:nvSpPr>
+          <p:cNvPr id="7" name="Text 5"/>
+          <p:cNvSpPr txBox="1"/>
+          <p:nvPr/>
+        </p:nvSpPr>
+        <p:spPr>
+          <a:xfrm>
+            <a:off x="822960" y="2788920"/>
+            <a:ext cx="2087804" cy="457200"/>
+          </a:xfrm>
+          <a:prstGeom prst="rect">
+            <a:avLst/>
+          </a:prstGeom>
+          <a:noFill/>
+          <a:ln/>
+        </p:spPr>
+        <p:txBody>
+          <a:bodyPr wrap="square" lIns="0" tIns="0" rIns="0" bIns="0" rtlCol="0" anchor="ctr"/>
+          <a:lstStyle/>
+          <a:p>
+            <a:pPr algn="l" indent="0" marL="0">
+              <a:buNone/>
+            </a:pPr>
+            <a:r>
+              <a:rPr lang="en-US" sz="1400" b="1" dirty="0">
+                <a:solidFill>
+                  <a:srgbClr val="2C6E49"/>
+                </a:solidFill>
+                <a:latin typeface="Cambria" pitchFamily="34" charset="0"/>
+                <a:ea typeface="Cambria" pitchFamily="34" charset="-122"/>
+                <a:cs typeface="Cambria" pitchFamily="34" charset="-120"/>
+              </a:rPr>
+              <a:t>Assessment</a:t>
+            </a:r>
+            <a:endParaRPr lang="en-US" sz="1400" dirty="0"/>
+          </a:p>
+        </p:txBody>
+      </p:sp>
+      <p:sp>
+        <p:nvSpPr>
+          <p:cNvPr id="8" name="Text 6"/>
+          <p:cNvSpPr txBox="1"/>
+          <p:nvPr/>
+        </p:nvSpPr>
+        <p:spPr>
+          <a:xfrm>
+            <a:off x="822960" y="3291840"/>
+            <a:ext cx="2087804" cy="1234440"/>
           </a:xfrm>
           <a:prstGeom prst="rect">
             <a:avLst/>
@@ -5897,12 +5791,555 @@
           <a:p>
             <a:pPr algn="l" indent="0" marL="0">
               <a:lnSpc>
-                <a:spcPct val="118000"/>
+                <a:spcPct val="120000"/>
               </a:lnSpc>
               <a:buNone/>
             </a:pPr>
             <a:r>
-              <a:rPr lang="en-US" sz="1100" dirty="0">
+              <a:rPr lang="en-US" sz="1200" dirty="0">
+                <a:solidFill>
+                  <a:srgbClr val="364239"/>
+                </a:solidFill>
+                <a:latin typeface="Calibri" pitchFamily="34" charset="0"/>
+                <a:ea typeface="Calibri" pitchFamily="34" charset="-122"/>
+                <a:cs typeface="Calibri" pitchFamily="34" charset="-120"/>
+              </a:rPr>
+              <a:t>Soil, irrigation method and crop are reviewed. No commitment at this stage.</a:t>
+            </a:r>
+            <a:endParaRPr lang="en-US" sz="1200" dirty="0"/>
+          </a:p>
+        </p:txBody>
+      </p:sp>
+      <p:sp>
+        <p:nvSpPr>
+          <p:cNvPr id="9" name="Shape 7"/>
+          <p:cNvSpPr/>
+          <p:nvPr/>
+        </p:nvSpPr>
+        <p:spPr>
+          <a:xfrm>
+            <a:off x="3413684" y="1874520"/>
+            <a:ext cx="2545004" cy="2834640"/>
+          </a:xfrm>
+          <a:prstGeom prst="roundRect">
+            <a:avLst>
+              <a:gd name="adj" fmla="val 3593"/>
+            </a:avLst>
+          </a:prstGeom>
+          <a:solidFill>
+            <a:srgbClr val="F2F1E8"/>
+          </a:solidFill>
+          <a:ln w="9525">
+            <a:solidFill>
+              <a:srgbClr val="E0DFD0"/>
+            </a:solidFill>
+            <a:prstDash val="solid"/>
+          </a:ln>
+        </p:spPr>
+      </p:sp>
+      <p:sp>
+        <p:nvSpPr>
+          <p:cNvPr id="10" name="Shape 8"/>
+          <p:cNvSpPr/>
+          <p:nvPr/>
+        </p:nvSpPr>
+        <p:spPr>
+          <a:xfrm>
+            <a:off x="3642284" y="2103120"/>
+            <a:ext cx="566928" cy="566928"/>
+          </a:xfrm>
+          <a:prstGeom prst="ellipse">
+            <a:avLst/>
+          </a:prstGeom>
+          <a:solidFill>
+            <a:srgbClr val="2C6E49"/>
+          </a:solidFill>
+          <a:ln/>
+        </p:spPr>
+      </p:sp>
+      <p:sp>
+        <p:nvSpPr>
+          <p:cNvPr id="11" name="Text 9"/>
+          <p:cNvSpPr txBox="1"/>
+          <p:nvPr/>
+        </p:nvSpPr>
+        <p:spPr>
+          <a:xfrm>
+            <a:off x="3642284" y="2103120"/>
+            <a:ext cx="566928" cy="566928"/>
+          </a:xfrm>
+          <a:prstGeom prst="rect">
+            <a:avLst/>
+          </a:prstGeom>
+          <a:noFill/>
+          <a:ln/>
+        </p:spPr>
+        <p:txBody>
+          <a:bodyPr wrap="square" lIns="0" tIns="0" rIns="0" bIns="0" rtlCol="0" anchor="ctr"/>
+          <a:lstStyle/>
+          <a:p>
+            <a:pPr algn="ctr" indent="0" marL="0">
+              <a:buNone/>
+            </a:pPr>
+            <a:r>
+              <a:rPr lang="en-US" sz="1600" b="1" dirty="0">
+                <a:solidFill>
+                  <a:srgbClr val="FFFFFF"/>
+                </a:solidFill>
+                <a:latin typeface="Cambria" pitchFamily="34" charset="0"/>
+                <a:ea typeface="Cambria" pitchFamily="34" charset="-122"/>
+                <a:cs typeface="Cambria" pitchFamily="34" charset="-120"/>
+              </a:rPr>
+              <a:t>2</a:t>
+            </a:r>
+            <a:endParaRPr lang="en-US" sz="1600" dirty="0"/>
+          </a:p>
+        </p:txBody>
+      </p:sp>
+      <p:sp>
+        <p:nvSpPr>
+          <p:cNvPr id="12" name="Text 10"/>
+          <p:cNvSpPr txBox="1"/>
+          <p:nvPr/>
+        </p:nvSpPr>
+        <p:spPr>
+          <a:xfrm>
+            <a:off x="3642284" y="2788920"/>
+            <a:ext cx="2087804" cy="457200"/>
+          </a:xfrm>
+          <a:prstGeom prst="rect">
+            <a:avLst/>
+          </a:prstGeom>
+          <a:noFill/>
+          <a:ln/>
+        </p:spPr>
+        <p:txBody>
+          <a:bodyPr wrap="square" lIns="0" tIns="0" rIns="0" bIns="0" rtlCol="0" anchor="ctr"/>
+          <a:lstStyle/>
+          <a:p>
+            <a:pPr algn="l" indent="0" marL="0">
+              <a:buNone/>
+            </a:pPr>
+            <a:r>
+              <a:rPr lang="en-US" sz="1400" b="1" dirty="0">
+                <a:solidFill>
+                  <a:srgbClr val="2C6E49"/>
+                </a:solidFill>
+                <a:latin typeface="Cambria" pitchFamily="34" charset="0"/>
+                <a:ea typeface="Cambria" pitchFamily="34" charset="-122"/>
+                <a:cs typeface="Cambria" pitchFamily="34" charset="-120"/>
+              </a:rPr>
+              <a:t>Trial block</a:t>
+            </a:r>
+            <a:endParaRPr lang="en-US" sz="1400" dirty="0"/>
+          </a:p>
+        </p:txBody>
+      </p:sp>
+      <p:sp>
+        <p:nvSpPr>
+          <p:cNvPr id="13" name="Text 11"/>
+          <p:cNvSpPr txBox="1"/>
+          <p:nvPr/>
+        </p:nvSpPr>
+        <p:spPr>
+          <a:xfrm>
+            <a:off x="3642284" y="3291840"/>
+            <a:ext cx="2087804" cy="1234440"/>
+          </a:xfrm>
+          <a:prstGeom prst="rect">
+            <a:avLst/>
+          </a:prstGeom>
+          <a:noFill/>
+          <a:ln/>
+        </p:spPr>
+        <p:txBody>
+          <a:bodyPr wrap="square" lIns="0" tIns="0" rIns="0" bIns="0" rtlCol="0" anchor="t"/>
+          <a:lstStyle/>
+          <a:p>
+            <a:pPr algn="l" indent="0" marL="0">
+              <a:lnSpc>
+                <a:spcPct val="120000"/>
+              </a:lnSpc>
+              <a:buNone/>
+            </a:pPr>
+            <a:r>
+              <a:rPr lang="en-US" sz="1200" dirty="0">
+                <a:solidFill>
+                  <a:srgbClr val="364239"/>
+                </a:solidFill>
+                <a:latin typeface="Calibri" pitchFamily="34" charset="0"/>
+                <a:ea typeface="Calibri" pitchFamily="34" charset="-122"/>
+                <a:cs typeface="Calibri" pitchFamily="34" charset="-120"/>
+              </a:rPr>
+              <a:t>One comparative trial block, against a control block managed identically.</a:t>
+            </a:r>
+            <a:endParaRPr lang="en-US" sz="1200" dirty="0"/>
+          </a:p>
+        </p:txBody>
+      </p:sp>
+      <p:sp>
+        <p:nvSpPr>
+          <p:cNvPr id="14" name="Shape 12"/>
+          <p:cNvSpPr/>
+          <p:nvPr/>
+        </p:nvSpPr>
+        <p:spPr>
+          <a:xfrm>
+            <a:off x="6233008" y="1874520"/>
+            <a:ext cx="2545004" cy="2834640"/>
+          </a:xfrm>
+          <a:prstGeom prst="roundRect">
+            <a:avLst>
+              <a:gd name="adj" fmla="val 3593"/>
+            </a:avLst>
+          </a:prstGeom>
+          <a:solidFill>
+            <a:srgbClr val="F2F1E8"/>
+          </a:solidFill>
+          <a:ln w="9525">
+            <a:solidFill>
+              <a:srgbClr val="E0DFD0"/>
+            </a:solidFill>
+            <a:prstDash val="solid"/>
+          </a:ln>
+        </p:spPr>
+      </p:sp>
+      <p:sp>
+        <p:nvSpPr>
+          <p:cNvPr id="15" name="Shape 13"/>
+          <p:cNvSpPr/>
+          <p:nvPr/>
+        </p:nvSpPr>
+        <p:spPr>
+          <a:xfrm>
+            <a:off x="6461608" y="2103120"/>
+            <a:ext cx="566928" cy="566928"/>
+          </a:xfrm>
+          <a:prstGeom prst="ellipse">
+            <a:avLst/>
+          </a:prstGeom>
+          <a:solidFill>
+            <a:srgbClr val="2C6E49"/>
+          </a:solidFill>
+          <a:ln/>
+        </p:spPr>
+      </p:sp>
+      <p:sp>
+        <p:nvSpPr>
+          <p:cNvPr id="16" name="Text 14"/>
+          <p:cNvSpPr txBox="1"/>
+          <p:nvPr/>
+        </p:nvSpPr>
+        <p:spPr>
+          <a:xfrm>
+            <a:off x="6461608" y="2103120"/>
+            <a:ext cx="566928" cy="566928"/>
+          </a:xfrm>
+          <a:prstGeom prst="rect">
+            <a:avLst/>
+          </a:prstGeom>
+          <a:noFill/>
+          <a:ln/>
+        </p:spPr>
+        <p:txBody>
+          <a:bodyPr wrap="square" lIns="0" tIns="0" rIns="0" bIns="0" rtlCol="0" anchor="ctr"/>
+          <a:lstStyle/>
+          <a:p>
+            <a:pPr algn="ctr" indent="0" marL="0">
+              <a:buNone/>
+            </a:pPr>
+            <a:r>
+              <a:rPr lang="en-US" sz="1600" b="1" dirty="0">
+                <a:solidFill>
+                  <a:srgbClr val="FFFFFF"/>
+                </a:solidFill>
+                <a:latin typeface="Cambria" pitchFamily="34" charset="0"/>
+                <a:ea typeface="Cambria" pitchFamily="34" charset="-122"/>
+                <a:cs typeface="Cambria" pitchFamily="34" charset="-120"/>
+              </a:rPr>
+              <a:t>3</a:t>
+            </a:r>
+            <a:endParaRPr lang="en-US" sz="1600" dirty="0"/>
+          </a:p>
+        </p:txBody>
+      </p:sp>
+      <p:sp>
+        <p:nvSpPr>
+          <p:cNvPr id="17" name="Text 15"/>
+          <p:cNvSpPr txBox="1"/>
+          <p:nvPr/>
+        </p:nvSpPr>
+        <p:spPr>
+          <a:xfrm>
+            <a:off x="6461608" y="2788920"/>
+            <a:ext cx="2087804" cy="457200"/>
+          </a:xfrm>
+          <a:prstGeom prst="rect">
+            <a:avLst/>
+          </a:prstGeom>
+          <a:noFill/>
+          <a:ln/>
+        </p:spPr>
+        <p:txBody>
+          <a:bodyPr wrap="square" lIns="0" tIns="0" rIns="0" bIns="0" rtlCol="0" anchor="ctr"/>
+          <a:lstStyle/>
+          <a:p>
+            <a:pPr algn="l" indent="0" marL="0">
+              <a:buNone/>
+            </a:pPr>
+            <a:r>
+              <a:rPr lang="en-US" sz="1400" b="1" dirty="0">
+                <a:solidFill>
+                  <a:srgbClr val="2C6E49"/>
+                </a:solidFill>
+                <a:latin typeface="Cambria" pitchFamily="34" charset="0"/>
+                <a:ea typeface="Cambria" pitchFamily="34" charset="-122"/>
+                <a:cs typeface="Cambria" pitchFamily="34" charset="-120"/>
+              </a:rPr>
+              <a:t>Measurement</a:t>
+            </a:r>
+            <a:endParaRPr lang="en-US" sz="1400" dirty="0"/>
+          </a:p>
+        </p:txBody>
+      </p:sp>
+      <p:sp>
+        <p:nvSpPr>
+          <p:cNvPr id="18" name="Text 16"/>
+          <p:cNvSpPr txBox="1"/>
+          <p:nvPr/>
+        </p:nvSpPr>
+        <p:spPr>
+          <a:xfrm>
+            <a:off x="6461608" y="3291840"/>
+            <a:ext cx="2087804" cy="1234440"/>
+          </a:xfrm>
+          <a:prstGeom prst="rect">
+            <a:avLst/>
+          </a:prstGeom>
+          <a:noFill/>
+          <a:ln/>
+        </p:spPr>
+        <p:txBody>
+          <a:bodyPr wrap="square" lIns="0" tIns="0" rIns="0" bIns="0" rtlCol="0" anchor="t"/>
+          <a:lstStyle/>
+          <a:p>
+            <a:pPr algn="l" indent="0" marL="0">
+              <a:lnSpc>
+                <a:spcPct val="120000"/>
+              </a:lnSpc>
+              <a:buNone/>
+            </a:pPr>
+            <a:r>
+              <a:rPr lang="en-US" sz="1200" dirty="0">
+                <a:solidFill>
+                  <a:srgbClr val="364239"/>
+                </a:solidFill>
+                <a:latin typeface="Calibri" pitchFamily="34" charset="0"/>
+                <a:ea typeface="Calibri" pitchFamily="34" charset="-122"/>
+                <a:cs typeface="Calibri" pitchFamily="34" charset="-120"/>
+              </a:rPr>
+              <a:t>Water use and yield recorded over a full season, summer included.</a:t>
+            </a:r>
+            <a:endParaRPr lang="en-US" sz="1200" dirty="0"/>
+          </a:p>
+        </p:txBody>
+      </p:sp>
+      <p:sp>
+        <p:nvSpPr>
+          <p:cNvPr id="19" name="Shape 17"/>
+          <p:cNvSpPr/>
+          <p:nvPr/>
+        </p:nvSpPr>
+        <p:spPr>
+          <a:xfrm>
+            <a:off x="9052331" y="1874520"/>
+            <a:ext cx="2545004" cy="2834640"/>
+          </a:xfrm>
+          <a:prstGeom prst="roundRect">
+            <a:avLst>
+              <a:gd name="adj" fmla="val 3593"/>
+            </a:avLst>
+          </a:prstGeom>
+          <a:solidFill>
+            <a:srgbClr val="F2F1E8"/>
+          </a:solidFill>
+          <a:ln w="9525">
+            <a:solidFill>
+              <a:srgbClr val="E0DFD0"/>
+            </a:solidFill>
+            <a:prstDash val="solid"/>
+          </a:ln>
+        </p:spPr>
+      </p:sp>
+      <p:sp>
+        <p:nvSpPr>
+          <p:cNvPr id="20" name="Shape 18"/>
+          <p:cNvSpPr/>
+          <p:nvPr/>
+        </p:nvSpPr>
+        <p:spPr>
+          <a:xfrm>
+            <a:off x="9280931" y="2103120"/>
+            <a:ext cx="566928" cy="566928"/>
+          </a:xfrm>
+          <a:prstGeom prst="ellipse">
+            <a:avLst/>
+          </a:prstGeom>
+          <a:solidFill>
+            <a:srgbClr val="2C6E49"/>
+          </a:solidFill>
+          <a:ln/>
+        </p:spPr>
+      </p:sp>
+      <p:sp>
+        <p:nvSpPr>
+          <p:cNvPr id="21" name="Text 19"/>
+          <p:cNvSpPr txBox="1"/>
+          <p:nvPr/>
+        </p:nvSpPr>
+        <p:spPr>
+          <a:xfrm>
+            <a:off x="9280931" y="2103120"/>
+            <a:ext cx="566928" cy="566928"/>
+          </a:xfrm>
+          <a:prstGeom prst="rect">
+            <a:avLst/>
+          </a:prstGeom>
+          <a:noFill/>
+          <a:ln/>
+        </p:spPr>
+        <p:txBody>
+          <a:bodyPr wrap="square" lIns="0" tIns="0" rIns="0" bIns="0" rtlCol="0" anchor="ctr"/>
+          <a:lstStyle/>
+          <a:p>
+            <a:pPr algn="ctr" indent="0" marL="0">
+              <a:buNone/>
+            </a:pPr>
+            <a:r>
+              <a:rPr lang="en-US" sz="1600" b="1" dirty="0">
+                <a:solidFill>
+                  <a:srgbClr val="FFFFFF"/>
+                </a:solidFill>
+                <a:latin typeface="Cambria" pitchFamily="34" charset="0"/>
+                <a:ea typeface="Cambria" pitchFamily="34" charset="-122"/>
+                <a:cs typeface="Cambria" pitchFamily="34" charset="-120"/>
+              </a:rPr>
+              <a:t>4</a:t>
+            </a:r>
+            <a:endParaRPr lang="en-US" sz="1600" dirty="0"/>
+          </a:p>
+        </p:txBody>
+      </p:sp>
+      <p:sp>
+        <p:nvSpPr>
+          <p:cNvPr id="22" name="Text 20"/>
+          <p:cNvSpPr txBox="1"/>
+          <p:nvPr/>
+        </p:nvSpPr>
+        <p:spPr>
+          <a:xfrm>
+            <a:off x="9280931" y="2788920"/>
+            <a:ext cx="2087804" cy="457200"/>
+          </a:xfrm>
+          <a:prstGeom prst="rect">
+            <a:avLst/>
+          </a:prstGeom>
+          <a:noFill/>
+          <a:ln/>
+        </p:spPr>
+        <p:txBody>
+          <a:bodyPr wrap="square" lIns="0" tIns="0" rIns="0" bIns="0" rtlCol="0" anchor="ctr"/>
+          <a:lstStyle/>
+          <a:p>
+            <a:pPr algn="l" indent="0" marL="0">
+              <a:buNone/>
+            </a:pPr>
+            <a:r>
+              <a:rPr lang="en-US" sz="1400" b="1" dirty="0">
+                <a:solidFill>
+                  <a:srgbClr val="2C6E49"/>
+                </a:solidFill>
+                <a:latin typeface="Cambria" pitchFamily="34" charset="0"/>
+                <a:ea typeface="Cambria" pitchFamily="34" charset="-122"/>
+                <a:cs typeface="Cambria" pitchFamily="34" charset="-120"/>
+              </a:rPr>
+              <a:t>Extension</a:t>
+            </a:r>
+            <a:endParaRPr lang="en-US" sz="1400" dirty="0"/>
+          </a:p>
+        </p:txBody>
+      </p:sp>
+      <p:sp>
+        <p:nvSpPr>
+          <p:cNvPr id="23" name="Text 21"/>
+          <p:cNvSpPr txBox="1"/>
+          <p:nvPr/>
+        </p:nvSpPr>
+        <p:spPr>
+          <a:xfrm>
+            <a:off x="9280931" y="3291840"/>
+            <a:ext cx="2087804" cy="1234440"/>
+          </a:xfrm>
+          <a:prstGeom prst="rect">
+            <a:avLst/>
+          </a:prstGeom>
+          <a:noFill/>
+          <a:ln/>
+        </p:spPr>
+        <p:txBody>
+          <a:bodyPr wrap="square" lIns="0" tIns="0" rIns="0" bIns="0" rtlCol="0" anchor="t"/>
+          <a:lstStyle/>
+          <a:p>
+            <a:pPr algn="l" indent="0" marL="0">
+              <a:lnSpc>
+                <a:spcPct val="120000"/>
+              </a:lnSpc>
+              <a:buNone/>
+            </a:pPr>
+            <a:r>
+              <a:rPr lang="en-US" sz="1200" dirty="0">
+                <a:solidFill>
+                  <a:srgbClr val="364239"/>
+                </a:solidFill>
+                <a:latin typeface="Calibri" pitchFamily="34" charset="0"/>
+                <a:ea typeface="Calibri" pitchFamily="34" charset="-122"/>
+                <a:cs typeface="Calibri" pitchFamily="34" charset="-120"/>
+              </a:rPr>
+              <a:t>Gradual rollout to the remaining blocks, on the basis of what was measured.</a:t>
+            </a:r>
+            <a:endParaRPr lang="en-US" sz="1200" dirty="0"/>
+          </a:p>
+        </p:txBody>
+      </p:sp>
+      <p:sp>
+        <p:nvSpPr>
+          <p:cNvPr id="24" name="Text 22"/>
+          <p:cNvSpPr txBox="1"/>
+          <p:nvPr/>
+        </p:nvSpPr>
+        <p:spPr>
+          <a:xfrm>
+            <a:off x="594360" y="4983480"/>
+            <a:ext cx="11002975" cy="822960"/>
+          </a:xfrm>
+          <a:prstGeom prst="rect">
+            <a:avLst/>
+          </a:prstGeom>
+          <a:noFill/>
+          <a:ln/>
+        </p:spPr>
+        <p:txBody>
+          <a:bodyPr wrap="square" lIns="0" tIns="0" rIns="0" bIns="0" rtlCol="0" anchor="t"/>
+          <a:lstStyle/>
+          <a:p>
+            <a:pPr algn="l" indent="0" marL="0">
+              <a:lnSpc>
+                <a:spcPct val="125000"/>
+              </a:lnSpc>
+              <a:buNone/>
+            </a:pPr>
+            <a:r>
+              <a:rPr lang="en-US" sz="1250" i="1" dirty="0">
                 <a:solidFill>
                   <a:srgbClr val="6F7D71"/>
                 </a:solidFill>
@@ -5910,15 +6347,15 @@
                 <a:ea typeface="Calibri" pitchFamily="34" charset="-122"/>
                 <a:cs typeface="Calibri" pitchFamily="34" charset="-120"/>
               </a:rPr>
-              <a:t>Acrylamide analysis (Polymex laboratory, ISO 9001, content below 3.0 µg/g) and REACH / SVHC screening (SGS) are available on request, together with the SOHISCERT certificate valid until 4 September 2027.</a:t>
-            </a:r>
-            <a:endParaRPr lang="en-US" sz="1100" dirty="0"/>
-          </a:p>
-        </p:txBody>
-      </p:sp>
-      <p:sp>
-        <p:nvSpPr>
-          <p:cNvPr id="10" name="Text 8"/>
+              <a:t>The dosing rule is the same everywhere: 3 grams per litre of useful soil. What changes from one site to the next is the volume of soil the roots actually explore.</a:t>
+            </a:r>
+            <a:endParaRPr lang="en-US" sz="1250" dirty="0"/>
+          </a:p>
+        </p:txBody>
+      </p:sp>
+      <p:sp>
+        <p:nvSpPr>
+          <p:cNvPr id="25" name="Text 23"/>
           <p:cNvSpPr txBox="1"/>
           <p:nvPr/>
         </p:nvSpPr>
@@ -5959,7 +6396,7 @@
       </p:sp>
       <p:sp>
         <p:nvSpPr>
-          <p:cNvPr id="11" name="Text 9"/>
+          <p:cNvPr id="26" name="Text 24"/>
           <p:cNvSpPr txBox="1"/>
           <p:nvPr/>
         </p:nvSpPr>
@@ -6009,6 +6446,1108 @@
 <file path=ppt/slides/slide14.xml><?xml version="1.0" encoding="utf-8"?>
 <p:sld xmlns:a="http://schemas.openxmlformats.org/drawingml/2006/main" xmlns:r="http://schemas.openxmlformats.org/officeDocument/2006/relationships" xmlns:p="http://schemas.openxmlformats.org/presentationml/2006/main">
   <p:cSld name="Slide 14">
+    <p:bg>
+      <p:bgPr>
+        <a:solidFill>
+          <a:srgbClr val="FCFAF5"/>
+        </a:solidFill>
+      </p:bgPr>
+    </p:bg>
+    <p:spTree>
+      <p:nvGrpSpPr>
+        <p:cNvPr id="1" name=""/>
+        <p:cNvGrpSpPr/>
+        <p:nvPr/>
+      </p:nvGrpSpPr>
+      <p:grpSpPr>
+        <a:xfrm>
+          <a:off x="0" y="0"/>
+          <a:ext cx="0" cy="0"/>
+          <a:chOff x="0" y="0"/>
+          <a:chExt cx="0" cy="0"/>
+        </a:xfrm>
+      </p:grpSpPr>
+      <p:sp>
+        <p:nvSpPr>
+          <p:cNvPr id="2" name="Text 0"/>
+          <p:cNvSpPr txBox="1"/>
+          <p:nvPr/>
+        </p:nvSpPr>
+        <p:spPr>
+          <a:xfrm>
+            <a:off x="594360" y="411480"/>
+            <a:ext cx="10515600" cy="274320"/>
+          </a:xfrm>
+          <a:prstGeom prst="rect">
+            <a:avLst/>
+          </a:prstGeom>
+          <a:noFill/>
+          <a:ln/>
+        </p:spPr>
+        <p:txBody>
+          <a:bodyPr wrap="square" lIns="0" tIns="0" rIns="0" bIns="0" rtlCol="0" anchor="ctr"/>
+          <a:lstStyle/>
+          <a:p>
+            <a:pPr algn="l" indent="0" marL="0">
+              <a:buNone/>
+            </a:pPr>
+            <a:r>
+              <a:rPr lang="en-US" sz="1150" b="1" spc="200" kern="0" dirty="0">
+                <a:solidFill>
+                  <a:srgbClr val="D9A441"/>
+                </a:solidFill>
+                <a:latin typeface="Calibri" pitchFamily="34" charset="0"/>
+                <a:ea typeface="Calibri" pitchFamily="34" charset="-122"/>
+                <a:cs typeface="Calibri" pitchFamily="34" charset="-120"/>
+              </a:rPr>
+              <a:t>WHAT TO ANTICIPATE</a:t>
+            </a:r>
+            <a:endParaRPr lang="en-US" sz="1150" dirty="0"/>
+          </a:p>
+        </p:txBody>
+      </p:sp>
+      <p:sp>
+        <p:nvSpPr>
+          <p:cNvPr id="3" name="Text 1"/>
+          <p:cNvSpPr txBox="1"/>
+          <p:nvPr/>
+        </p:nvSpPr>
+        <p:spPr>
+          <a:xfrm>
+            <a:off x="594360" y="731520"/>
+            <a:ext cx="10881360" cy="731520"/>
+          </a:xfrm>
+          <a:prstGeom prst="rect">
+            <a:avLst/>
+          </a:prstGeom>
+          <a:noFill/>
+          <a:ln/>
+        </p:spPr>
+        <p:txBody>
+          <a:bodyPr wrap="square" lIns="0" tIns="0" rIns="0" bIns="0" rtlCol="0" anchor="ctr"/>
+          <a:lstStyle/>
+          <a:p>
+            <a:pPr algn="l" indent="0" marL="0">
+              <a:buNone/>
+            </a:pPr>
+            <a:r>
+              <a:rPr lang="en-US" sz="3000" b="1" dirty="0">
+                <a:solidFill>
+                  <a:srgbClr val="16412B"/>
+                </a:solidFill>
+                <a:latin typeface="Cambria" pitchFamily="34" charset="0"/>
+                <a:ea typeface="Cambria" pitchFamily="34" charset="-122"/>
+                <a:cs typeface="Cambria" pitchFamily="34" charset="-120"/>
+              </a:rPr>
+              <a:t>Identified risks and our answers</a:t>
+            </a:r>
+            <a:endParaRPr lang="en-US" sz="3000" dirty="0"/>
+          </a:p>
+        </p:txBody>
+      </p:sp>
+      <p:sp>
+        <p:nvSpPr>
+          <p:cNvPr id="4" name="Text 2"/>
+          <p:cNvSpPr txBox="1"/>
+          <p:nvPr/>
+        </p:nvSpPr>
+        <p:spPr>
+          <a:xfrm>
+            <a:off x="594360" y="1783080"/>
+            <a:ext cx="5227168" cy="411480"/>
+          </a:xfrm>
+          <a:prstGeom prst="rect">
+            <a:avLst/>
+          </a:prstGeom>
+          <a:noFill/>
+          <a:ln/>
+        </p:spPr>
+        <p:txBody>
+          <a:bodyPr wrap="square" lIns="0" tIns="0" rIns="0" bIns="0" rtlCol="0" anchor="ctr"/>
+          <a:lstStyle/>
+          <a:p>
+            <a:pPr algn="l" indent="0" marL="0">
+              <a:buNone/>
+            </a:pPr>
+            <a:r>
+              <a:rPr lang="en-US" sz="1600" b="1" dirty="0">
+                <a:solidFill>
+                  <a:srgbClr val="2C6E49"/>
+                </a:solidFill>
+                <a:latin typeface="Cambria" pitchFamily="34" charset="0"/>
+                <a:ea typeface="Cambria" pitchFamily="34" charset="-122"/>
+                <a:cs typeface="Cambria" pitchFamily="34" charset="-120"/>
+              </a:rPr>
+              <a:t>Risks</a:t>
+            </a:r>
+            <a:endParaRPr lang="en-US" sz="1600" dirty="0"/>
+          </a:p>
+        </p:txBody>
+      </p:sp>
+      <p:sp>
+        <p:nvSpPr>
+          <p:cNvPr id="5" name="Text 3"/>
+          <p:cNvSpPr txBox="1"/>
+          <p:nvPr/>
+        </p:nvSpPr>
+        <p:spPr>
+          <a:xfrm>
+            <a:off x="594360" y="2286000"/>
+            <a:ext cx="5227168" cy="2468880"/>
+          </a:xfrm>
+          <a:prstGeom prst="rect">
+            <a:avLst/>
+          </a:prstGeom>
+          <a:noFill/>
+          <a:ln/>
+        </p:spPr>
+        <p:txBody>
+          <a:bodyPr wrap="square" lIns="0" tIns="0" rIns="0" bIns="0" rtlCol="0" anchor="t"/>
+          <a:lstStyle/>
+          <a:p>
+            <a:pPr algn="l" marL="342900" indent="-342900">
+              <a:lnSpc>
+                <a:spcPct val="122000"/>
+              </a:lnSpc>
+              <a:spcAft>
+                <a:spcPts val="1000"/>
+              </a:spcAft>
+              <a:buSzPct val="100000"/>
+              <a:buChar char="•"/>
+            </a:pPr>
+            <a:r>
+              <a:rPr lang="en-US" sz="1350" dirty="0">
+                <a:solidFill>
+                  <a:srgbClr val="364239"/>
+                </a:solidFill>
+                <a:latin typeface="Calibri" pitchFamily="34" charset="0"/>
+                <a:ea typeface="Calibri" pitchFamily="34" charset="-122"/>
+                <a:cs typeface="Calibri" pitchFamily="34" charset="-120"/>
+              </a:rPr>
+              <a:t>Summer heat above 45 °C and sandy soils: results vary strongly from one block to the next.</a:t>
+            </a:r>
+            <a:endParaRPr lang="en-US" sz="1350" dirty="0"/>
+          </a:p>
+          <a:p>
+            <a:pPr algn="l" marL="342900" indent="-342900">
+              <a:lnSpc>
+                <a:spcPct val="122000"/>
+              </a:lnSpc>
+              <a:spcAft>
+                <a:spcPts val="1000"/>
+              </a:spcAft>
+              <a:buSzPct val="100000"/>
+              <a:buChar char="•"/>
+            </a:pPr>
+            <a:r>
+              <a:rPr lang="en-US" sz="1350" dirty="0">
+                <a:solidFill>
+                  <a:srgbClr val="364239"/>
+                </a:solidFill>
+                <a:latin typeface="Calibri" pitchFamily="34" charset="0"/>
+                <a:ea typeface="Calibri" pitchFamily="34" charset="-122"/>
+                <a:cs typeface="Calibri" pitchFamily="34" charset="-120"/>
+              </a:rPr>
+              <a:t>Saline irrigation water in coastal areas, and caution toward any new soil input.</a:t>
+            </a:r>
+            <a:endParaRPr lang="en-US" sz="1350" dirty="0"/>
+          </a:p>
+          <a:p>
+            <a:pPr algn="l" marL="342900" indent="-342900">
+              <a:lnSpc>
+                <a:spcPct val="122000"/>
+              </a:lnSpc>
+              <a:spcAft>
+                <a:spcPts val="1000"/>
+              </a:spcAft>
+              <a:buSzPct val="100000"/>
+              <a:buChar char="•"/>
+            </a:pPr>
+            <a:r>
+              <a:rPr lang="en-US" sz="1350" dirty="0">
+                <a:solidFill>
+                  <a:srgbClr val="364239"/>
+                </a:solidFill>
+                <a:latin typeface="Calibri" pitchFamily="34" charset="0"/>
+                <a:ea typeface="Calibri" pitchFamily="34" charset="-122"/>
+                <a:cs typeface="Calibri" pitchFamily="34" charset="-120"/>
+              </a:rPr>
+              <a:t>Registration of fertilisers and soil conditioners before commercial sale.</a:t>
+            </a:r>
+            <a:endParaRPr lang="en-US" sz="1350" dirty="0"/>
+          </a:p>
+          <a:p>
+            <a:pPr algn="l" marL="342900" indent="-342900">
+              <a:lnSpc>
+                <a:spcPct val="122000"/>
+              </a:lnSpc>
+              <a:spcAft>
+                <a:spcPts val="1000"/>
+              </a:spcAft>
+              <a:buSzPct val="100000"/>
+              <a:buChar char="•"/>
+            </a:pPr>
+            <a:r>
+              <a:rPr lang="en-US" sz="1350" dirty="0">
+                <a:solidFill>
+                  <a:srgbClr val="364239"/>
+                </a:solidFill>
+                <a:latin typeface="Calibri" pitchFamily="34" charset="0"/>
+                <a:ea typeface="Calibri" pitchFamily="34" charset="-122"/>
+                <a:cs typeface="Calibri" pitchFamily="34" charset="-120"/>
+              </a:rPr>
+              <a:t>Long decision cycles at large agricultural companies and public bodies.</a:t>
+            </a:r>
+            <a:endParaRPr lang="en-US" sz="1350" dirty="0"/>
+          </a:p>
+        </p:txBody>
+      </p:sp>
+      <p:sp>
+        <p:nvSpPr>
+          <p:cNvPr id="6" name="Text 4"/>
+          <p:cNvSpPr txBox="1"/>
+          <p:nvPr/>
+        </p:nvSpPr>
+        <p:spPr>
+          <a:xfrm>
+            <a:off x="6370168" y="1783080"/>
+            <a:ext cx="5227168" cy="411480"/>
+          </a:xfrm>
+          <a:prstGeom prst="rect">
+            <a:avLst/>
+          </a:prstGeom>
+          <a:noFill/>
+          <a:ln/>
+        </p:spPr>
+        <p:txBody>
+          <a:bodyPr wrap="square" lIns="0" tIns="0" rIns="0" bIns="0" rtlCol="0" anchor="ctr"/>
+          <a:lstStyle/>
+          <a:p>
+            <a:pPr algn="l" indent="0" marL="0">
+              <a:buNone/>
+            </a:pPr>
+            <a:r>
+              <a:rPr lang="en-US" sz="1600" b="1" dirty="0">
+                <a:solidFill>
+                  <a:srgbClr val="2C6E49"/>
+                </a:solidFill>
+                <a:latin typeface="Cambria" pitchFamily="34" charset="0"/>
+                <a:ea typeface="Cambria" pitchFamily="34" charset="-122"/>
+                <a:cs typeface="Cambria" pitchFamily="34" charset="-120"/>
+              </a:rPr>
+              <a:t>Our answers</a:t>
+            </a:r>
+            <a:endParaRPr lang="en-US" sz="1600" dirty="0"/>
+          </a:p>
+        </p:txBody>
+      </p:sp>
+      <p:sp>
+        <p:nvSpPr>
+          <p:cNvPr id="7" name="Text 5"/>
+          <p:cNvSpPr txBox="1"/>
+          <p:nvPr/>
+        </p:nvSpPr>
+        <p:spPr>
+          <a:xfrm>
+            <a:off x="6370168" y="2286000"/>
+            <a:ext cx="5227168" cy="2468880"/>
+          </a:xfrm>
+          <a:prstGeom prst="rect">
+            <a:avLst/>
+          </a:prstGeom>
+          <a:noFill/>
+          <a:ln/>
+        </p:spPr>
+        <p:txBody>
+          <a:bodyPr wrap="square" lIns="0" tIns="0" rIns="0" bIns="0" rtlCol="0" anchor="t"/>
+          <a:lstStyle/>
+          <a:p>
+            <a:pPr algn="l" marL="342900" indent="-342900">
+              <a:lnSpc>
+                <a:spcPct val="122000"/>
+              </a:lnSpc>
+              <a:spcAft>
+                <a:spcPts val="1000"/>
+              </a:spcAft>
+              <a:buSzPct val="100000"/>
+              <a:buChar char="•"/>
+            </a:pPr>
+            <a:r>
+              <a:rPr lang="en-US" sz="1350" dirty="0">
+                <a:solidFill>
+                  <a:srgbClr val="364239"/>
+                </a:solidFill>
+                <a:latin typeface="Calibri" pitchFamily="34" charset="0"/>
+                <a:ea typeface="Calibri" pitchFamily="34" charset="-122"/>
+                <a:cs typeface="Calibri" pitchFamily="34" charset="-120"/>
+              </a:rPr>
+              <a:t>Run trials over a full season against a control block, so the gain is documented in figures.</a:t>
+            </a:r>
+            <a:endParaRPr lang="en-US" sz="1350" dirty="0"/>
+          </a:p>
+          <a:p>
+            <a:pPr algn="l" marL="342900" indent="-342900">
+              <a:lnSpc>
+                <a:spcPct val="122000"/>
+              </a:lnSpc>
+              <a:spcAft>
+                <a:spcPts val="1000"/>
+              </a:spcAft>
+              <a:buSzPct val="100000"/>
+              <a:buChar char="•"/>
+            </a:pPr>
+            <a:r>
+              <a:rPr lang="en-US" sz="1350" dirty="0">
+                <a:solidFill>
+                  <a:srgbClr val="364239"/>
+                </a:solidFill>
+                <a:latin typeface="Calibri" pitchFamily="34" charset="0"/>
+                <a:ea typeface="Calibri" pitchFamily="34" charset="-122"/>
+                <a:cs typeface="Calibri" pitchFamily="34" charset="-120"/>
+              </a:rPr>
+              <a:t>A potassium formulation, never sodium: it adds no salinity and is safe for food crops.</a:t>
+            </a:r>
+            <a:endParaRPr lang="en-US" sz="1350" dirty="0"/>
+          </a:p>
+          <a:p>
+            <a:pPr algn="l" marL="342900" indent="-342900">
+              <a:lnSpc>
+                <a:spcPct val="122000"/>
+              </a:lnSpc>
+              <a:spcAft>
+                <a:spcPts val="1000"/>
+              </a:spcAft>
+              <a:buSzPct val="100000"/>
+              <a:buChar char="•"/>
+            </a:pPr>
+            <a:r>
+              <a:rPr lang="en-US" sz="1350" dirty="0">
+                <a:solidFill>
+                  <a:srgbClr val="364239"/>
+                </a:solidFill>
+                <a:latin typeface="Calibri" pitchFamily="34" charset="0"/>
+                <a:ea typeface="Calibri" pitchFamily="34" charset="-122"/>
+                <a:cs typeface="Calibri" pitchFamily="34" charset="-120"/>
+              </a:rPr>
+              <a:t>Prepare the regulatory file early: analyses and certificates before negotiation starts.</a:t>
+            </a:r>
+            <a:endParaRPr lang="en-US" sz="1350" dirty="0"/>
+          </a:p>
+          <a:p>
+            <a:pPr algn="l" marL="342900" indent="-342900">
+              <a:lnSpc>
+                <a:spcPct val="122000"/>
+              </a:lnSpc>
+              <a:spcAft>
+                <a:spcPts val="1000"/>
+              </a:spcAft>
+              <a:buSzPct val="100000"/>
+              <a:buChar char="•"/>
+            </a:pPr>
+            <a:r>
+              <a:rPr lang="en-US" sz="1350" dirty="0">
+                <a:solidFill>
+                  <a:srgbClr val="364239"/>
+                </a:solidFill>
+                <a:latin typeface="Calibri" pitchFamily="34" charset="0"/>
+                <a:ea typeface="Calibri" pitchFamily="34" charset="-122"/>
+                <a:cs typeface="Calibri" pitchFamily="34" charset="-120"/>
+              </a:rPr>
+              <a:t>Work through farmer associations and model farms to reach many growers at once.</a:t>
+            </a:r>
+            <a:endParaRPr lang="en-US" sz="1350" dirty="0"/>
+          </a:p>
+        </p:txBody>
+      </p:sp>
+      <p:sp>
+        <p:nvSpPr>
+          <p:cNvPr id="8" name="Shape 6"/>
+          <p:cNvSpPr/>
+          <p:nvPr/>
+        </p:nvSpPr>
+        <p:spPr>
+          <a:xfrm>
+            <a:off x="594360" y="4846320"/>
+            <a:ext cx="11002975" cy="960120"/>
+          </a:xfrm>
+          <a:prstGeom prst="roundRect">
+            <a:avLst>
+              <a:gd name="adj" fmla="val 7619"/>
+            </a:avLst>
+          </a:prstGeom>
+          <a:solidFill>
+            <a:srgbClr val="F2F1E8"/>
+          </a:solidFill>
+          <a:ln w="9525">
+            <a:solidFill>
+              <a:srgbClr val="E0DFD0"/>
+            </a:solidFill>
+            <a:prstDash val="solid"/>
+          </a:ln>
+        </p:spPr>
+      </p:sp>
+      <p:sp>
+        <p:nvSpPr>
+          <p:cNvPr id="9" name="Text 7"/>
+          <p:cNvSpPr txBox="1"/>
+          <p:nvPr/>
+        </p:nvSpPr>
+        <p:spPr>
+          <a:xfrm>
+            <a:off x="822960" y="4983480"/>
+            <a:ext cx="10545775" cy="713232"/>
+          </a:xfrm>
+          <a:prstGeom prst="rect">
+            <a:avLst/>
+          </a:prstGeom>
+          <a:noFill/>
+          <a:ln/>
+        </p:spPr>
+        <p:txBody>
+          <a:bodyPr wrap="square" lIns="0" tIns="0" rIns="0" bIns="0" rtlCol="0" anchor="t"/>
+          <a:lstStyle/>
+          <a:p>
+            <a:pPr algn="l" indent="0" marL="0">
+              <a:lnSpc>
+                <a:spcPct val="118000"/>
+              </a:lnSpc>
+              <a:buNone/>
+            </a:pPr>
+            <a:r>
+              <a:rPr lang="en-US" sz="1100" dirty="0">
+                <a:solidFill>
+                  <a:srgbClr val="6F7D71"/>
+                </a:solidFill>
+                <a:latin typeface="Calibri" pitchFamily="34" charset="0"/>
+                <a:ea typeface="Calibri" pitchFamily="34" charset="-122"/>
+                <a:cs typeface="Calibri" pitchFamily="34" charset="-120"/>
+              </a:rPr>
+              <a:t>Acrylamide analysis (Polymex laboratory, ISO 9001, content below 3.0 µg/g) and REACH / SVHC screening (SGS) are available on request, together with the SOHISCERT certificate valid until 4 September 2027.</a:t>
+            </a:r>
+            <a:endParaRPr lang="en-US" sz="1100" dirty="0"/>
+          </a:p>
+        </p:txBody>
+      </p:sp>
+      <p:sp>
+        <p:nvSpPr>
+          <p:cNvPr id="10" name="Text 8"/>
+          <p:cNvSpPr txBox="1"/>
+          <p:nvPr/>
+        </p:nvSpPr>
+        <p:spPr>
+          <a:xfrm>
+            <a:off x="502920" y="6382512"/>
+            <a:ext cx="8229600" cy="274320"/>
+          </a:xfrm>
+          <a:prstGeom prst="rect">
+            <a:avLst/>
+          </a:prstGeom>
+          <a:noFill/>
+          <a:ln/>
+        </p:spPr>
+        <p:txBody>
+          <a:bodyPr wrap="square" lIns="0" tIns="0" rIns="0" bIns="0" rtlCol="0" anchor="ctr"/>
+          <a:lstStyle/>
+          <a:p>
+            <a:pPr algn="l" indent="0" marL="0">
+              <a:buNone/>
+            </a:pPr>
+            <a:r>
+              <a:rPr lang="en-US" sz="950" dirty="0">
+                <a:solidFill>
+                  <a:srgbClr val="6F7D71">
+                    <a:alpha val="80000"/>
+                  </a:srgbClr>
+                </a:solidFill>
+                <a:latin typeface="Calibri" pitchFamily="34" charset="0"/>
+                <a:ea typeface="Calibri" pitchFamily="34" charset="-122"/>
+                <a:cs typeface="Calibri" pitchFamily="34" charset="-120"/>
+              </a:rPr>
+              <a:t>Green Solutions · Oman market dossier</a:t>
+            </a:r>
+            <a:endParaRPr lang="en-US" sz="950" dirty="0"/>
+          </a:p>
+        </p:txBody>
+      </p:sp>
+      <p:sp>
+        <p:nvSpPr>
+          <p:cNvPr id="11" name="Text 9"/>
+          <p:cNvSpPr txBox="1"/>
+          <p:nvPr/>
+        </p:nvSpPr>
+        <p:spPr>
+          <a:xfrm>
+            <a:off x="11140135" y="6382512"/>
+            <a:ext cx="548640" cy="274320"/>
+          </a:xfrm>
+          <a:prstGeom prst="rect">
+            <a:avLst/>
+          </a:prstGeom>
+          <a:noFill/>
+          <a:ln/>
+        </p:spPr>
+        <p:txBody>
+          <a:bodyPr wrap="square" lIns="0" tIns="0" rIns="0" bIns="0" rtlCol="0" anchor="ctr"/>
+          <a:lstStyle/>
+          <a:p>
+            <a:pPr algn="r" indent="0" marL="0">
+              <a:buNone/>
+            </a:pPr>
+            <a:r>
+              <a:rPr lang="en-US" sz="950" dirty="0">
+                <a:solidFill>
+                  <a:srgbClr val="6F7D71">
+                    <a:alpha val="80000"/>
+                  </a:srgbClr>
+                </a:solidFill>
+                <a:latin typeface="Calibri" pitchFamily="34" charset="0"/>
+                <a:ea typeface="Calibri" pitchFamily="34" charset="-122"/>
+                <a:cs typeface="Calibri" pitchFamily="34" charset="-120"/>
+              </a:rPr>
+              <a:t>13</a:t>
+            </a:r>
+            <a:endParaRPr lang="en-US" sz="950" dirty="0"/>
+          </a:p>
+        </p:txBody>
+      </p:sp>
+    </p:spTree>
+  </p:cSld>
+  <p:clrMapOvr>
+    <a:masterClrMapping/>
+  </p:clrMapOvr>
+</p:sld>
+</file>
+
+<file path=ppt/slides/slide15.xml><?xml version="1.0" encoding="utf-8"?>
+<p:sld xmlns:a="http://schemas.openxmlformats.org/drawingml/2006/main" xmlns:r="http://schemas.openxmlformats.org/officeDocument/2006/relationships" xmlns:p="http://schemas.openxmlformats.org/presentationml/2006/main">
+  <p:cSld name="Slide 15">
+    <p:bg>
+      <p:bgPr>
+        <a:solidFill>
+          <a:srgbClr val="FCFAF5"/>
+        </a:solidFill>
+      </p:bgPr>
+    </p:bg>
+    <p:spTree>
+      <p:nvGrpSpPr>
+        <p:cNvPr id="1" name=""/>
+        <p:cNvGrpSpPr/>
+        <p:nvPr/>
+      </p:nvGrpSpPr>
+      <p:grpSpPr>
+        <a:xfrm>
+          <a:off x="0" y="0"/>
+          <a:ext cx="0" cy="0"/>
+          <a:chOff x="0" y="0"/>
+          <a:chExt cx="0" cy="0"/>
+        </a:xfrm>
+      </p:grpSpPr>
+      <p:sp>
+        <p:nvSpPr>
+          <p:cNvPr id="2" name="Text 0"/>
+          <p:cNvSpPr txBox="1"/>
+          <p:nvPr/>
+        </p:nvSpPr>
+        <p:spPr>
+          <a:xfrm>
+            <a:off x="594360" y="411480"/>
+            <a:ext cx="10515600" cy="274320"/>
+          </a:xfrm>
+          <a:prstGeom prst="rect">
+            <a:avLst/>
+          </a:prstGeom>
+          <a:noFill/>
+          <a:ln/>
+        </p:spPr>
+        <p:txBody>
+          <a:bodyPr wrap="square" lIns="0" tIns="0" rIns="0" bIns="0" rtlCol="0" anchor="ctr"/>
+          <a:lstStyle/>
+          <a:p>
+            <a:pPr algn="l" indent="0" marL="0">
+              <a:buNone/>
+            </a:pPr>
+            <a:r>
+              <a:rPr lang="en-US" sz="1150" b="1" spc="200" kern="0" dirty="0">
+                <a:solidFill>
+                  <a:srgbClr val="D9A441"/>
+                </a:solidFill>
+                <a:latin typeface="Calibri" pitchFamily="34" charset="0"/>
+                <a:ea typeface="Calibri" pitchFamily="34" charset="-122"/>
+                <a:cs typeface="Calibri" pitchFamily="34" charset="-120"/>
+              </a:rPr>
+              <a:t>Sources</a:t>
+            </a:r>
+            <a:endParaRPr lang="en-US" sz="1150" dirty="0"/>
+          </a:p>
+        </p:txBody>
+      </p:sp>
+      <p:sp>
+        <p:nvSpPr>
+          <p:cNvPr id="3" name="Text 1"/>
+          <p:cNvSpPr txBox="1"/>
+          <p:nvPr/>
+        </p:nvSpPr>
+        <p:spPr>
+          <a:xfrm>
+            <a:off x="594360" y="731520"/>
+            <a:ext cx="10881360" cy="731520"/>
+          </a:xfrm>
+          <a:prstGeom prst="rect">
+            <a:avLst/>
+          </a:prstGeom>
+          <a:noFill/>
+          <a:ln/>
+        </p:spPr>
+        <p:txBody>
+          <a:bodyPr wrap="square" lIns="0" tIns="0" rIns="0" bIns="0" rtlCol="0" anchor="ctr"/>
+          <a:lstStyle/>
+          <a:p>
+            <a:pPr algn="l" indent="0" marL="0">
+              <a:buNone/>
+            </a:pPr>
+            <a:r>
+              <a:rPr lang="en-US" sz="3000" b="1" dirty="0">
+                <a:solidFill>
+                  <a:srgbClr val="16412B"/>
+                </a:solidFill>
+                <a:latin typeface="Cambria" pitchFamily="34" charset="0"/>
+                <a:ea typeface="Cambria" pitchFamily="34" charset="-122"/>
+                <a:cs typeface="Cambria" pitchFamily="34" charset="-120"/>
+              </a:rPr>
+              <a:t>Sources and working assumptions</a:t>
+            </a:r>
+            <a:endParaRPr lang="en-US" sz="3000" dirty="0"/>
+          </a:p>
+        </p:txBody>
+      </p:sp>
+      <p:sp>
+        <p:nvSpPr>
+          <p:cNvPr id="4" name="Text 2"/>
+          <p:cNvSpPr txBox="1"/>
+          <p:nvPr/>
+        </p:nvSpPr>
+        <p:spPr>
+          <a:xfrm>
+            <a:off x="594360" y="1783080"/>
+            <a:ext cx="5227168" cy="411480"/>
+          </a:xfrm>
+          <a:prstGeom prst="rect">
+            <a:avLst/>
+          </a:prstGeom>
+          <a:noFill/>
+          <a:ln/>
+        </p:spPr>
+        <p:txBody>
+          <a:bodyPr wrap="square" lIns="0" tIns="0" rIns="0" bIns="0" rtlCol="0" anchor="ctr"/>
+          <a:lstStyle/>
+          <a:p>
+            <a:pPr algn="l" indent="0" marL="0">
+              <a:buNone/>
+            </a:pPr>
+            <a:r>
+              <a:rPr lang="en-US" sz="1600" b="1" dirty="0">
+                <a:solidFill>
+                  <a:srgbClr val="2C6E49"/>
+                </a:solidFill>
+                <a:latin typeface="Cambria" pitchFamily="34" charset="0"/>
+                <a:ea typeface="Cambria" pitchFamily="34" charset="-122"/>
+                <a:cs typeface="Cambria" pitchFamily="34" charset="-120"/>
+              </a:rPr>
+              <a:t>Main sources</a:t>
+            </a:r>
+            <a:endParaRPr lang="en-US" sz="1600" dirty="0"/>
+          </a:p>
+        </p:txBody>
+      </p:sp>
+      <p:sp>
+        <p:nvSpPr>
+          <p:cNvPr id="5" name="Text 3"/>
+          <p:cNvSpPr txBox="1"/>
+          <p:nvPr/>
+        </p:nvSpPr>
+        <p:spPr>
+          <a:xfrm>
+            <a:off x="594360" y="2286000"/>
+            <a:ext cx="5227168" cy="2468880"/>
+          </a:xfrm>
+          <a:prstGeom prst="rect">
+            <a:avLst/>
+          </a:prstGeom>
+          <a:noFill/>
+          <a:ln/>
+        </p:spPr>
+        <p:txBody>
+          <a:bodyPr wrap="square" lIns="0" tIns="0" rIns="0" bIns="0" rtlCol="0" anchor="t"/>
+          <a:lstStyle/>
+          <a:p>
+            <a:pPr algn="l" marL="342900" indent="-342900">
+              <a:lnSpc>
+                <a:spcPct val="122000"/>
+              </a:lnSpc>
+              <a:spcAft>
+                <a:spcPts val="1000"/>
+              </a:spcAft>
+              <a:buSzPct val="100000"/>
+              <a:buChar char="•"/>
+            </a:pPr>
+            <a:r>
+              <a:rPr lang="en-US" sz="1350" dirty="0">
+                <a:solidFill>
+                  <a:srgbClr val="364239"/>
+                </a:solidFill>
+                <a:latin typeface="Calibri" pitchFamily="34" charset="0"/>
+                <a:ea typeface="Calibri" pitchFamily="34" charset="-122"/>
+                <a:cs typeface="Calibri" pitchFamily="34" charset="-120"/>
+              </a:rPr>
+              <a:t>UNCCD, Drought in Numbers 2022: number and duration of droughts, +29% since 2000 versus 1980–1999.</a:t>
+            </a:r>
+            <a:endParaRPr lang="en-US" sz="1350" dirty="0"/>
+          </a:p>
+          <a:p>
+            <a:pPr algn="l" marL="342900" indent="-342900">
+              <a:lnSpc>
+                <a:spcPct val="122000"/>
+              </a:lnSpc>
+              <a:spcAft>
+                <a:spcPts val="1000"/>
+              </a:spcAft>
+              <a:buSzPct val="100000"/>
+              <a:buChar char="•"/>
+            </a:pPr>
+            <a:r>
+              <a:rPr lang="en-US" sz="1350" dirty="0">
+                <a:solidFill>
+                  <a:srgbClr val="364239"/>
+                </a:solidFill>
+                <a:latin typeface="Calibri" pitchFamily="34" charset="0"/>
+                <a:ea typeface="Calibri" pitchFamily="34" charset="-122"/>
+                <a:cs typeface="Calibri" pitchFamily="34" charset="-120"/>
+              </a:rPr>
+              <a:t>UN-Water / FAO AQUASTAT, SDG indicator 6.4.2: definition and thresholds of water stress.</a:t>
+            </a:r>
+            <a:endParaRPr lang="en-US" sz="1350" dirty="0"/>
+          </a:p>
+          <a:p>
+            <a:pPr algn="l" marL="342900" indent="-342900">
+              <a:lnSpc>
+                <a:spcPct val="122000"/>
+              </a:lnSpc>
+              <a:spcAft>
+                <a:spcPts val="1000"/>
+              </a:spcAft>
+              <a:buSzPct val="100000"/>
+              <a:buChar char="•"/>
+            </a:pPr>
+            <a:r>
+              <a:rPr lang="en-US" sz="1350" dirty="0">
+                <a:solidFill>
+                  <a:srgbClr val="364239"/>
+                </a:solidFill>
+                <a:latin typeface="Calibri" pitchFamily="34" charset="0"/>
+                <a:ea typeface="Calibri" pitchFamily="34" charset="-122"/>
+                <a:cs typeface="Calibri" pitchFamily="34" charset="-120"/>
+              </a:rPr>
+              <a:t>Photographs: albinfo (CC BY-SA 4.0), Okhtyartist (CC BY-SA 4.0), Altaf Habib (CC BY-SA 4.0), Omar AV (CC BY 3.0), Prof. Mortel (CC BY 2.0) — via Wikimedia Commons.</a:t>
+            </a:r>
+            <a:endParaRPr lang="en-US" sz="1350" dirty="0"/>
+          </a:p>
+        </p:txBody>
+      </p:sp>
+      <p:sp>
+        <p:nvSpPr>
+          <p:cNvPr id="6" name="Text 4"/>
+          <p:cNvSpPr txBox="1"/>
+          <p:nvPr/>
+        </p:nvSpPr>
+        <p:spPr>
+          <a:xfrm>
+            <a:off x="6370168" y="1783080"/>
+            <a:ext cx="5227168" cy="411480"/>
+          </a:xfrm>
+          <a:prstGeom prst="rect">
+            <a:avLst/>
+          </a:prstGeom>
+          <a:noFill/>
+          <a:ln/>
+        </p:spPr>
+        <p:txBody>
+          <a:bodyPr wrap="square" lIns="0" tIns="0" rIns="0" bIns="0" rtlCol="0" anchor="ctr"/>
+          <a:lstStyle/>
+          <a:p>
+            <a:pPr algn="l" indent="0" marL="0">
+              <a:buNone/>
+            </a:pPr>
+            <a:r>
+              <a:rPr lang="en-US" sz="1600" b="1" dirty="0">
+                <a:solidFill>
+                  <a:srgbClr val="2C6E49"/>
+                </a:solidFill>
+                <a:latin typeface="Cambria" pitchFamily="34" charset="0"/>
+                <a:ea typeface="Cambria" pitchFamily="34" charset="-122"/>
+                <a:cs typeface="Cambria" pitchFamily="34" charset="-120"/>
+              </a:rPr>
+              <a:t>Working assumptions</a:t>
+            </a:r>
+            <a:endParaRPr lang="en-US" sz="1600" dirty="0"/>
+          </a:p>
+        </p:txBody>
+      </p:sp>
+      <p:sp>
+        <p:nvSpPr>
+          <p:cNvPr id="7" name="Text 5"/>
+          <p:cNvSpPr txBox="1"/>
+          <p:nvPr/>
+        </p:nvSpPr>
+        <p:spPr>
+          <a:xfrm>
+            <a:off x="6370168" y="2286000"/>
+            <a:ext cx="5227168" cy="2468880"/>
+          </a:xfrm>
+          <a:prstGeom prst="rect">
+            <a:avLst/>
+          </a:prstGeom>
+          <a:noFill/>
+          <a:ln/>
+        </p:spPr>
+        <p:txBody>
+          <a:bodyPr wrap="square" lIns="0" tIns="0" rIns="0" bIns="0" rtlCol="0" anchor="t"/>
+          <a:lstStyle/>
+          <a:p>
+            <a:pPr algn="l" marL="342900" indent="-342900">
+              <a:lnSpc>
+                <a:spcPct val="122000"/>
+              </a:lnSpc>
+              <a:spcAft>
+                <a:spcPts val="1000"/>
+              </a:spcAft>
+              <a:buSzPct val="100000"/>
+              <a:buChar char="•"/>
+            </a:pPr>
+            <a:r>
+              <a:rPr lang="en-US" sz="1350" dirty="0">
+                <a:solidFill>
+                  <a:srgbClr val="364239"/>
+                </a:solidFill>
+                <a:latin typeface="Calibri" pitchFamily="34" charset="0"/>
+                <a:ea typeface="Calibri" pitchFamily="34" charset="-122"/>
+                <a:cs typeface="Calibri" pitchFamily="34" charset="-120"/>
+              </a:rPr>
+              <a:t>Figures are rounded orders of magnitude, taken from the latest public data available.</a:t>
+            </a:r>
+            <a:endParaRPr lang="en-US" sz="1350" dirty="0"/>
+          </a:p>
+          <a:p>
+            <a:pPr algn="l" marL="342900" indent="-342900">
+              <a:lnSpc>
+                <a:spcPct val="122000"/>
+              </a:lnSpc>
+              <a:spcAft>
+                <a:spcPts val="1000"/>
+              </a:spcAft>
+              <a:buSzPct val="100000"/>
+              <a:buChar char="•"/>
+            </a:pPr>
+            <a:r>
+              <a:rPr lang="en-US" sz="1350" dirty="0">
+                <a:solidFill>
+                  <a:srgbClr val="364239"/>
+                </a:solidFill>
+                <a:latin typeface="Calibri" pitchFamily="34" charset="0"/>
+                <a:ea typeface="Calibri" pitchFamily="34" charset="-122"/>
+                <a:cs typeface="Calibri" pitchFamily="34" charset="-120"/>
+              </a:rPr>
+              <a:t>Water and yield gains are indicative and vary with soil, climate and crop.</a:t>
+            </a:r>
+            <a:endParaRPr lang="en-US" sz="1350" dirty="0"/>
+          </a:p>
+          <a:p>
+            <a:pPr algn="l" marL="342900" indent="-342900">
+              <a:lnSpc>
+                <a:spcPct val="122000"/>
+              </a:lnSpc>
+              <a:spcAft>
+                <a:spcPts val="1000"/>
+              </a:spcAft>
+              <a:buSzPct val="100000"/>
+              <a:buChar char="•"/>
+            </a:pPr>
+            <a:r>
+              <a:rPr lang="en-US" sz="1350" dirty="0">
+                <a:solidFill>
+                  <a:srgbClr val="364239"/>
+                </a:solidFill>
+                <a:latin typeface="Calibri" pitchFamily="34" charset="0"/>
+                <a:ea typeface="Calibri" pitchFamily="34" charset="-122"/>
+                <a:cs typeface="Calibri" pitchFamily="34" charset="-120"/>
+              </a:rPr>
+              <a:t>Commercial working document: figures to be refreshed before any official submission.</a:t>
+            </a:r>
+            <a:endParaRPr lang="en-US" sz="1350" dirty="0"/>
+          </a:p>
+        </p:txBody>
+      </p:sp>
+      <p:sp>
+        <p:nvSpPr>
+          <p:cNvPr id="8" name="Shape 6"/>
+          <p:cNvSpPr/>
+          <p:nvPr/>
+        </p:nvSpPr>
+        <p:spPr>
+          <a:xfrm>
+            <a:off x="594360" y="4846320"/>
+            <a:ext cx="11002975" cy="960120"/>
+          </a:xfrm>
+          <a:prstGeom prst="roundRect">
+            <a:avLst>
+              <a:gd name="adj" fmla="val 7619"/>
+            </a:avLst>
+          </a:prstGeom>
+          <a:solidFill>
+            <a:srgbClr val="F2F1E8"/>
+          </a:solidFill>
+          <a:ln w="9525">
+            <a:solidFill>
+              <a:srgbClr val="E0DFD0"/>
+            </a:solidFill>
+            <a:prstDash val="solid"/>
+          </a:ln>
+        </p:spPr>
+      </p:sp>
+      <p:sp>
+        <p:nvSpPr>
+          <p:cNvPr id="9" name="Text 7"/>
+          <p:cNvSpPr txBox="1"/>
+          <p:nvPr/>
+        </p:nvSpPr>
+        <p:spPr>
+          <a:xfrm>
+            <a:off x="822960" y="4983480"/>
+            <a:ext cx="10545775" cy="713232"/>
+          </a:xfrm>
+          <a:prstGeom prst="rect">
+            <a:avLst/>
+          </a:prstGeom>
+          <a:noFill/>
+          <a:ln/>
+        </p:spPr>
+        <p:txBody>
+          <a:bodyPr wrap="square" lIns="0" tIns="0" rIns="0" bIns="0" rtlCol="0" anchor="t"/>
+          <a:lstStyle/>
+          <a:p>
+            <a:pPr algn="l" indent="0" marL="0">
+              <a:lnSpc>
+                <a:spcPct val="118000"/>
+              </a:lnSpc>
+              <a:buNone/>
+            </a:pPr>
+            <a:r>
+              <a:rPr lang="en-US" sz="1100" dirty="0">
+                <a:solidFill>
+                  <a:srgbClr val="6F7D71"/>
+                </a:solidFill>
+                <a:latin typeface="Calibri" pitchFamily="34" charset="0"/>
+                <a:ea typeface="Calibri" pitchFamily="34" charset="-122"/>
+                <a:cs typeface="Calibri" pitchFamily="34" charset="-120"/>
+              </a:rPr>
+              <a:t>Trial reports, certificates (SOHISCERT, Polymex and SGS analyses) and technical sheets: available on request.</a:t>
+            </a:r>
+            <a:endParaRPr lang="en-US" sz="1100" dirty="0"/>
+          </a:p>
+        </p:txBody>
+      </p:sp>
+      <p:sp>
+        <p:nvSpPr>
+          <p:cNvPr id="10" name="Text 8"/>
+          <p:cNvSpPr txBox="1"/>
+          <p:nvPr/>
+        </p:nvSpPr>
+        <p:spPr>
+          <a:xfrm>
+            <a:off x="502920" y="6382512"/>
+            <a:ext cx="8229600" cy="274320"/>
+          </a:xfrm>
+          <a:prstGeom prst="rect">
+            <a:avLst/>
+          </a:prstGeom>
+          <a:noFill/>
+          <a:ln/>
+        </p:spPr>
+        <p:txBody>
+          <a:bodyPr wrap="square" lIns="0" tIns="0" rIns="0" bIns="0" rtlCol="0" anchor="ctr"/>
+          <a:lstStyle/>
+          <a:p>
+            <a:pPr algn="l" indent="0" marL="0">
+              <a:buNone/>
+            </a:pPr>
+            <a:r>
+              <a:rPr lang="en-US" sz="950" dirty="0">
+                <a:solidFill>
+                  <a:srgbClr val="6F7D71">
+                    <a:alpha val="80000"/>
+                  </a:srgbClr>
+                </a:solidFill>
+                <a:latin typeface="Calibri" pitchFamily="34" charset="0"/>
+                <a:ea typeface="Calibri" pitchFamily="34" charset="-122"/>
+                <a:cs typeface="Calibri" pitchFamily="34" charset="-120"/>
+              </a:rPr>
+              <a:t>Green Solutions · Oman market dossier</a:t>
+            </a:r>
+            <a:endParaRPr lang="en-US" sz="950" dirty="0"/>
+          </a:p>
+        </p:txBody>
+      </p:sp>
+      <p:sp>
+        <p:nvSpPr>
+          <p:cNvPr id="11" name="Text 9"/>
+          <p:cNvSpPr txBox="1"/>
+          <p:nvPr/>
+        </p:nvSpPr>
+        <p:spPr>
+          <a:xfrm>
+            <a:off x="11140135" y="6382512"/>
+            <a:ext cx="548640" cy="274320"/>
+          </a:xfrm>
+          <a:prstGeom prst="rect">
+            <a:avLst/>
+          </a:prstGeom>
+          <a:noFill/>
+          <a:ln/>
+        </p:spPr>
+        <p:txBody>
+          <a:bodyPr wrap="square" lIns="0" tIns="0" rIns="0" bIns="0" rtlCol="0" anchor="ctr"/>
+          <a:lstStyle/>
+          <a:p>
+            <a:pPr algn="r" indent="0" marL="0">
+              <a:buNone/>
+            </a:pPr>
+            <a:r>
+              <a:rPr lang="en-US" sz="950" dirty="0">
+                <a:solidFill>
+                  <a:srgbClr val="6F7D71">
+                    <a:alpha val="80000"/>
+                  </a:srgbClr>
+                </a:solidFill>
+                <a:latin typeface="Calibri" pitchFamily="34" charset="0"/>
+                <a:ea typeface="Calibri" pitchFamily="34" charset="-122"/>
+                <a:cs typeface="Calibri" pitchFamily="34" charset="-120"/>
+              </a:rPr>
+              <a:t>14</a:t>
+            </a:r>
+            <a:endParaRPr lang="en-US" sz="950" dirty="0"/>
+          </a:p>
+        </p:txBody>
+      </p:sp>
+    </p:spTree>
+  </p:cSld>
+  <p:clrMapOvr>
+    <a:masterClrMapping/>
+  </p:clrMapOvr>
+</p:sld>
+</file>
+
+<file path=ppt/slides/slide16.xml><?xml version="1.0" encoding="utf-8"?>
+<p:sld xmlns:a="http://schemas.openxmlformats.org/drawingml/2006/main" xmlns:r="http://schemas.openxmlformats.org/officeDocument/2006/relationships" xmlns:p="http://schemas.openxmlformats.org/presentationml/2006/main">
+  <p:cSld name="Slide 16">
     <p:spTree>
       <p:nvGrpSpPr>
         <p:cNvPr id="1" name=""/>
@@ -6202,7 +7741,7 @@
       </p:sp>
       <p:pic>
         <p:nvPicPr>
-          <p:cNvPr id="6" name="Image 1" descr="C:\Users\Utilisateur\dev\green-solutions-web\scripts\dossiers\sceau-aim-clair.png">    </p:cNvPr>
+          <p:cNvPr id="6" name="Image 1" descr="/workspace/scratch/50eb4f7d8e13/green-solutions-web/scripts/dossiers/sceau-aim-clair.png">    </p:cNvPr>
           <p:cNvPicPr>
             <a:picLocks noChangeAspect="1"/>
           </p:cNvPicPr>
@@ -6302,7 +7841,7 @@
                 <a:ea typeface="Calibri" pitchFamily="34" charset="-122"/>
                 <a:cs typeface="Calibri" pitchFamily="34" charset="-120"/>
               </a:rPr>
-              <a:t>13</a:t>
+              <a:t>15</a:t>
             </a:r>
             <a:endParaRPr lang="en-US" sz="950" dirty="0"/>
           </a:p>
@@ -7397,7 +8936,7 @@
                 <a:ea typeface="Calibri" pitchFamily="34" charset="-122"/>
                 <a:cs typeface="Calibri" pitchFamily="34" charset="-120"/>
               </a:rPr>
-              <a:t>WHERE THE WATER GOES</a:t>
+              <a:t>DROUGHT AND WATER STRESS</a:t>
             </a:r>
             <a:endParaRPr lang="en-US" sz="1150" dirty="0"/>
           </a:p>
@@ -7436,7 +8975,7 @@
                 <a:ea typeface="Cambria" pitchFamily="34" charset="-122"/>
                 <a:cs typeface="Cambria" pitchFamily="34" charset="-120"/>
               </a:rPr>
-              <a:t>Irrigation takes eight litres in every ten</a:t>
+              <a:t>Pressure is rising, but risk remains local</a:t>
             </a:r>
             <a:endParaRPr lang="en-US" sz="3000" dirty="0"/>
           </a:p>
@@ -7518,7 +9057,7 @@
                 <a:ea typeface="Cambria" pitchFamily="34" charset="-122"/>
                 <a:cs typeface="Cambria" pitchFamily="34" charset="-120"/>
               </a:rPr>
-              <a:t>What this implies</a:t>
+              <a:t>Two indicators, not a shortcut</a:t>
             </a:r>
             <a:endParaRPr lang="en-US" sz="1300" dirty="0"/>
           </a:p>
@@ -7560,7 +9099,7 @@
                 <a:ea typeface="Calibri" pitchFamily="34" charset="-122"/>
                 <a:cs typeface="Calibri" pitchFamily="34" charset="-120"/>
               </a:rPr>
-              <a:t>A 10 % cut in irrigation demand saves several times the volume used by the whole of industry.</a:t>
+              <a:t>Worldwide, the number and duration of droughts have risen by 29% since 2000 compared with the two previous decades.</a:t>
             </a:r>
             <a:endParaRPr lang="en-US" sz="1200" dirty="0"/>
           </a:p>
@@ -7589,7 +9128,7 @@
                 <a:ea typeface="Calibri" pitchFamily="34" charset="-122"/>
                 <a:cs typeface="Calibri" pitchFamily="34" charset="-120"/>
               </a:rPr>
-              <a:t>That is why the effort belongs in the field: dates, fodder and vegetables on the coastal plain.</a:t>
+              <a:t>Water stress measures something different: withdrawals as a share of renewable resources available after environmental needs. This global signal is therefore not a country forecast; it must be read alongside local rainfall, aquifers, seasons and uses.</a:t>
             </a:r>
             <a:endParaRPr lang="en-US" sz="1200" dirty="0"/>
           </a:p>
@@ -7742,7 +9281,7 @@
                 <a:ea typeface="Calibri" pitchFamily="34" charset="-122"/>
                 <a:cs typeface="Calibri" pitchFamily="34" charset="-120"/>
               </a:rPr>
-              <a:t>ECONOMY AND FOOD SECURITY</a:t>
+              <a:t>WHERE THE WATER GOES</a:t>
             </a:r>
             <a:endParaRPr lang="en-US" sz="1150" dirty="0"/>
           </a:p>
@@ -7781,26 +9320,42 @@
                 <a:ea typeface="Cambria" pitchFamily="34" charset="-122"/>
                 <a:cs typeface="Cambria" pitchFamily="34" charset="-120"/>
               </a:rPr>
-              <a:t>Strong purchasing power, a narrow food base</a:t>
+              <a:t>Irrigation takes eight litres in every ten</a:t>
             </a:r>
             <a:endParaRPr lang="en-US" sz="3000" dirty="0"/>
           </a:p>
         </p:txBody>
       </p:sp>
-      <p:sp>
-        <p:nvSpPr>
-          <p:cNvPr id="4" name="Shape 2"/>
+      <p:graphicFrame>
+        <p:nvGraphicFramePr>
+          <p:cNvPr id="4" name="Chart 0" descr=""/>
+          <p:cNvGraphicFramePr/>
+          <p:nvPr/>
+        </p:nvGraphicFramePr>
+        <p:xfrm>
+          <a:off x="594360" y="1783080"/>
+          <a:ext cx="7360920" cy="3977640"/>
+        </p:xfrm>
+        <a:graphic xmlns:a="http://schemas.openxmlformats.org/drawingml/2006/main">
+          <a:graphicData uri="http://schemas.openxmlformats.org/drawingml/2006/chart">
+            <c:chart xmlns:c="http://schemas.openxmlformats.org/drawingml/2006/chart" r:id="rId1"/>
+          </a:graphicData>
+        </a:graphic>
+      </p:graphicFrame>
+      <p:sp>
+        <p:nvSpPr>
+          <p:cNvPr id="5" name="Shape 2"/>
           <p:cNvSpPr/>
           <p:nvPr/>
         </p:nvSpPr>
         <p:spPr>
           <a:xfrm>
-            <a:off x="594360" y="1874520"/>
-            <a:ext cx="2545004" cy="2514600"/>
+            <a:off x="8275320" y="1783080"/>
+            <a:ext cx="3291840" cy="3977640"/>
           </a:xfrm>
           <a:prstGeom prst="roundRect">
             <a:avLst>
-              <a:gd name="adj" fmla="val 3636"/>
+              <a:gd name="adj" fmla="val 2778"/>
             </a:avLst>
           </a:prstGeom>
           <a:solidFill>
@@ -7816,14 +9371,14 @@
       </p:sp>
       <p:sp>
         <p:nvSpPr>
-          <p:cNvPr id="5" name="Text 3"/>
-          <p:cNvSpPr txBox="1"/>
-          <p:nvPr/>
-        </p:nvSpPr>
-        <p:spPr>
-          <a:xfrm>
-            <a:off x="777240" y="2148840"/>
-            <a:ext cx="2179244" cy="960120"/>
+          <p:cNvPr id="6" name="Text 3"/>
+          <p:cNvSpPr txBox="1"/>
+          <p:nvPr/>
+        </p:nvSpPr>
+        <p:spPr>
+          <a:xfrm>
+            <a:off x="8503920" y="2011680"/>
+            <a:ext cx="2834640" cy="457200"/>
           </a:xfrm>
           <a:prstGeom prst="rect">
             <a:avLst/>
@@ -7835,11 +9390,11 @@
           <a:bodyPr wrap="square" lIns="0" tIns="0" rIns="0" bIns="0" rtlCol="0" anchor="ctr"/>
           <a:lstStyle/>
           <a:p>
-            <a:pPr algn="ctr" indent="0" marL="0">
-              <a:buNone/>
-            </a:pPr>
-            <a:r>
-              <a:rPr lang="en-US" sz="3800" b="1" dirty="0">
+            <a:pPr algn="l" indent="0" marL="0">
+              <a:buNone/>
+            </a:pPr>
+            <a:r>
+              <a:rPr lang="en-US" sz="1300" b="1" dirty="0">
                 <a:solidFill>
                   <a:srgbClr val="2C6E49"/>
                 </a:solidFill>
@@ -7847,388 +9402,22 @@
                 <a:ea typeface="Cambria" pitchFamily="34" charset="-122"/>
                 <a:cs typeface="Cambria" pitchFamily="34" charset="-120"/>
               </a:rPr>
-              <a:t>≈ 5 M</a:t>
-            </a:r>
-            <a:endParaRPr lang="en-US" sz="3800" dirty="0"/>
-          </a:p>
-        </p:txBody>
-      </p:sp>
-      <p:sp>
-        <p:nvSpPr>
-          <p:cNvPr id="6" name="Text 4"/>
-          <p:cNvSpPr txBox="1"/>
-          <p:nvPr/>
-        </p:nvSpPr>
-        <p:spPr>
-          <a:xfrm>
-            <a:off x="795528" y="3154680"/>
-            <a:ext cx="2142668" cy="1051560"/>
-          </a:xfrm>
-          <a:prstGeom prst="rect">
-            <a:avLst/>
-          </a:prstGeom>
-          <a:noFill/>
-          <a:ln/>
-        </p:spPr>
-        <p:txBody>
-          <a:bodyPr wrap="square" lIns="0" tIns="0" rIns="0" bIns="0" rtlCol="0" anchor="t"/>
-          <a:lstStyle/>
-          <a:p>
-            <a:pPr algn="ctr" indent="0" marL="0">
-              <a:lnSpc>
-                <a:spcPct val="118000"/>
-              </a:lnSpc>
-              <a:buNone/>
-            </a:pPr>
-            <a:r>
-              <a:rPr lang="en-US" sz="1250" dirty="0">
-                <a:solidFill>
-                  <a:srgbClr val="364239"/>
-                </a:solidFill>
-                <a:latin typeface="Calibri" pitchFamily="34" charset="0"/>
-                <a:ea typeface="Calibri" pitchFamily="34" charset="-122"/>
-                <a:cs typeface="Calibri" pitchFamily="34" charset="-120"/>
-              </a:rPr>
-              <a:t>residents, with food demand rising every year</a:t>
-            </a:r>
-            <a:endParaRPr lang="en-US" sz="1250" dirty="0"/>
-          </a:p>
-        </p:txBody>
-      </p:sp>
-      <p:sp>
-        <p:nvSpPr>
-          <p:cNvPr id="7" name="Shape 5"/>
-          <p:cNvSpPr/>
-          <p:nvPr/>
-        </p:nvSpPr>
-        <p:spPr>
-          <a:xfrm>
-            <a:off x="3413684" y="1874520"/>
-            <a:ext cx="2545004" cy="2514600"/>
-          </a:xfrm>
-          <a:prstGeom prst="roundRect">
-            <a:avLst>
-              <a:gd name="adj" fmla="val 3636"/>
-            </a:avLst>
-          </a:prstGeom>
-          <a:solidFill>
-            <a:srgbClr val="F2F1E8"/>
-          </a:solidFill>
-          <a:ln w="9525">
-            <a:solidFill>
-              <a:srgbClr val="E0DFD0"/>
-            </a:solidFill>
-            <a:prstDash val="solid"/>
-          </a:ln>
-        </p:spPr>
-      </p:sp>
-      <p:sp>
-        <p:nvSpPr>
-          <p:cNvPr id="8" name="Text 6"/>
-          <p:cNvSpPr txBox="1"/>
-          <p:nvPr/>
-        </p:nvSpPr>
-        <p:spPr>
-          <a:xfrm>
-            <a:off x="3596564" y="2148840"/>
-            <a:ext cx="2179244" cy="960120"/>
-          </a:xfrm>
-          <a:prstGeom prst="rect">
-            <a:avLst/>
-          </a:prstGeom>
-          <a:noFill/>
-          <a:ln/>
-        </p:spPr>
-        <p:txBody>
-          <a:bodyPr wrap="square" lIns="0" tIns="0" rIns="0" bIns="0" rtlCol="0" anchor="ctr"/>
-          <a:lstStyle/>
-          <a:p>
-            <a:pPr algn="ctr" indent="0" marL="0">
-              <a:buNone/>
-            </a:pPr>
-            <a:r>
-              <a:rPr lang="en-US" sz="3800" b="1" dirty="0">
-                <a:solidFill>
-                  <a:srgbClr val="2C6E49"/>
-                </a:solidFill>
-                <a:latin typeface="Cambria" pitchFamily="34" charset="0"/>
-                <a:ea typeface="Cambria" pitchFamily="34" charset="-122"/>
-                <a:cs typeface="Cambria" pitchFamily="34" charset="-120"/>
-              </a:rPr>
-              <a:t>&gt; 100 %</a:t>
-            </a:r>
-            <a:endParaRPr lang="en-US" sz="3800" dirty="0"/>
-          </a:p>
-        </p:txBody>
-      </p:sp>
-      <p:sp>
-        <p:nvSpPr>
-          <p:cNvPr id="9" name="Text 7"/>
-          <p:cNvSpPr txBox="1"/>
-          <p:nvPr/>
-        </p:nvSpPr>
-        <p:spPr>
-          <a:xfrm>
-            <a:off x="3614852" y="3154680"/>
-            <a:ext cx="2142668" cy="1051560"/>
-          </a:xfrm>
-          <a:prstGeom prst="rect">
-            <a:avLst/>
-          </a:prstGeom>
-          <a:noFill/>
-          <a:ln/>
-        </p:spPr>
-        <p:txBody>
-          <a:bodyPr wrap="square" lIns="0" tIns="0" rIns="0" bIns="0" rtlCol="0" anchor="t"/>
-          <a:lstStyle/>
-          <a:p>
-            <a:pPr algn="ctr" indent="0" marL="0">
-              <a:lnSpc>
-                <a:spcPct val="118000"/>
-              </a:lnSpc>
-              <a:buNone/>
-            </a:pPr>
-            <a:r>
-              <a:rPr lang="en-US" sz="1250" dirty="0">
-                <a:solidFill>
-                  <a:srgbClr val="364239"/>
-                </a:solidFill>
-                <a:latin typeface="Calibri" pitchFamily="34" charset="0"/>
-                <a:ea typeface="Calibri" pitchFamily="34" charset="-122"/>
-                <a:cs typeface="Calibri" pitchFamily="34" charset="-120"/>
-              </a:rPr>
-              <a:t>self-sufficiency in dates and in fresh fish</a:t>
-            </a:r>
-            <a:endParaRPr lang="en-US" sz="1250" dirty="0"/>
-          </a:p>
-        </p:txBody>
-      </p:sp>
-      <p:sp>
-        <p:nvSpPr>
-          <p:cNvPr id="10" name="Shape 8"/>
-          <p:cNvSpPr/>
-          <p:nvPr/>
-        </p:nvSpPr>
-        <p:spPr>
-          <a:xfrm>
-            <a:off x="6233008" y="1874520"/>
-            <a:ext cx="2545004" cy="2514600"/>
-          </a:xfrm>
-          <a:prstGeom prst="roundRect">
-            <a:avLst>
-              <a:gd name="adj" fmla="val 3636"/>
-            </a:avLst>
-          </a:prstGeom>
-          <a:solidFill>
-            <a:srgbClr val="F2F1E8"/>
-          </a:solidFill>
-          <a:ln w="9525">
-            <a:solidFill>
-              <a:srgbClr val="E0DFD0"/>
-            </a:solidFill>
-            <a:prstDash val="solid"/>
-          </a:ln>
-        </p:spPr>
-      </p:sp>
-      <p:sp>
-        <p:nvSpPr>
-          <p:cNvPr id="11" name="Text 9"/>
-          <p:cNvSpPr txBox="1"/>
-          <p:nvPr/>
-        </p:nvSpPr>
-        <p:spPr>
-          <a:xfrm>
-            <a:off x="6415888" y="2148840"/>
-            <a:ext cx="2179244" cy="960120"/>
-          </a:xfrm>
-          <a:prstGeom prst="rect">
-            <a:avLst/>
-          </a:prstGeom>
-          <a:noFill/>
-          <a:ln/>
-        </p:spPr>
-        <p:txBody>
-          <a:bodyPr wrap="square" lIns="0" tIns="0" rIns="0" bIns="0" rtlCol="0" anchor="ctr"/>
-          <a:lstStyle/>
-          <a:p>
-            <a:pPr algn="ctr" indent="0" marL="0">
-              <a:buNone/>
-            </a:pPr>
-            <a:r>
-              <a:rPr lang="en-US" sz="3800" b="1" dirty="0">
-                <a:solidFill>
-                  <a:srgbClr val="2C6E49"/>
-                </a:solidFill>
-                <a:latin typeface="Cambria" pitchFamily="34" charset="0"/>
-                <a:ea typeface="Cambria" pitchFamily="34" charset="-122"/>
-                <a:cs typeface="Cambria" pitchFamily="34" charset="-120"/>
-              </a:rPr>
-              <a:t>≈ 3,000</a:t>
-            </a:r>
-            <a:endParaRPr lang="en-US" sz="3800" dirty="0"/>
-          </a:p>
-        </p:txBody>
-      </p:sp>
-      <p:sp>
-        <p:nvSpPr>
-          <p:cNvPr id="12" name="Text 10"/>
-          <p:cNvSpPr txBox="1"/>
-          <p:nvPr/>
-        </p:nvSpPr>
-        <p:spPr>
-          <a:xfrm>
-            <a:off x="6434176" y="3154680"/>
-            <a:ext cx="2142668" cy="1051560"/>
-          </a:xfrm>
-          <a:prstGeom prst="rect">
-            <a:avLst/>
-          </a:prstGeom>
-          <a:noFill/>
-          <a:ln/>
-        </p:spPr>
-        <p:txBody>
-          <a:bodyPr wrap="square" lIns="0" tIns="0" rIns="0" bIns="0" rtlCol="0" anchor="t"/>
-          <a:lstStyle/>
-          <a:p>
-            <a:pPr algn="ctr" indent="0" marL="0">
-              <a:lnSpc>
-                <a:spcPct val="118000"/>
-              </a:lnSpc>
-              <a:buNone/>
-            </a:pPr>
-            <a:r>
-              <a:rPr lang="en-US" sz="1250" dirty="0">
-                <a:solidFill>
-                  <a:srgbClr val="364239"/>
-                </a:solidFill>
-                <a:latin typeface="Calibri" pitchFamily="34" charset="0"/>
-                <a:ea typeface="Calibri" pitchFamily="34" charset="-122"/>
-                <a:cs typeface="Calibri" pitchFamily="34" charset="-120"/>
-              </a:rPr>
-              <a:t>active aflaj, five of them on the UNESCO World Heritage list</a:t>
-            </a:r>
-            <a:endParaRPr lang="en-US" sz="1250" dirty="0"/>
-          </a:p>
-        </p:txBody>
-      </p:sp>
-      <p:sp>
-        <p:nvSpPr>
-          <p:cNvPr id="13" name="Shape 11"/>
-          <p:cNvSpPr/>
-          <p:nvPr/>
-        </p:nvSpPr>
-        <p:spPr>
-          <a:xfrm>
-            <a:off x="9052331" y="1874520"/>
-            <a:ext cx="2545004" cy="2514600"/>
-          </a:xfrm>
-          <a:prstGeom prst="roundRect">
-            <a:avLst>
-              <a:gd name="adj" fmla="val 3636"/>
-            </a:avLst>
-          </a:prstGeom>
-          <a:solidFill>
-            <a:srgbClr val="F2F1E8"/>
-          </a:solidFill>
-          <a:ln w="9525">
-            <a:solidFill>
-              <a:srgbClr val="E0DFD0"/>
-            </a:solidFill>
-            <a:prstDash val="solid"/>
-          </a:ln>
-        </p:spPr>
-      </p:sp>
-      <p:sp>
-        <p:nvSpPr>
-          <p:cNvPr id="14" name="Text 12"/>
-          <p:cNvSpPr txBox="1"/>
-          <p:nvPr/>
-        </p:nvSpPr>
-        <p:spPr>
-          <a:xfrm>
-            <a:off x="9235211" y="2148840"/>
-            <a:ext cx="2179244" cy="960120"/>
-          </a:xfrm>
-          <a:prstGeom prst="rect">
-            <a:avLst/>
-          </a:prstGeom>
-          <a:noFill/>
-          <a:ln/>
-        </p:spPr>
-        <p:txBody>
-          <a:bodyPr wrap="square" lIns="0" tIns="0" rIns="0" bIns="0" rtlCol="0" anchor="ctr"/>
-          <a:lstStyle/>
-          <a:p>
-            <a:pPr algn="ctr" indent="0" marL="0">
-              <a:buNone/>
-            </a:pPr>
-            <a:r>
-              <a:rPr lang="en-US" sz="3800" b="1" dirty="0">
-                <a:solidFill>
-                  <a:srgbClr val="2C6E49"/>
-                </a:solidFill>
-                <a:latin typeface="Cambria" pitchFamily="34" charset="0"/>
-                <a:ea typeface="Cambria" pitchFamily="34" charset="-122"/>
-                <a:cs typeface="Cambria" pitchFamily="34" charset="-120"/>
-              </a:rPr>
-              <a:t>2040</a:t>
-            </a:r>
-            <a:endParaRPr lang="en-US" sz="3800" dirty="0"/>
-          </a:p>
-        </p:txBody>
-      </p:sp>
-      <p:sp>
-        <p:nvSpPr>
-          <p:cNvPr id="15" name="Text 13"/>
-          <p:cNvSpPr txBox="1"/>
-          <p:nvPr/>
-        </p:nvSpPr>
-        <p:spPr>
-          <a:xfrm>
-            <a:off x="9253499" y="3154680"/>
-            <a:ext cx="2142668" cy="1051560"/>
-          </a:xfrm>
-          <a:prstGeom prst="rect">
-            <a:avLst/>
-          </a:prstGeom>
-          <a:noFill/>
-          <a:ln/>
-        </p:spPr>
-        <p:txBody>
-          <a:bodyPr wrap="square" lIns="0" tIns="0" rIns="0" bIns="0" rtlCol="0" anchor="t"/>
-          <a:lstStyle/>
-          <a:p>
-            <a:pPr algn="ctr" indent="0" marL="0">
-              <a:lnSpc>
-                <a:spcPct val="118000"/>
-              </a:lnSpc>
-              <a:buNone/>
-            </a:pPr>
-            <a:r>
-              <a:rPr lang="en-US" sz="1250" dirty="0">
-                <a:solidFill>
-                  <a:srgbClr val="364239"/>
-                </a:solidFill>
-                <a:latin typeface="Calibri" pitchFamily="34" charset="0"/>
-                <a:ea typeface="Calibri" pitchFamily="34" charset="-122"/>
-                <a:cs typeface="Calibri" pitchFamily="34" charset="-120"/>
-              </a:rPr>
-              <a:t>horizon of Oman Vision, with food security as a priority</a:t>
-            </a:r>
-            <a:endParaRPr lang="en-US" sz="1250" dirty="0"/>
-          </a:p>
-        </p:txBody>
-      </p:sp>
-      <p:sp>
-        <p:nvSpPr>
-          <p:cNvPr id="16" name="Text 14"/>
-          <p:cNvSpPr txBox="1"/>
-          <p:nvPr/>
-        </p:nvSpPr>
-        <p:spPr>
-          <a:xfrm>
-            <a:off x="594360" y="4709160"/>
-            <a:ext cx="11002975" cy="1097280"/>
+              <a:t>What this implies</a:t>
+            </a:r>
+            <a:endParaRPr lang="en-US" sz="1300" dirty="0"/>
+          </a:p>
+        </p:txBody>
+      </p:sp>
+      <p:sp>
+        <p:nvSpPr>
+          <p:cNvPr id="7" name="Text 4"/>
+          <p:cNvSpPr txBox="1"/>
+          <p:nvPr/>
+        </p:nvSpPr>
+        <p:spPr>
+          <a:xfrm>
+            <a:off x="8503920" y="2560320"/>
+            <a:ext cx="2834640" cy="3017520"/>
           </a:xfrm>
           <a:prstGeom prst="rect">
             <a:avLst/>
@@ -8242,12 +9431,12 @@
           <a:p>
             <a:pPr algn="l" indent="0" marL="0">
               <a:lnSpc>
-                <a:spcPct val="130000"/>
+                <a:spcPct val="125000"/>
               </a:lnSpc>
               <a:buNone/>
             </a:pPr>
             <a:r>
-              <a:rPr lang="en-US" sz="1350" dirty="0">
+              <a:rPr lang="en-US" sz="1200" dirty="0">
                 <a:solidFill>
                   <a:srgbClr val="364239"/>
                 </a:solidFill>
@@ -8255,15 +9444,44 @@
                 <a:ea typeface="Calibri" pitchFamily="34" charset="-122"/>
                 <a:cs typeface="Calibri" pitchFamily="34" charset="-120"/>
               </a:rPr>
-              <a:t>Oman imports most of its cereals, sugar, dairy and meat, and part of its vegetables. Food security plans favour local production of high-value crops and a more efficient use of every cubic metre of groundwater.</a:t>
-            </a:r>
-            <a:endParaRPr lang="en-US" sz="1350" dirty="0"/>
-          </a:p>
-        </p:txBody>
-      </p:sp>
-      <p:sp>
-        <p:nvSpPr>
-          <p:cNvPr id="17" name="Text 15"/>
+              <a:t>A 10 % cut in irrigation demand saves several times the volume used by the whole of industry.</a:t>
+            </a:r>
+            <a:endParaRPr lang="en-US" sz="1200" dirty="0"/>
+          </a:p>
+          <a:p>
+            <a:pPr algn="l" indent="0" marL="0">
+              <a:lnSpc>
+                <a:spcPct val="125000"/>
+              </a:lnSpc>
+              <a:buNone/>
+            </a:pPr>
+            <a:endParaRPr lang="en-US" sz="1200" dirty="0"/>
+          </a:p>
+          <a:p>
+            <a:pPr algn="l" indent="0" marL="0">
+              <a:lnSpc>
+                <a:spcPct val="125000"/>
+              </a:lnSpc>
+              <a:buNone/>
+            </a:pPr>
+            <a:r>
+              <a:rPr lang="en-US" sz="1200" dirty="0">
+                <a:solidFill>
+                  <a:srgbClr val="364239"/>
+                </a:solidFill>
+                <a:latin typeface="Calibri" pitchFamily="34" charset="0"/>
+                <a:ea typeface="Calibri" pitchFamily="34" charset="-122"/>
+                <a:cs typeface="Calibri" pitchFamily="34" charset="-120"/>
+              </a:rPr>
+              <a:t>That is why the effort belongs in the field: dates, fodder and vegetables on the coastal plain.</a:t>
+            </a:r>
+            <a:endParaRPr lang="en-US" sz="1200" dirty="0"/>
+          </a:p>
+        </p:txBody>
+      </p:sp>
+      <p:sp>
+        <p:nvSpPr>
+          <p:cNvPr id="8" name="Text 5"/>
           <p:cNvSpPr txBox="1"/>
           <p:nvPr/>
         </p:nvSpPr>
@@ -8304,7 +9522,7 @@
       </p:sp>
       <p:sp>
         <p:nvSpPr>
-          <p:cNvPr id="18" name="Text 16"/>
+          <p:cNvPr id="9" name="Text 6"/>
           <p:cNvSpPr txBox="1"/>
           <p:nvPr/>
         </p:nvSpPr>
@@ -8408,7 +9626,7 @@
                 <a:ea typeface="Calibri" pitchFamily="34" charset="-122"/>
                 <a:cs typeface="Calibri" pitchFamily="34" charset="-120"/>
               </a:rPr>
-              <a:t>THE MAIN CROPS</a:t>
+              <a:t>ECONOMY AND FOOD SECURITY</a:t>
             </a:r>
             <a:endParaRPr lang="en-US" sz="1150" dirty="0"/>
           </a:p>
@@ -8447,42 +9665,26 @@
                 <a:ea typeface="Cambria" pitchFamily="34" charset="-122"/>
                 <a:cs typeface="Cambria" pitchFamily="34" charset="-120"/>
               </a:rPr>
-              <a:t>Date palms hold half of the cropped area</a:t>
+              <a:t>Strong purchasing power, a narrow food base</a:t>
             </a:r>
             <a:endParaRPr lang="en-US" sz="3000" dirty="0"/>
           </a:p>
         </p:txBody>
       </p:sp>
-      <p:graphicFrame>
-        <p:nvGraphicFramePr>
-          <p:cNvPr id="4" name="Chart 0" descr=""/>
-          <p:cNvGraphicFramePr/>
-          <p:nvPr/>
-        </p:nvGraphicFramePr>
-        <p:xfrm>
-          <a:off x="594360" y="1783080"/>
-          <a:ext cx="7360920" cy="3977640"/>
-        </p:xfrm>
-        <a:graphic xmlns:a="http://schemas.openxmlformats.org/drawingml/2006/main">
-          <a:graphicData uri="http://schemas.openxmlformats.org/drawingml/2006/chart">
-            <c:chart xmlns:c="http://schemas.openxmlformats.org/drawingml/2006/chart" r:id="rId1"/>
-          </a:graphicData>
-        </a:graphic>
-      </p:graphicFrame>
-      <p:sp>
-        <p:nvSpPr>
-          <p:cNvPr id="5" name="Shape 2"/>
+      <p:sp>
+        <p:nvSpPr>
+          <p:cNvPr id="4" name="Shape 2"/>
           <p:cNvSpPr/>
           <p:nvPr/>
         </p:nvSpPr>
         <p:spPr>
           <a:xfrm>
-            <a:off x="8275320" y="1783080"/>
-            <a:ext cx="3291840" cy="3977640"/>
+            <a:off x="594360" y="1874520"/>
+            <a:ext cx="2545004" cy="2514600"/>
           </a:xfrm>
           <a:prstGeom prst="roundRect">
             <a:avLst>
-              <a:gd name="adj" fmla="val 2778"/>
+              <a:gd name="adj" fmla="val 3636"/>
             </a:avLst>
           </a:prstGeom>
           <a:solidFill>
@@ -8498,14 +9700,14 @@
       </p:sp>
       <p:sp>
         <p:nvSpPr>
-          <p:cNvPr id="6" name="Text 3"/>
-          <p:cNvSpPr txBox="1"/>
-          <p:nvPr/>
-        </p:nvSpPr>
-        <p:spPr>
-          <a:xfrm>
-            <a:off x="8503920" y="2011680"/>
-            <a:ext cx="2834640" cy="457200"/>
+          <p:cNvPr id="5" name="Text 3"/>
+          <p:cNvSpPr txBox="1"/>
+          <p:nvPr/>
+        </p:nvSpPr>
+        <p:spPr>
+          <a:xfrm>
+            <a:off x="777240" y="2148840"/>
+            <a:ext cx="2179244" cy="960120"/>
           </a:xfrm>
           <a:prstGeom prst="rect">
             <a:avLst/>
@@ -8517,11 +9719,11 @@
           <a:bodyPr wrap="square" lIns="0" tIns="0" rIns="0" bIns="0" rtlCol="0" anchor="ctr"/>
           <a:lstStyle/>
           <a:p>
-            <a:pPr algn="l" indent="0" marL="0">
-              <a:buNone/>
-            </a:pPr>
-            <a:r>
-              <a:rPr lang="en-US" sz="1300" b="1" dirty="0">
+            <a:pPr algn="ctr" indent="0" marL="0">
+              <a:buNone/>
+            </a:pPr>
+            <a:r>
+              <a:rPr lang="en-US" sz="3800" b="1" dirty="0">
                 <a:solidFill>
                   <a:srgbClr val="2C6E49"/>
                 </a:solidFill>
@@ -8529,22 +9731,388 @@
                 <a:ea typeface="Cambria" pitchFamily="34" charset="-122"/>
                 <a:cs typeface="Cambria" pitchFamily="34" charset="-120"/>
               </a:rPr>
-              <a:t>Reading</a:t>
-            </a:r>
-            <a:endParaRPr lang="en-US" sz="1300" dirty="0"/>
-          </a:p>
-        </p:txBody>
-      </p:sp>
-      <p:sp>
-        <p:nvSpPr>
-          <p:cNvPr id="7" name="Text 4"/>
-          <p:cNvSpPr txBox="1"/>
-          <p:nvPr/>
-        </p:nvSpPr>
-        <p:spPr>
-          <a:xfrm>
-            <a:off x="8503920" y="2560320"/>
-            <a:ext cx="2834640" cy="3017520"/>
+              <a:t>≈ 5 M</a:t>
+            </a:r>
+            <a:endParaRPr lang="en-US" sz="3800" dirty="0"/>
+          </a:p>
+        </p:txBody>
+      </p:sp>
+      <p:sp>
+        <p:nvSpPr>
+          <p:cNvPr id="6" name="Text 4"/>
+          <p:cNvSpPr txBox="1"/>
+          <p:nvPr/>
+        </p:nvSpPr>
+        <p:spPr>
+          <a:xfrm>
+            <a:off x="795528" y="3154680"/>
+            <a:ext cx="2142668" cy="1051560"/>
+          </a:xfrm>
+          <a:prstGeom prst="rect">
+            <a:avLst/>
+          </a:prstGeom>
+          <a:noFill/>
+          <a:ln/>
+        </p:spPr>
+        <p:txBody>
+          <a:bodyPr wrap="square" lIns="0" tIns="0" rIns="0" bIns="0" rtlCol="0" anchor="t"/>
+          <a:lstStyle/>
+          <a:p>
+            <a:pPr algn="ctr" indent="0" marL="0">
+              <a:lnSpc>
+                <a:spcPct val="118000"/>
+              </a:lnSpc>
+              <a:buNone/>
+            </a:pPr>
+            <a:r>
+              <a:rPr lang="en-US" sz="1250" dirty="0">
+                <a:solidFill>
+                  <a:srgbClr val="364239"/>
+                </a:solidFill>
+                <a:latin typeface="Calibri" pitchFamily="34" charset="0"/>
+                <a:ea typeface="Calibri" pitchFamily="34" charset="-122"/>
+                <a:cs typeface="Calibri" pitchFamily="34" charset="-120"/>
+              </a:rPr>
+              <a:t>residents, with food demand rising every year</a:t>
+            </a:r>
+            <a:endParaRPr lang="en-US" sz="1250" dirty="0"/>
+          </a:p>
+        </p:txBody>
+      </p:sp>
+      <p:sp>
+        <p:nvSpPr>
+          <p:cNvPr id="7" name="Shape 5"/>
+          <p:cNvSpPr/>
+          <p:nvPr/>
+        </p:nvSpPr>
+        <p:spPr>
+          <a:xfrm>
+            <a:off x="3413684" y="1874520"/>
+            <a:ext cx="2545004" cy="2514600"/>
+          </a:xfrm>
+          <a:prstGeom prst="roundRect">
+            <a:avLst>
+              <a:gd name="adj" fmla="val 3636"/>
+            </a:avLst>
+          </a:prstGeom>
+          <a:solidFill>
+            <a:srgbClr val="F2F1E8"/>
+          </a:solidFill>
+          <a:ln w="9525">
+            <a:solidFill>
+              <a:srgbClr val="E0DFD0"/>
+            </a:solidFill>
+            <a:prstDash val="solid"/>
+          </a:ln>
+        </p:spPr>
+      </p:sp>
+      <p:sp>
+        <p:nvSpPr>
+          <p:cNvPr id="8" name="Text 6"/>
+          <p:cNvSpPr txBox="1"/>
+          <p:nvPr/>
+        </p:nvSpPr>
+        <p:spPr>
+          <a:xfrm>
+            <a:off x="3596564" y="2148840"/>
+            <a:ext cx="2179244" cy="960120"/>
+          </a:xfrm>
+          <a:prstGeom prst="rect">
+            <a:avLst/>
+          </a:prstGeom>
+          <a:noFill/>
+          <a:ln/>
+        </p:spPr>
+        <p:txBody>
+          <a:bodyPr wrap="square" lIns="0" tIns="0" rIns="0" bIns="0" rtlCol="0" anchor="ctr"/>
+          <a:lstStyle/>
+          <a:p>
+            <a:pPr algn="ctr" indent="0" marL="0">
+              <a:buNone/>
+            </a:pPr>
+            <a:r>
+              <a:rPr lang="en-US" sz="3800" b="1" dirty="0">
+                <a:solidFill>
+                  <a:srgbClr val="2C6E49"/>
+                </a:solidFill>
+                <a:latin typeface="Cambria" pitchFamily="34" charset="0"/>
+                <a:ea typeface="Cambria" pitchFamily="34" charset="-122"/>
+                <a:cs typeface="Cambria" pitchFamily="34" charset="-120"/>
+              </a:rPr>
+              <a:t>&gt; 100 %</a:t>
+            </a:r>
+            <a:endParaRPr lang="en-US" sz="3800" dirty="0"/>
+          </a:p>
+        </p:txBody>
+      </p:sp>
+      <p:sp>
+        <p:nvSpPr>
+          <p:cNvPr id="9" name="Text 7"/>
+          <p:cNvSpPr txBox="1"/>
+          <p:nvPr/>
+        </p:nvSpPr>
+        <p:spPr>
+          <a:xfrm>
+            <a:off x="3614852" y="3154680"/>
+            <a:ext cx="2142668" cy="1051560"/>
+          </a:xfrm>
+          <a:prstGeom prst="rect">
+            <a:avLst/>
+          </a:prstGeom>
+          <a:noFill/>
+          <a:ln/>
+        </p:spPr>
+        <p:txBody>
+          <a:bodyPr wrap="square" lIns="0" tIns="0" rIns="0" bIns="0" rtlCol="0" anchor="t"/>
+          <a:lstStyle/>
+          <a:p>
+            <a:pPr algn="ctr" indent="0" marL="0">
+              <a:lnSpc>
+                <a:spcPct val="118000"/>
+              </a:lnSpc>
+              <a:buNone/>
+            </a:pPr>
+            <a:r>
+              <a:rPr lang="en-US" sz="1250" dirty="0">
+                <a:solidFill>
+                  <a:srgbClr val="364239"/>
+                </a:solidFill>
+                <a:latin typeface="Calibri" pitchFamily="34" charset="0"/>
+                <a:ea typeface="Calibri" pitchFamily="34" charset="-122"/>
+                <a:cs typeface="Calibri" pitchFamily="34" charset="-120"/>
+              </a:rPr>
+              <a:t>self-sufficiency in dates and in fresh fish</a:t>
+            </a:r>
+            <a:endParaRPr lang="en-US" sz="1250" dirty="0"/>
+          </a:p>
+        </p:txBody>
+      </p:sp>
+      <p:sp>
+        <p:nvSpPr>
+          <p:cNvPr id="10" name="Shape 8"/>
+          <p:cNvSpPr/>
+          <p:nvPr/>
+        </p:nvSpPr>
+        <p:spPr>
+          <a:xfrm>
+            <a:off x="6233008" y="1874520"/>
+            <a:ext cx="2545004" cy="2514600"/>
+          </a:xfrm>
+          <a:prstGeom prst="roundRect">
+            <a:avLst>
+              <a:gd name="adj" fmla="val 3636"/>
+            </a:avLst>
+          </a:prstGeom>
+          <a:solidFill>
+            <a:srgbClr val="F2F1E8"/>
+          </a:solidFill>
+          <a:ln w="9525">
+            <a:solidFill>
+              <a:srgbClr val="E0DFD0"/>
+            </a:solidFill>
+            <a:prstDash val="solid"/>
+          </a:ln>
+        </p:spPr>
+      </p:sp>
+      <p:sp>
+        <p:nvSpPr>
+          <p:cNvPr id="11" name="Text 9"/>
+          <p:cNvSpPr txBox="1"/>
+          <p:nvPr/>
+        </p:nvSpPr>
+        <p:spPr>
+          <a:xfrm>
+            <a:off x="6415888" y="2148840"/>
+            <a:ext cx="2179244" cy="960120"/>
+          </a:xfrm>
+          <a:prstGeom prst="rect">
+            <a:avLst/>
+          </a:prstGeom>
+          <a:noFill/>
+          <a:ln/>
+        </p:spPr>
+        <p:txBody>
+          <a:bodyPr wrap="square" lIns="0" tIns="0" rIns="0" bIns="0" rtlCol="0" anchor="ctr"/>
+          <a:lstStyle/>
+          <a:p>
+            <a:pPr algn="ctr" indent="0" marL="0">
+              <a:buNone/>
+            </a:pPr>
+            <a:r>
+              <a:rPr lang="en-US" sz="3800" b="1" dirty="0">
+                <a:solidFill>
+                  <a:srgbClr val="2C6E49"/>
+                </a:solidFill>
+                <a:latin typeface="Cambria" pitchFamily="34" charset="0"/>
+                <a:ea typeface="Cambria" pitchFamily="34" charset="-122"/>
+                <a:cs typeface="Cambria" pitchFamily="34" charset="-120"/>
+              </a:rPr>
+              <a:t>≈ 3,000</a:t>
+            </a:r>
+            <a:endParaRPr lang="en-US" sz="3800" dirty="0"/>
+          </a:p>
+        </p:txBody>
+      </p:sp>
+      <p:sp>
+        <p:nvSpPr>
+          <p:cNvPr id="12" name="Text 10"/>
+          <p:cNvSpPr txBox="1"/>
+          <p:nvPr/>
+        </p:nvSpPr>
+        <p:spPr>
+          <a:xfrm>
+            <a:off x="6434176" y="3154680"/>
+            <a:ext cx="2142668" cy="1051560"/>
+          </a:xfrm>
+          <a:prstGeom prst="rect">
+            <a:avLst/>
+          </a:prstGeom>
+          <a:noFill/>
+          <a:ln/>
+        </p:spPr>
+        <p:txBody>
+          <a:bodyPr wrap="square" lIns="0" tIns="0" rIns="0" bIns="0" rtlCol="0" anchor="t"/>
+          <a:lstStyle/>
+          <a:p>
+            <a:pPr algn="ctr" indent="0" marL="0">
+              <a:lnSpc>
+                <a:spcPct val="118000"/>
+              </a:lnSpc>
+              <a:buNone/>
+            </a:pPr>
+            <a:r>
+              <a:rPr lang="en-US" sz="1250" dirty="0">
+                <a:solidFill>
+                  <a:srgbClr val="364239"/>
+                </a:solidFill>
+                <a:latin typeface="Calibri" pitchFamily="34" charset="0"/>
+                <a:ea typeface="Calibri" pitchFamily="34" charset="-122"/>
+                <a:cs typeface="Calibri" pitchFamily="34" charset="-120"/>
+              </a:rPr>
+              <a:t>active aflaj, five of them on the UNESCO World Heritage list</a:t>
+            </a:r>
+            <a:endParaRPr lang="en-US" sz="1250" dirty="0"/>
+          </a:p>
+        </p:txBody>
+      </p:sp>
+      <p:sp>
+        <p:nvSpPr>
+          <p:cNvPr id="13" name="Shape 11"/>
+          <p:cNvSpPr/>
+          <p:nvPr/>
+        </p:nvSpPr>
+        <p:spPr>
+          <a:xfrm>
+            <a:off x="9052331" y="1874520"/>
+            <a:ext cx="2545004" cy="2514600"/>
+          </a:xfrm>
+          <a:prstGeom prst="roundRect">
+            <a:avLst>
+              <a:gd name="adj" fmla="val 3636"/>
+            </a:avLst>
+          </a:prstGeom>
+          <a:solidFill>
+            <a:srgbClr val="F2F1E8"/>
+          </a:solidFill>
+          <a:ln w="9525">
+            <a:solidFill>
+              <a:srgbClr val="E0DFD0"/>
+            </a:solidFill>
+            <a:prstDash val="solid"/>
+          </a:ln>
+        </p:spPr>
+      </p:sp>
+      <p:sp>
+        <p:nvSpPr>
+          <p:cNvPr id="14" name="Text 12"/>
+          <p:cNvSpPr txBox="1"/>
+          <p:nvPr/>
+        </p:nvSpPr>
+        <p:spPr>
+          <a:xfrm>
+            <a:off x="9235211" y="2148840"/>
+            <a:ext cx="2179244" cy="960120"/>
+          </a:xfrm>
+          <a:prstGeom prst="rect">
+            <a:avLst/>
+          </a:prstGeom>
+          <a:noFill/>
+          <a:ln/>
+        </p:spPr>
+        <p:txBody>
+          <a:bodyPr wrap="square" lIns="0" tIns="0" rIns="0" bIns="0" rtlCol="0" anchor="ctr"/>
+          <a:lstStyle/>
+          <a:p>
+            <a:pPr algn="ctr" indent="0" marL="0">
+              <a:buNone/>
+            </a:pPr>
+            <a:r>
+              <a:rPr lang="en-US" sz="3800" b="1" dirty="0">
+                <a:solidFill>
+                  <a:srgbClr val="2C6E49"/>
+                </a:solidFill>
+                <a:latin typeface="Cambria" pitchFamily="34" charset="0"/>
+                <a:ea typeface="Cambria" pitchFamily="34" charset="-122"/>
+                <a:cs typeface="Cambria" pitchFamily="34" charset="-120"/>
+              </a:rPr>
+              <a:t>2040</a:t>
+            </a:r>
+            <a:endParaRPr lang="en-US" sz="3800" dirty="0"/>
+          </a:p>
+        </p:txBody>
+      </p:sp>
+      <p:sp>
+        <p:nvSpPr>
+          <p:cNvPr id="15" name="Text 13"/>
+          <p:cNvSpPr txBox="1"/>
+          <p:nvPr/>
+        </p:nvSpPr>
+        <p:spPr>
+          <a:xfrm>
+            <a:off x="9253499" y="3154680"/>
+            <a:ext cx="2142668" cy="1051560"/>
+          </a:xfrm>
+          <a:prstGeom prst="rect">
+            <a:avLst/>
+          </a:prstGeom>
+          <a:noFill/>
+          <a:ln/>
+        </p:spPr>
+        <p:txBody>
+          <a:bodyPr wrap="square" lIns="0" tIns="0" rIns="0" bIns="0" rtlCol="0" anchor="t"/>
+          <a:lstStyle/>
+          <a:p>
+            <a:pPr algn="ctr" indent="0" marL="0">
+              <a:lnSpc>
+                <a:spcPct val="118000"/>
+              </a:lnSpc>
+              <a:buNone/>
+            </a:pPr>
+            <a:r>
+              <a:rPr lang="en-US" sz="1250" dirty="0">
+                <a:solidFill>
+                  <a:srgbClr val="364239"/>
+                </a:solidFill>
+                <a:latin typeface="Calibri" pitchFamily="34" charset="0"/>
+                <a:ea typeface="Calibri" pitchFamily="34" charset="-122"/>
+                <a:cs typeface="Calibri" pitchFamily="34" charset="-120"/>
+              </a:rPr>
+              <a:t>horizon of Oman Vision, with food security as a priority</a:t>
+            </a:r>
+            <a:endParaRPr lang="en-US" sz="1250" dirty="0"/>
+          </a:p>
+        </p:txBody>
+      </p:sp>
+      <p:sp>
+        <p:nvSpPr>
+          <p:cNvPr id="16" name="Text 14"/>
+          <p:cNvSpPr txBox="1"/>
+          <p:nvPr/>
+        </p:nvSpPr>
+        <p:spPr>
+          <a:xfrm>
+            <a:off x="594360" y="4709160"/>
+            <a:ext cx="11002975" cy="1097280"/>
           </a:xfrm>
           <a:prstGeom prst="rect">
             <a:avLst/>
@@ -8558,12 +10126,12 @@
           <a:p>
             <a:pPr algn="l" indent="0" marL="0">
               <a:lnSpc>
-                <a:spcPct val="125000"/>
+                <a:spcPct val="130000"/>
               </a:lnSpc>
               <a:buNone/>
             </a:pPr>
             <a:r>
-              <a:rPr lang="en-US" sz="1200" dirty="0">
+              <a:rPr lang="en-US" sz="1350" dirty="0">
                 <a:solidFill>
                   <a:srgbClr val="364239"/>
                 </a:solidFill>
@@ -8571,44 +10139,15 @@
                 <a:ea typeface="Calibri" pitchFamily="34" charset="-122"/>
                 <a:cs typeface="Calibri" pitchFamily="34" charset="-120"/>
               </a:rPr>
-              <a:t>Date palms occupy about half of the cropped area and carry cultural as well as economic weight.</a:t>
-            </a:r>
-            <a:endParaRPr lang="en-US" sz="1200" dirty="0"/>
-          </a:p>
-          <a:p>
-            <a:pPr algn="l" indent="0" marL="0">
-              <a:lnSpc>
-                <a:spcPct val="125000"/>
-              </a:lnSpc>
-              <a:buNone/>
-            </a:pPr>
-            <a:endParaRPr lang="en-US" sz="1200" dirty="0"/>
-          </a:p>
-          <a:p>
-            <a:pPr algn="l" indent="0" marL="0">
-              <a:lnSpc>
-                <a:spcPct val="125000"/>
-              </a:lnSpc>
-              <a:buNone/>
-            </a:pPr>
-            <a:r>
-              <a:rPr lang="en-US" sz="1200" dirty="0">
-                <a:solidFill>
-                  <a:srgbClr val="364239"/>
-                </a:solidFill>
-                <a:latin typeface="Calibri" pitchFamily="34" charset="0"/>
-                <a:ea typeface="Calibri" pitchFamily="34" charset="-122"/>
-                <a:cs typeface="Calibri" pitchFamily="34" charset="-120"/>
-              </a:rPr>
-              <a:t>Fodder, mostly Rhodes grass and alfalfa, is the thirstiest use per hectare and the first target of water rationing. Shares are rounded orders of magnitude.</a:t>
-            </a:r>
-            <a:endParaRPr lang="en-US" sz="1200" dirty="0"/>
-          </a:p>
-        </p:txBody>
-      </p:sp>
-      <p:sp>
-        <p:nvSpPr>
-          <p:cNvPr id="8" name="Text 5"/>
+              <a:t>Oman imports most of its cereals, sugar, dairy and meat, and part of its vegetables. Food security plans favour local production of high-value crops and a more efficient use of every cubic metre of groundwater.</a:t>
+            </a:r>
+            <a:endParaRPr lang="en-US" sz="1350" dirty="0"/>
+          </a:p>
+        </p:txBody>
+      </p:sp>
+      <p:sp>
+        <p:nvSpPr>
+          <p:cNvPr id="17" name="Text 15"/>
           <p:cNvSpPr txBox="1"/>
           <p:nvPr/>
         </p:nvSpPr>
@@ -8649,7 +10188,7 @@
       </p:sp>
       <p:sp>
         <p:nvSpPr>
-          <p:cNvPr id="9" name="Text 6"/>
+          <p:cNvPr id="18" name="Text 16"/>
           <p:cNvSpPr txBox="1"/>
           <p:nvPr/>
         </p:nvSpPr>
@@ -8753,7 +10292,7 @@
                 <a:ea typeface="Calibri" pitchFamily="34" charset="-122"/>
                 <a:cs typeface="Calibri" pitchFamily="34" charset="-120"/>
               </a:rPr>
-              <a:t>LEADING SECTOR</a:t>
+              <a:t>THE MAIN CROPS</a:t>
             </a:r>
             <a:endParaRPr lang="en-US" sz="1150" dirty="0"/>
           </a:p>
@@ -8792,46 +10331,104 @@
                 <a:ea typeface="Cambria" pitchFamily="34" charset="-122"/>
                 <a:cs typeface="Cambria" pitchFamily="34" charset="-120"/>
               </a:rPr>
-              <a:t>Dates: a heritage crop with a modern water problem</a:t>
+              <a:t>Date palms hold half of the cropped area</a:t>
             </a:r>
             <a:endParaRPr lang="en-US" sz="3000" dirty="0"/>
           </a:p>
         </p:txBody>
       </p:sp>
-      <p:pic>
-        <p:nvPicPr>
-          <p:cNvPr id="4" name="Image 0" descr="preencoded.png">    </p:cNvPr>
-          <p:cNvPicPr>
-            <a:picLocks noChangeAspect="1"/>
-          </p:cNvPicPr>
-          <p:nvPr/>
-        </p:nvPicPr>
-        <p:blipFill>
-          <a:blip r:embed="rId1"/>
-          <a:stretch>
-            <a:fillRect/>
-          </a:stretch>
-        </p:blipFill>
-        <p:spPr>
-          <a:xfrm>
-            <a:off x="6522415" y="1783080"/>
-            <a:ext cx="5074920" cy="3794760"/>
-          </a:xfrm>
-          <a:prstGeom prst="rect">
-            <a:avLst/>
-          </a:prstGeom>
-        </p:spPr>
-      </p:pic>
-      <p:sp>
-        <p:nvSpPr>
-          <p:cNvPr id="5" name="Text 2"/>
-          <p:cNvSpPr txBox="1"/>
-          <p:nvPr/>
-        </p:nvSpPr>
-        <p:spPr>
-          <a:xfrm>
-            <a:off x="594360" y="1783080"/>
-            <a:ext cx="5379415" cy="4251960"/>
+      <p:graphicFrame>
+        <p:nvGraphicFramePr>
+          <p:cNvPr id="4" name="Chart 0" descr=""/>
+          <p:cNvGraphicFramePr/>
+          <p:nvPr/>
+        </p:nvGraphicFramePr>
+        <p:xfrm>
+          <a:off x="594360" y="1783080"/>
+          <a:ext cx="7360920" cy="3977640"/>
+        </p:xfrm>
+        <a:graphic xmlns:a="http://schemas.openxmlformats.org/drawingml/2006/main">
+          <a:graphicData uri="http://schemas.openxmlformats.org/drawingml/2006/chart">
+            <c:chart xmlns:c="http://schemas.openxmlformats.org/drawingml/2006/chart" r:id="rId1"/>
+          </a:graphicData>
+        </a:graphic>
+      </p:graphicFrame>
+      <p:sp>
+        <p:nvSpPr>
+          <p:cNvPr id="5" name="Shape 2"/>
+          <p:cNvSpPr/>
+          <p:nvPr/>
+        </p:nvSpPr>
+        <p:spPr>
+          <a:xfrm>
+            <a:off x="8275320" y="1783080"/>
+            <a:ext cx="3291840" cy="3977640"/>
+          </a:xfrm>
+          <a:prstGeom prst="roundRect">
+            <a:avLst>
+              <a:gd name="adj" fmla="val 2778"/>
+            </a:avLst>
+          </a:prstGeom>
+          <a:solidFill>
+            <a:srgbClr val="F2F1E8"/>
+          </a:solidFill>
+          <a:ln w="9525">
+            <a:solidFill>
+              <a:srgbClr val="E0DFD0"/>
+            </a:solidFill>
+            <a:prstDash val="solid"/>
+          </a:ln>
+        </p:spPr>
+      </p:sp>
+      <p:sp>
+        <p:nvSpPr>
+          <p:cNvPr id="6" name="Text 3"/>
+          <p:cNvSpPr txBox="1"/>
+          <p:nvPr/>
+        </p:nvSpPr>
+        <p:spPr>
+          <a:xfrm>
+            <a:off x="8503920" y="2011680"/>
+            <a:ext cx="2834640" cy="457200"/>
+          </a:xfrm>
+          <a:prstGeom prst="rect">
+            <a:avLst/>
+          </a:prstGeom>
+          <a:noFill/>
+          <a:ln/>
+        </p:spPr>
+        <p:txBody>
+          <a:bodyPr wrap="square" lIns="0" tIns="0" rIns="0" bIns="0" rtlCol="0" anchor="ctr"/>
+          <a:lstStyle/>
+          <a:p>
+            <a:pPr algn="l" indent="0" marL="0">
+              <a:buNone/>
+            </a:pPr>
+            <a:r>
+              <a:rPr lang="en-US" sz="1300" b="1" dirty="0">
+                <a:solidFill>
+                  <a:srgbClr val="2C6E49"/>
+                </a:solidFill>
+                <a:latin typeface="Cambria" pitchFamily="34" charset="0"/>
+                <a:ea typeface="Cambria" pitchFamily="34" charset="-122"/>
+                <a:cs typeface="Cambria" pitchFamily="34" charset="-120"/>
+              </a:rPr>
+              <a:t>Reading</a:t>
+            </a:r>
+            <a:endParaRPr lang="en-US" sz="1300" dirty="0"/>
+          </a:p>
+        </p:txBody>
+      </p:sp>
+      <p:sp>
+        <p:nvSpPr>
+          <p:cNvPr id="7" name="Text 4"/>
+          <p:cNvSpPr txBox="1"/>
+          <p:nvPr/>
+        </p:nvSpPr>
+        <p:spPr>
+          <a:xfrm>
+            <a:off x="8503920" y="2560320"/>
+            <a:ext cx="2834640" cy="3017520"/>
           </a:xfrm>
           <a:prstGeom prst="rect">
             <a:avLst/>
@@ -8843,18 +10440,14 @@
           <a:bodyPr wrap="square" lIns="0" tIns="0" rIns="0" bIns="0" rtlCol="0" anchor="t"/>
           <a:lstStyle/>
           <a:p>
-            <a:pPr algn="l" marL="342900" indent="-342900">
+            <a:pPr algn="l" indent="0" marL="0">
               <a:lnSpc>
-                <a:spcPct val="122000"/>
+                <a:spcPct val="125000"/>
               </a:lnSpc>
-              <a:spcAft>
-                <a:spcPts val="1100"/>
-              </a:spcAft>
-              <a:buSzPct val="100000"/>
-              <a:buChar char="•"/>
-            </a:pPr>
-            <a:r>
-              <a:rPr lang="en-US" sz="1400" dirty="0">
+              <a:buNone/>
+            </a:pPr>
+            <a:r>
+              <a:rPr lang="en-US" sz="1200" dirty="0">
                 <a:solidFill>
                   <a:srgbClr val="364239"/>
                 </a:solidFill>
@@ -8862,23 +10455,28 @@
                 <a:ea typeface="Calibri" pitchFamily="34" charset="-122"/>
                 <a:cs typeface="Calibri" pitchFamily="34" charset="-120"/>
               </a:rPr>
-              <a:t>Date palms cover about half of Oman's cropped area, from the Al Batinah coast to the interior oases.</a:t>
-            </a:r>
-            <a:endParaRPr lang="en-US" sz="1400" dirty="0"/>
-          </a:p>
-          <a:p>
-            <a:pPr algn="l" marL="342900" indent="-342900">
+              <a:t>Date palms occupy about half of the cropped area and carry cultural as well as economic weight.</a:t>
+            </a:r>
+            <a:endParaRPr lang="en-US" sz="1200" dirty="0"/>
+          </a:p>
+          <a:p>
+            <a:pPr algn="l" indent="0" marL="0">
               <a:lnSpc>
-                <a:spcPct val="122000"/>
+                <a:spcPct val="125000"/>
               </a:lnSpc>
-              <a:spcAft>
-                <a:spcPts val="1100"/>
-              </a:spcAft>
-              <a:buSzPct val="100000"/>
-              <a:buChar char="•"/>
-            </a:pPr>
-            <a:r>
-              <a:rPr lang="en-US" sz="1400" dirty="0">
+              <a:buNone/>
+            </a:pPr>
+            <a:endParaRPr lang="en-US" sz="1200" dirty="0"/>
+          </a:p>
+          <a:p>
+            <a:pPr algn="l" indent="0" marL="0">
+              <a:lnSpc>
+                <a:spcPct val="125000"/>
+              </a:lnSpc>
+              <a:buNone/>
+            </a:pPr>
+            <a:r>
+              <a:rPr lang="en-US" sz="1200" dirty="0">
                 <a:solidFill>
                   <a:srgbClr val="364239"/>
                 </a:solidFill>
@@ -8886,87 +10484,15 @@
                 <a:ea typeface="Calibri" pitchFamily="34" charset="-122"/>
                 <a:cs typeface="Calibri" pitchFamily="34" charset="-120"/>
               </a:rPr>
-              <a:t>Many groves are still irrigated in basins, with high losses on sandy soils in summer heat.</a:t>
-            </a:r>
-            <a:endParaRPr lang="en-US" sz="1400" dirty="0"/>
-          </a:p>
-          <a:p>
-            <a:pPr algn="l" marL="342900" indent="-342900">
-              <a:lnSpc>
-                <a:spcPct val="122000"/>
-              </a:lnSpc>
-              <a:spcAft>
-                <a:spcPts val="1100"/>
-              </a:spcAft>
-              <a:buSzPct val="100000"/>
-              <a:buChar char="•"/>
-            </a:pPr>
-            <a:r>
-              <a:rPr lang="en-US" sz="1400" dirty="0">
-                <a:solidFill>
-                  <a:srgbClr val="364239"/>
-                </a:solidFill>
-                <a:latin typeface="Calibri" pitchFamily="34" charset="0"/>
-                <a:ea typeface="Calibri" pitchFamily="34" charset="-122"/>
-                <a:cs typeface="Calibri" pitchFamily="34" charset="-120"/>
-              </a:rPr>
-              <a:t>Saline groundwater along the coast lowers yields and fruit quality, and weakens young palms.</a:t>
-            </a:r>
-            <a:endParaRPr lang="en-US" sz="1400" dirty="0"/>
-          </a:p>
-          <a:p>
-            <a:pPr algn="l" marL="342900" indent="-342900">
-              <a:lnSpc>
-                <a:spcPct val="122000"/>
-              </a:lnSpc>
-              <a:spcAft>
-                <a:spcPts val="1100"/>
-              </a:spcAft>
-              <a:buSzPct val="100000"/>
-              <a:buChar char="•"/>
-            </a:pPr>
-            <a:r>
-              <a:rPr lang="en-US" sz="1400" dirty="0">
-                <a:solidFill>
-                  <a:srgbClr val="364239"/>
-                </a:solidFill>
-                <a:latin typeface="Calibri" pitchFamily="34" charset="0"/>
-                <a:ea typeface="Calibri" pitchFamily="34" charset="-122"/>
-                <a:cs typeface="Calibri" pitchFamily="34" charset="-120"/>
-              </a:rPr>
-              <a:t>Public programmes distribute offshoots of premium varieties: planting is the moment to act on water.</a:t>
-            </a:r>
-            <a:endParaRPr lang="en-US" sz="1400" dirty="0"/>
-          </a:p>
-          <a:p>
-            <a:pPr algn="l" marL="342900" indent="-342900">
-              <a:lnSpc>
-                <a:spcPct val="122000"/>
-              </a:lnSpc>
-              <a:spcAft>
-                <a:spcPts val="1100"/>
-              </a:spcAft>
-              <a:buSzPct val="100000"/>
-              <a:buChar char="•"/>
-            </a:pPr>
-            <a:r>
-              <a:rPr lang="en-US" sz="1400" dirty="0">
-                <a:solidFill>
-                  <a:srgbClr val="364239"/>
-                </a:solidFill>
-                <a:latin typeface="Calibri" pitchFamily="34" charset="0"/>
-                <a:ea typeface="Calibri" pitchFamily="34" charset="-122"/>
-                <a:cs typeface="Calibri" pitchFamily="34" charset="-120"/>
-              </a:rPr>
-              <a:t>EVERGREEN® placed in the planting pit holds irrigation water around the roots through the first hot season.</a:t>
-            </a:r>
-            <a:endParaRPr lang="en-US" sz="1400" dirty="0"/>
-          </a:p>
-        </p:txBody>
-      </p:sp>
-      <p:sp>
-        <p:nvSpPr>
-          <p:cNvPr id="6" name="Text 3"/>
+              <a:t>Fodder, mostly Rhodes grass and alfalfa, is the thirstiest use per hectare and the first target of water rationing. Shares are rounded orders of magnitude.</a:t>
+            </a:r>
+            <a:endParaRPr lang="en-US" sz="1200" dirty="0"/>
+          </a:p>
+        </p:txBody>
+      </p:sp>
+      <p:sp>
+        <p:nvSpPr>
+          <p:cNvPr id="8" name="Text 5"/>
           <p:cNvSpPr txBox="1"/>
           <p:nvPr/>
         </p:nvSpPr>
@@ -9007,7 +10533,7 @@
       </p:sp>
       <p:sp>
         <p:nvSpPr>
-          <p:cNvPr id="7" name="Text 4"/>
+          <p:cNvPr id="9" name="Text 6"/>
           <p:cNvSpPr txBox="1"/>
           <p:nvPr/>
         </p:nvSpPr>
@@ -9111,7 +10637,7 @@
                 <a:ea typeface="Calibri" pitchFamily="34" charset="-122"/>
                 <a:cs typeface="Calibri" pitchFamily="34" charset="-120"/>
               </a:rPr>
-              <a:t>OUR RESPONSE</a:t>
+              <a:t>LEADING SECTOR</a:t>
             </a:r>
             <a:endParaRPr lang="en-US" sz="1150" dirty="0"/>
           </a:p>
@@ -9150,61 +10676,46 @@
                 <a:ea typeface="Cambria" pitchFamily="34" charset="-122"/>
                 <a:cs typeface="Cambria" pitchFamily="34" charset="-120"/>
               </a:rPr>
-              <a:t>Two technologies, two different constraints</a:t>
+              <a:t>Dates: a heritage crop with a modern water problem</a:t>
             </a:r>
             <a:endParaRPr lang="en-US" sz="3000" dirty="0"/>
           </a:p>
         </p:txBody>
       </p:sp>
-      <p:sp>
-        <p:nvSpPr>
-          <p:cNvPr id="4" name="Text 2"/>
+      <p:pic>
+        <p:nvPicPr>
+          <p:cNvPr id="4" name="Image 0" descr="preencoded.png">    </p:cNvPr>
+          <p:cNvPicPr>
+            <a:picLocks noChangeAspect="1"/>
+          </p:cNvPicPr>
+          <p:nvPr/>
+        </p:nvPicPr>
+        <p:blipFill>
+          <a:blip r:embed="rId1"/>
+          <a:stretch>
+            <a:fillRect/>
+          </a:stretch>
+        </p:blipFill>
+        <p:spPr>
+          <a:xfrm>
+            <a:off x="6522415" y="1783080"/>
+            <a:ext cx="5074920" cy="3794760"/>
+          </a:xfrm>
+          <a:prstGeom prst="rect">
+            <a:avLst/>
+          </a:prstGeom>
+        </p:spPr>
+      </p:pic>
+      <p:sp>
+        <p:nvSpPr>
+          <p:cNvPr id="5" name="Text 2"/>
           <p:cNvSpPr txBox="1"/>
           <p:nvPr/>
         </p:nvSpPr>
         <p:spPr>
           <a:xfrm>
             <a:off x="594360" y="1783080"/>
-            <a:ext cx="5227168" cy="411480"/>
-          </a:xfrm>
-          <a:prstGeom prst="rect">
-            <a:avLst/>
-          </a:prstGeom>
-          <a:noFill/>
-          <a:ln/>
-        </p:spPr>
-        <p:txBody>
-          <a:bodyPr wrap="square" lIns="0" tIns="0" rIns="0" bIns="0" rtlCol="0" anchor="ctr"/>
-          <a:lstStyle/>
-          <a:p>
-            <a:pPr algn="l" indent="0" marL="0">
-              <a:buNone/>
-            </a:pPr>
-            <a:r>
-              <a:rPr lang="en-US" sz="1600" b="1" dirty="0">
-                <a:solidFill>
-                  <a:srgbClr val="2C6E49"/>
-                </a:solidFill>
-                <a:latin typeface="Cambria" pitchFamily="34" charset="0"/>
-                <a:ea typeface="Cambria" pitchFamily="34" charset="-122"/>
-                <a:cs typeface="Cambria" pitchFamily="34" charset="-120"/>
-              </a:rPr>
-              <a:t>EVERGREEN® — holding the water</a:t>
-            </a:r>
-            <a:endParaRPr lang="en-US" sz="1600" dirty="0"/>
-          </a:p>
-        </p:txBody>
-      </p:sp>
-      <p:sp>
-        <p:nvSpPr>
-          <p:cNvPr id="5" name="Text 3"/>
-          <p:cNvSpPr txBox="1"/>
-          <p:nvPr/>
-        </p:nvSpPr>
-        <p:spPr>
-          <a:xfrm>
-            <a:off x="594360" y="2286000"/>
-            <a:ext cx="5227168" cy="2468880"/>
+            <a:ext cx="5379415" cy="4251960"/>
           </a:xfrm>
           <a:prstGeom prst="rect">
             <a:avLst/>
@@ -9221,13 +10732,13 @@
                 <a:spcPct val="122000"/>
               </a:lnSpc>
               <a:spcAft>
-                <a:spcPts val="1000"/>
+                <a:spcPts val="1100"/>
               </a:spcAft>
               <a:buSzPct val="100000"/>
               <a:buChar char="•"/>
             </a:pPr>
             <a:r>
-              <a:rPr lang="en-US" sz="1350" dirty="0">
+              <a:rPr lang="en-US" sz="1400" dirty="0">
                 <a:solidFill>
                   <a:srgbClr val="364239"/>
                 </a:solidFill>
@@ -9235,9 +10746,9 @@
                 <a:ea typeface="Calibri" pitchFamily="34" charset="-122"/>
                 <a:cs typeface="Calibri" pitchFamily="34" charset="-120"/>
               </a:rPr>
-              <a:t>A potassium-based hydro-retainer placed in the root zone at planting or at replant.</a:t>
-            </a:r>
-            <a:endParaRPr lang="en-US" sz="1350" dirty="0"/>
+              <a:t>Date palms cover about half of Oman's cropped area, from the Al Batinah coast to the interior oases.</a:t>
+            </a:r>
+            <a:endParaRPr lang="en-US" sz="1400" dirty="0"/>
           </a:p>
           <a:p>
             <a:pPr algn="l" marL="342900" indent="-342900">
@@ -9245,13 +10756,13 @@
                 <a:spcPct val="122000"/>
               </a:lnSpc>
               <a:spcAft>
-                <a:spcPts val="1000"/>
+                <a:spcPts val="1100"/>
               </a:spcAft>
               <a:buSzPct val="100000"/>
               <a:buChar char="•"/>
             </a:pPr>
             <a:r>
-              <a:rPr lang="en-US" sz="1350" dirty="0">
+              <a:rPr lang="en-US" sz="1400" dirty="0">
                 <a:solidFill>
                   <a:srgbClr val="364239"/>
                 </a:solidFill>
@@ -9259,9 +10770,9 @@
                 <a:ea typeface="Calibri" pitchFamily="34" charset="-122"/>
                 <a:cs typeface="Calibri" pitchFamily="34" charset="-120"/>
               </a:rPr>
-              <a:t>It captures irrigation water and releases it back to the plant gradually, removing water stress through the hottest months.</a:t>
-            </a:r>
-            <a:endParaRPr lang="en-US" sz="1350" dirty="0"/>
+              <a:t>Many groves are still irrigated in basins, with high losses on sandy soils in summer heat.</a:t>
+            </a:r>
+            <a:endParaRPr lang="en-US" sz="1400" dirty="0"/>
           </a:p>
           <a:p>
             <a:pPr algn="l" marL="342900" indent="-342900">
@@ -9269,13 +10780,13 @@
                 <a:spcPct val="122000"/>
               </a:lnSpc>
               <a:spcAft>
-                <a:spcPts val="1000"/>
+                <a:spcPts val="1100"/>
               </a:spcAft>
               <a:buSzPct val="100000"/>
               <a:buChar char="•"/>
             </a:pPr>
             <a:r>
-              <a:rPr lang="en-US" sz="1350" dirty="0">
+              <a:rPr lang="en-US" sz="1400" dirty="0">
                 <a:solidFill>
                   <a:srgbClr val="364239"/>
                 </a:solidFill>
@@ -9283,9 +10794,9 @@
                 <a:ea typeface="Calibri" pitchFamily="34" charset="-122"/>
                 <a:cs typeface="Calibri" pitchFamily="34" charset="-120"/>
               </a:rPr>
-              <a:t>Absorbs on the order of 300 times its own weight; useful effect of 3 to 4 years in the soil.</a:t>
-            </a:r>
-            <a:endParaRPr lang="en-US" sz="1350" dirty="0"/>
+              <a:t>Saline groundwater along the coast lowers yields and fruit quality, and weakens young palms.</a:t>
+            </a:r>
+            <a:endParaRPr lang="en-US" sz="1400" dirty="0"/>
           </a:p>
           <a:p>
             <a:pPr algn="l" marL="342900" indent="-342900">
@@ -9293,13 +10804,13 @@
                 <a:spcPct val="122000"/>
               </a:lnSpc>
               <a:spcAft>
-                <a:spcPts val="1000"/>
+                <a:spcPts val="1100"/>
               </a:spcAft>
               <a:buSzPct val="100000"/>
               <a:buChar char="•"/>
             </a:pPr>
             <a:r>
-              <a:rPr lang="en-US" sz="1350" dirty="0">
+              <a:rPr lang="en-US" sz="1400" dirty="0">
                 <a:solidFill>
                   <a:srgbClr val="364239"/>
                 </a:solidFill>
@@ -9307,84 +10818,23 @@
                 <a:ea typeface="Calibri" pitchFamily="34" charset="-122"/>
                 <a:cs typeface="Calibri" pitchFamily="34" charset="-120"/>
               </a:rPr>
-              <a:t>Breaks down by 20 to 25 % a year, with no build-up and no risk of overdosing.</a:t>
-            </a:r>
-            <a:endParaRPr lang="en-US" sz="1350" dirty="0"/>
-          </a:p>
-        </p:txBody>
-      </p:sp>
-      <p:sp>
-        <p:nvSpPr>
-          <p:cNvPr id="6" name="Text 4"/>
-          <p:cNvSpPr txBox="1"/>
-          <p:nvPr/>
-        </p:nvSpPr>
-        <p:spPr>
-          <a:xfrm>
-            <a:off x="6370168" y="1783080"/>
-            <a:ext cx="5227168" cy="411480"/>
-          </a:xfrm>
-          <a:prstGeom prst="rect">
-            <a:avLst/>
-          </a:prstGeom>
-          <a:noFill/>
-          <a:ln/>
-        </p:spPr>
-        <p:txBody>
-          <a:bodyPr wrap="square" lIns="0" tIns="0" rIns="0" bIns="0" rtlCol="0" anchor="ctr"/>
-          <a:lstStyle/>
-          <a:p>
-            <a:pPr algn="l" indent="0" marL="0">
-              <a:buNone/>
-            </a:pPr>
-            <a:r>
-              <a:rPr lang="en-US" sz="1600" b="1" dirty="0">
-                <a:solidFill>
-                  <a:srgbClr val="2C6E49"/>
-                </a:solidFill>
-                <a:latin typeface="Cambria" pitchFamily="34" charset="0"/>
-                <a:ea typeface="Cambria" pitchFamily="34" charset="-122"/>
-                <a:cs typeface="Cambria" pitchFamily="34" charset="-120"/>
-              </a:rPr>
-              <a:t>ECOFERT® — feeding without depleting</a:t>
-            </a:r>
-            <a:endParaRPr lang="en-US" sz="1600" dirty="0"/>
-          </a:p>
-        </p:txBody>
-      </p:sp>
-      <p:sp>
-        <p:nvSpPr>
-          <p:cNvPr id="7" name="Text 5"/>
-          <p:cNvSpPr txBox="1"/>
-          <p:nvPr/>
-        </p:nvSpPr>
-        <p:spPr>
-          <a:xfrm>
-            <a:off x="6370168" y="2286000"/>
-            <a:ext cx="5227168" cy="2468880"/>
-          </a:xfrm>
-          <a:prstGeom prst="rect">
-            <a:avLst/>
-          </a:prstGeom>
-          <a:noFill/>
-          <a:ln/>
-        </p:spPr>
-        <p:txBody>
-          <a:bodyPr wrap="square" lIns="0" tIns="0" rIns="0" bIns="0" rtlCol="0" anchor="t"/>
-          <a:lstStyle/>
+              <a:t>Public programmes distribute offshoots of premium varieties: planting is the moment to act on water.</a:t>
+            </a:r>
+            <a:endParaRPr lang="en-US" sz="1400" dirty="0"/>
+          </a:p>
           <a:p>
             <a:pPr algn="l" marL="342900" indent="-342900">
               <a:lnSpc>
                 <a:spcPct val="122000"/>
               </a:lnSpc>
               <a:spcAft>
-                <a:spcPts val="1000"/>
+                <a:spcPts val="1100"/>
               </a:spcAft>
               <a:buSzPct val="100000"/>
               <a:buChar char="•"/>
             </a:pPr>
             <a:r>
-              <a:rPr lang="en-US" sz="1350" dirty="0">
+              <a:rPr lang="en-US" sz="1400" dirty="0">
                 <a:solidFill>
                   <a:srgbClr val="364239"/>
                 </a:solidFill>
@@ -9392,156 +10842,15 @@
                 <a:ea typeface="Calibri" pitchFamily="34" charset="-122"/>
                 <a:cs typeface="Calibri" pitchFamily="34" charset="-120"/>
               </a:rPr>
-              <a:t>A micro-dose fertiliser of amino acids, nitrogen, phosphorus and potassium, made from renewable resources.</a:t>
-            </a:r>
-            <a:endParaRPr lang="en-US" sz="1350" dirty="0"/>
-          </a:p>
-          <a:p>
-            <a:pPr algn="l" marL="342900" indent="-342900">
-              <a:lnSpc>
-                <a:spcPct val="122000"/>
-              </a:lnSpc>
-              <a:spcAft>
-                <a:spcPts val="1000"/>
-              </a:spcAft>
-              <a:buSzPct val="100000"/>
-              <a:buChar char="•"/>
-            </a:pPr>
-            <a:r>
-              <a:rPr lang="en-US" sz="1350" dirty="0">
-                <a:solidFill>
-                  <a:srgbClr val="364239"/>
-                </a:solidFill>
-                <a:latin typeface="Calibri" pitchFamily="34" charset="0"/>
-                <a:ea typeface="Calibri" pitchFamily="34" charset="-122"/>
-                <a:cs typeface="Calibri" pitchFamily="34" charset="-120"/>
-              </a:rPr>
-              <a:t>Non-chelating: it does not strip the clay-humus complex and adds neither salinity nor nitrate load.</a:t>
-            </a:r>
-            <a:endParaRPr lang="en-US" sz="1350" dirty="0"/>
-          </a:p>
-          <a:p>
-            <a:pPr algn="l" marL="342900" indent="-342900">
-              <a:lnSpc>
-                <a:spcPct val="122000"/>
-              </a:lnSpc>
-              <a:spcAft>
-                <a:spcPts val="1000"/>
-              </a:spcAft>
-              <a:buSzPct val="100000"/>
-              <a:buChar char="•"/>
-            </a:pPr>
-            <a:r>
-              <a:rPr lang="en-US" sz="1350" dirty="0">
-                <a:solidFill>
-                  <a:srgbClr val="364239"/>
-                </a:solidFill>
-                <a:latin typeface="Calibri" pitchFamily="34" charset="0"/>
-                <a:ea typeface="Calibri" pitchFamily="34" charset="-122"/>
-                <a:cs typeface="Calibri" pitchFamily="34" charset="-120"/>
-              </a:rPr>
-              <a:t>Certified SOHISCERT and EU Bio, in use in 60 countries — an entry condition for premium buyers.</a:t>
-            </a:r>
-            <a:endParaRPr lang="en-US" sz="1350" dirty="0"/>
-          </a:p>
-          <a:p>
-            <a:pPr algn="l" marL="342900" indent="-342900">
-              <a:lnSpc>
-                <a:spcPct val="122000"/>
-              </a:lnSpc>
-              <a:spcAft>
-                <a:spcPts val="1000"/>
-              </a:spcAft>
-              <a:buSzPct val="100000"/>
-              <a:buChar char="•"/>
-            </a:pPr>
-            <a:r>
-              <a:rPr lang="en-US" sz="1350" dirty="0">
-                <a:solidFill>
-                  <a:srgbClr val="364239"/>
-                </a:solidFill>
-                <a:latin typeface="Calibri" pitchFamily="34" charset="0"/>
-                <a:ea typeface="Calibri" pitchFamily="34" charset="-122"/>
-                <a:cs typeface="Calibri" pitchFamily="34" charset="-120"/>
-              </a:rPr>
-              <a:t>1 to 4 bottles of 140 ml per hectare, compatible with existing fertigation equipment.</a:t>
-            </a:r>
-            <a:endParaRPr lang="en-US" sz="1350" dirty="0"/>
-          </a:p>
-        </p:txBody>
-      </p:sp>
-      <p:sp>
-        <p:nvSpPr>
-          <p:cNvPr id="8" name="Shape 6"/>
-          <p:cNvSpPr/>
-          <p:nvPr/>
-        </p:nvSpPr>
-        <p:spPr>
-          <a:xfrm>
-            <a:off x="594360" y="4846320"/>
-            <a:ext cx="11002975" cy="960120"/>
-          </a:xfrm>
-          <a:prstGeom prst="roundRect">
-            <a:avLst>
-              <a:gd name="adj" fmla="val 7619"/>
-            </a:avLst>
-          </a:prstGeom>
-          <a:solidFill>
-            <a:srgbClr val="F2F1E8"/>
-          </a:solidFill>
-          <a:ln w="9525">
-            <a:solidFill>
-              <a:srgbClr val="E0DFD0"/>
-            </a:solidFill>
-            <a:prstDash val="solid"/>
-          </a:ln>
-        </p:spPr>
-      </p:sp>
-      <p:sp>
-        <p:nvSpPr>
-          <p:cNvPr id="9" name="Text 7"/>
-          <p:cNvSpPr txBox="1"/>
-          <p:nvPr/>
-        </p:nvSpPr>
-        <p:spPr>
-          <a:xfrm>
-            <a:off x="822960" y="4983480"/>
-            <a:ext cx="10545775" cy="713232"/>
-          </a:xfrm>
-          <a:prstGeom prst="rect">
-            <a:avLst/>
-          </a:prstGeom>
-          <a:noFill/>
-          <a:ln/>
-        </p:spPr>
-        <p:txBody>
-          <a:bodyPr wrap="square" lIns="0" tIns="0" rIns="0" bIns="0" rtlCol="0" anchor="t"/>
-          <a:lstStyle/>
-          <a:p>
-            <a:pPr algn="l" indent="0" marL="0">
-              <a:lnSpc>
-                <a:spcPct val="118000"/>
-              </a:lnSpc>
-              <a:buNone/>
-            </a:pPr>
-            <a:r>
-              <a:rPr lang="en-US" sz="1100" dirty="0">
-                <a:solidFill>
-                  <a:srgbClr val="6F7D71"/>
-                </a:solidFill>
-                <a:latin typeface="Calibri" pitchFamily="34" charset="0"/>
-                <a:ea typeface="Calibri" pitchFamily="34" charset="-122"/>
-                <a:cs typeface="Calibri" pitchFamily="34" charset="-120"/>
-              </a:rPr>
-              <a:t>The two products are sold separately but were designed to reinforce each other: the hydro-retainer extends how long water stays available, the fertiliser puts that water to work without degrading the soil.</a:t>
-            </a:r>
-            <a:endParaRPr lang="en-US" sz="1100" dirty="0"/>
-          </a:p>
-        </p:txBody>
-      </p:sp>
-      <p:sp>
-        <p:nvSpPr>
-          <p:cNvPr id="10" name="Text 8"/>
+              <a:t>EVERGREEN® placed in the planting pit holds irrigation water around the roots through the first hot season.</a:t>
+            </a:r>
+            <a:endParaRPr lang="en-US" sz="1400" dirty="0"/>
+          </a:p>
+        </p:txBody>
+      </p:sp>
+      <p:sp>
+        <p:nvSpPr>
+          <p:cNvPr id="6" name="Text 3"/>
           <p:cNvSpPr txBox="1"/>
           <p:nvPr/>
         </p:nvSpPr>
@@ -9582,7 +10891,7 @@
       </p:sp>
       <p:sp>
         <p:nvSpPr>
-          <p:cNvPr id="11" name="Text 9"/>
+          <p:cNvPr id="7" name="Text 4"/>
           <p:cNvSpPr txBox="1"/>
           <p:nvPr/>
         </p:nvSpPr>
@@ -9686,7 +10995,7 @@
                 <a:ea typeface="Calibri" pitchFamily="34" charset="-122"/>
                 <a:cs typeface="Calibri" pitchFamily="34" charset="-120"/>
               </a:rPr>
-              <a:t>The rest of the range</a:t>
+              <a:t>OUR RESPONSE</a:t>
             </a:r>
             <a:endParaRPr lang="en-US" sz="1150" dirty="0"/>
           </a:p>
@@ -9725,7 +11034,7 @@
                 <a:ea typeface="Cambria" pitchFamily="34" charset="-122"/>
                 <a:cs typeface="Cambria" pitchFamily="34" charset="-120"/>
               </a:rPr>
-              <a:t>Protecting crops, holding soils</a:t>
+              <a:t>Two technologies, two different constraints</a:t>
             </a:r>
             <a:endParaRPr lang="en-US" sz="3000" dirty="0"/>
           </a:p>
@@ -9764,7 +11073,7 @@
                 <a:ea typeface="Cambria" pitchFamily="34" charset="-122"/>
                 <a:cs typeface="Cambria" pitchFamily="34" charset="-120"/>
               </a:rPr>
-              <a:t>NAPEMA® — protection without residue</a:t>
+              <a:t>EVERGREEN® — holding the water</a:t>
             </a:r>
             <a:endParaRPr lang="en-US" sz="1600" dirty="0"/>
           </a:p>
@@ -9810,7 +11119,7 @@
                 <a:ea typeface="Calibri" pitchFamily="34" charset="-122"/>
                 <a:cs typeface="Calibri" pitchFamily="34" charset="-120"/>
               </a:rPr>
-              <a:t>Controls diseases, parasites, fungi and pests, with no synthetic molecule.</a:t>
+              <a:t>A potassium-based hydro-retainer placed in the root zone at planting or at replant.</a:t>
             </a:r>
             <a:endParaRPr lang="en-US" sz="1350" dirty="0"/>
           </a:p>
@@ -9834,7 +11143,7 @@
                 <a:ea typeface="Calibri" pitchFamily="34" charset="-122"/>
                 <a:cs typeface="Calibri" pitchFamily="34" charset="-120"/>
               </a:rPr>
-              <a:t>Foliar and root spraying, working both preventively and curatively.</a:t>
+              <a:t>It captures irrigation water and releases it back to the plant gradually, removing water stress through the hottest months.</a:t>
             </a:r>
             <a:endParaRPr lang="en-US" sz="1350" dirty="0"/>
           </a:p>
@@ -9858,7 +11167,7 @@
                 <a:ea typeface="Calibri" pitchFamily="34" charset="-122"/>
                 <a:cs typeface="Calibri" pitchFamily="34" charset="-120"/>
               </a:rPr>
-              <a:t>No residue in soil, plant or air: pollinators and beneficial insects are spared.</a:t>
+              <a:t>Absorbs on the order of 300 times its own weight; useful effect of 3 to 4 years in the soil.</a:t>
             </a:r>
             <a:endParaRPr lang="en-US" sz="1350" dirty="0"/>
           </a:p>
@@ -9882,7 +11191,7 @@
                 <a:ea typeface="Calibri" pitchFamily="34" charset="-122"/>
                 <a:cs typeface="Calibri" pitchFamily="34" charset="-120"/>
               </a:rPr>
-              <a:t>Formulated for one precise problem: mealybug, citrus greening (HLB), nematodes.</a:t>
+              <a:t>Breaks down by 20 to 25 % a year, with no build-up and no risk of overdosing.</a:t>
             </a:r>
             <a:endParaRPr lang="en-US" sz="1350" dirty="0"/>
           </a:p>
@@ -9921,7 +11230,7 @@
                 <a:ea typeface="Cambria" pitchFamily="34" charset="-122"/>
                 <a:cs typeface="Cambria" pitchFamily="34" charset="-120"/>
               </a:rPr>
-              <a:t>Paulownia ALTIFOLIA® — the tree for hot regions</a:t>
+              <a:t>ECOFERT® — feeding without depleting</a:t>
             </a:r>
             <a:endParaRPr lang="en-US" sz="1600" dirty="0"/>
           </a:p>
@@ -9967,7 +11276,7 @@
                 <a:ea typeface="Calibri" pitchFamily="34" charset="-122"/>
                 <a:cs typeface="Calibri" pitchFamily="34" charset="-120"/>
               </a:rPr>
-              <a:t>13 to 15 m in six to eight years, with a wide trunk.</a:t>
+              <a:t>A micro-dose fertiliser of amino acids, nitrogen, phosphorus and potassium, made from renewable resources.</a:t>
             </a:r>
             <a:endParaRPr lang="en-US" sz="1350" dirty="0"/>
           </a:p>
@@ -9991,7 +11300,7 @@
                 <a:ea typeface="Calibri" pitchFamily="34" charset="-122"/>
                 <a:cs typeface="Calibri" pitchFamily="34" charset="-120"/>
               </a:rPr>
-              <a:t>Combined with 100 g of EVERGREEN® per plant, irrigation needs drop by 50%.</a:t>
+              <a:t>Non-chelating: it does not strip the clay-humus complex and adds neither salinity nor nitrate load.</a:t>
             </a:r>
             <a:endParaRPr lang="en-US" sz="1350" dirty="0"/>
           </a:p>
@@ -10015,7 +11324,7 @@
                 <a:ea typeface="Calibri" pitchFamily="34" charset="-122"/>
                 <a:cs typeface="Calibri" pitchFamily="34" charset="-120"/>
               </a:rPr>
-              <a:t>Withstands −25 °C to +45 °C; the wood only ignites above 426 °C.</a:t>
+              <a:t>Certified SOHISCERT and EU Bio, in use in 60 countries — an entry condition for premium buyers.</a:t>
             </a:r>
             <a:endParaRPr lang="en-US" sz="1350" dirty="0"/>
           </a:p>
@@ -10039,7 +11348,7 @@
                 <a:ea typeface="Calibri" pitchFamily="34" charset="-122"/>
                 <a:cs typeface="Calibri" pitchFamily="34" charset="-120"/>
               </a:rPr>
-              <a:t>Windbreak, protection against soil erosion, 400 to 700 kg of honey per hectare.</a:t>
+              <a:t>1 to 4 bottles of 140 ml per hectare, compatible with existing fertigation equipment.</a:t>
             </a:r>
             <a:endParaRPr lang="en-US" sz="1350" dirty="0"/>
           </a:p>
@@ -10108,7 +11417,7 @@
                 <a:ea typeface="Calibri" pitchFamily="34" charset="-122"/>
                 <a:cs typeface="Calibri" pitchFamily="34" charset="-120"/>
               </a:rPr>
-              <a:t>Plants delivered potted (25 to 30 cm), certified disease-free and replaced under warranty in case of loss. First harvest at the end of year six, with wood valued at around €400 to €450 per m³.</a:t>
+              <a:t>The two products are sold separately but were designed to reinforce each other: the hydro-retainer extends how long water stays available, the fertiliser puts that water to work without degrading the soil.</a:t>
             </a:r>
             <a:endParaRPr lang="en-US" sz="1100" dirty="0"/>
           </a:p>

--- a/public/documents/countries/oman.pptx
+++ b/public/documents/countries/oman.pptx
@@ -122,7 +122,7 @@
 </p:presentation>
 </file>
 
-<file path=ppt/charts/chart76.xml><?xml version="1.0" encoding="utf-8"?>
+<file path=ppt/charts/chart78.xml><?xml version="1.0" encoding="utf-8"?>
 <c:chartSpace xmlns:c="http://schemas.openxmlformats.org/drawingml/2006/chart" xmlns:a="http://schemas.openxmlformats.org/drawingml/2006/main" xmlns:r="http://schemas.openxmlformats.org/officeDocument/2006/relationships">
   <c:date1904 val="0"/>
   <c:roundedCorners val="1"/>
@@ -381,7 +381,7 @@
 </c:chartSpace>
 </file>
 
-<file path=ppt/charts/chart77.xml><?xml version="1.0" encoding="utf-8"?>
+<file path=ppt/charts/chart79.xml><?xml version="1.0" encoding="utf-8"?>
 <c:chartSpace xmlns:c="http://schemas.openxmlformats.org/drawingml/2006/chart" xmlns:a="http://schemas.openxmlformats.org/drawingml/2006/main" xmlns:r="http://schemas.openxmlformats.org/officeDocument/2006/relationships">
   <c:date1904 val="0"/>
   <c:roundedCorners val="1"/>
@@ -626,7 +626,7 @@
 </c:chartSpace>
 </file>
 
-<file path=ppt/charts/chart78.xml><?xml version="1.0" encoding="utf-8"?>
+<file path=ppt/charts/chart80.xml><?xml version="1.0" encoding="utf-8"?>
 <c:chartSpace xmlns:c="http://schemas.openxmlformats.org/drawingml/2006/chart" xmlns:a="http://schemas.openxmlformats.org/drawingml/2006/main" xmlns:r="http://schemas.openxmlformats.org/officeDocument/2006/relationships">
   <c:date1904 val="0"/>
   <c:roundedCorners val="1"/>
@@ -917,7 +917,7 @@
 </c:chartSpace>
 </file>
 
-<file path=ppt/charts/chart79.xml><?xml version="1.0" encoding="utf-8"?>
+<file path=ppt/charts/chart81.xml><?xml version="1.0" encoding="utf-8"?>
 <c:chartSpace xmlns:c="http://schemas.openxmlformats.org/drawingml/2006/chart" xmlns:a="http://schemas.openxmlformats.org/drawingml/2006/main" xmlns:r="http://schemas.openxmlformats.org/officeDocument/2006/relationships">
   <c:date1904 val="0"/>
   <c:roundedCorners val="1"/>
@@ -3443,7 +3443,7 @@
       </p:sp>
       <p:pic>
         <p:nvPicPr>
-          <p:cNvPr id="5" name="Image 1" descr="/workspace/scratch/50eb4f7d8e13/green-solutions-web/public/images/logo-icon.png">    </p:cNvPr>
+          <p:cNvPr id="5" name="Image 1" descr="/home/claude/green-solutions-web/public/images/logo-icon.png">    </p:cNvPr>
           <p:cNvPicPr>
             <a:picLocks noChangeAspect="1"/>
           </p:cNvPicPr>
@@ -3467,7 +3467,7 @@
       </p:pic>
       <p:pic>
         <p:nvPicPr>
-          <p:cNvPr id="6" name="Image 2" descr="/workspace/scratch/50eb4f7d8e13/green-solutions-web/scripts/dossiers/drapeaux/oman.png">    </p:cNvPr>
+          <p:cNvPr id="6" name="Image 2" descr="/home/claude/green-solutions-web/scripts/dossiers/drapeaux/oman.png">    </p:cNvPr>
           <p:cNvPicPr>
             <a:picLocks noChangeAspect="1"/>
           </p:cNvPicPr>
@@ -7733,7 +7733,7 @@
                 <a:ea typeface="Calibri" pitchFamily="34" charset="-122"/>
                 <a:cs typeface="Calibri" pitchFamily="34" charset="-120"/>
               </a:rPr>
-              <a:t>contact@evergreen-ecosorb.com · Green Solutions Groupe AIM SA, 46, route de la Condémine, 1475 Forel, Switzerland</a:t>
+              <a:t>contact@green-solutions-group.com · Green Solutions Groupe AIM SA, 46, route de la Condémine, 1475 Forel, Switzerland</a:t>
             </a:r>
             <a:endParaRPr lang="en-US" sz="1400" dirty="0"/>
           </a:p>
@@ -7741,7 +7741,7 @@
       </p:sp>
       <p:pic>
         <p:nvPicPr>
-          <p:cNvPr id="6" name="Image 1" descr="/workspace/scratch/50eb4f7d8e13/green-solutions-web/scripts/dossiers/sceau-aim-clair.png">    </p:cNvPr>
+          <p:cNvPr id="6" name="Image 1" descr="/home/claude/green-solutions-web/scripts/dossiers/sceau-aim-clair.png">    </p:cNvPr>
           <p:cNvPicPr>
             <a:picLocks noChangeAspect="1"/>
           </p:cNvPicPr>
